--- a/Lectures/Week 10 -- Evaluation of Transcript assemblies.pptx
+++ b/Lectures/Week 10 -- Evaluation of Transcript assemblies.pptx
@@ -5,7 +5,7 @@
     <p:sldMasterId id="2147483648" r:id="rId1"/>
   </p:sldMasterIdLst>
   <p:notesMasterIdLst>
-    <p:notesMasterId r:id="rId25"/>
+    <p:notesMasterId r:id="rId26"/>
   </p:notesMasterIdLst>
   <p:sldIdLst>
     <p:sldId id="272" r:id="rId2"/>
@@ -13,24 +13,25 @@
     <p:sldId id="572" r:id="rId4"/>
     <p:sldId id="831" r:id="rId5"/>
     <p:sldId id="824" r:id="rId6"/>
-    <p:sldId id="832" r:id="rId7"/>
-    <p:sldId id="887" r:id="rId8"/>
-    <p:sldId id="834" r:id="rId9"/>
-    <p:sldId id="835" r:id="rId10"/>
-    <p:sldId id="836" r:id="rId11"/>
-    <p:sldId id="883" r:id="rId12"/>
-    <p:sldId id="837" r:id="rId13"/>
-    <p:sldId id="838" r:id="rId14"/>
-    <p:sldId id="839" r:id="rId15"/>
-    <p:sldId id="840" r:id="rId16"/>
-    <p:sldId id="842" r:id="rId17"/>
-    <p:sldId id="844" r:id="rId18"/>
-    <p:sldId id="845" r:id="rId19"/>
-    <p:sldId id="843" r:id="rId20"/>
-    <p:sldId id="846" r:id="rId21"/>
-    <p:sldId id="886" r:id="rId22"/>
-    <p:sldId id="884" r:id="rId23"/>
-    <p:sldId id="885" r:id="rId24"/>
+    <p:sldId id="888" r:id="rId7"/>
+    <p:sldId id="832" r:id="rId8"/>
+    <p:sldId id="887" r:id="rId9"/>
+    <p:sldId id="834" r:id="rId10"/>
+    <p:sldId id="835" r:id="rId11"/>
+    <p:sldId id="836" r:id="rId12"/>
+    <p:sldId id="883" r:id="rId13"/>
+    <p:sldId id="837" r:id="rId14"/>
+    <p:sldId id="838" r:id="rId15"/>
+    <p:sldId id="839" r:id="rId16"/>
+    <p:sldId id="840" r:id="rId17"/>
+    <p:sldId id="842" r:id="rId18"/>
+    <p:sldId id="844" r:id="rId19"/>
+    <p:sldId id="845" r:id="rId20"/>
+    <p:sldId id="843" r:id="rId21"/>
+    <p:sldId id="846" r:id="rId22"/>
+    <p:sldId id="886" r:id="rId23"/>
+    <p:sldId id="884" r:id="rId24"/>
+    <p:sldId id="885" r:id="rId25"/>
   </p:sldIdLst>
   <p:sldSz cx="12192000" cy="6858000"/>
   <p:notesSz cx="6858000" cy="9144000"/>
@@ -151,7 +152,7 @@
 <file path=ppt/revisionInfo.xml><?xml version="1.0" encoding="utf-8"?>
 <p1510:revInfo xmlns:a="http://schemas.openxmlformats.org/drawingml/2006/main" xmlns:r="http://schemas.openxmlformats.org/officeDocument/2006/relationships" xmlns:p1510="http://schemas.microsoft.com/office/powerpoint/2015/10/main">
   <p1510:revLst>
-    <p1510:client id="{79D60A67-CAF6-45C9-9EE4-04BFFB2E4F25}" v="49" dt="2026-10-20T18:25:48.844"/>
+    <p1510:client id="{CE72F1D9-0B96-4765-ABAC-5A7B3984C109}" v="51" dt="2026-10-28T17:41:18.880"/>
   </p1510:revLst>
 </p1510:revInfo>
 </file>
@@ -160,186 +161,93 @@
 <pc:chgInfo xmlns:a="http://schemas.openxmlformats.org/drawingml/2006/main" xmlns:r="http://schemas.openxmlformats.org/officeDocument/2006/relationships" xmlns:ac="http://schemas.microsoft.com/office/drawing/2013/main/command" xmlns:pc="http://schemas.microsoft.com/office/powerpoint/2013/main/command">
   <pc:docChgLst>
     <pc:chgData name="Aleksey Zimin" userId="7f2637d0bc515791" providerId="LiveId" clId="{5F359FD6-B8E9-41DA-90EC-0BA4FD0F3073}"/>
-    <pc:docChg chg="undo custSel addSld delSld modSld sldOrd">
-      <pc:chgData name="Aleksey Zimin" userId="7f2637d0bc515791" providerId="LiveId" clId="{5F359FD6-B8E9-41DA-90EC-0BA4FD0F3073}" dt="2026-10-20T18:25:48.843" v="1524" actId="20577"/>
+    <pc:docChg chg="custSel addSld modSld">
+      <pc:chgData name="Aleksey Zimin" userId="7f2637d0bc515791" providerId="LiveId" clId="{5F359FD6-B8E9-41DA-90EC-0BA4FD0F3073}" dt="2026-10-28T17:42:50.692" v="849" actId="20577"/>
       <pc:docMkLst>
         <pc:docMk/>
       </pc:docMkLst>
-      <pc:sldChg chg="del">
-        <pc:chgData name="Aleksey Zimin" userId="7f2637d0bc515791" providerId="LiveId" clId="{5F359FD6-B8E9-41DA-90EC-0BA4FD0F3073}" dt="2026-10-20T18:24:06.195" v="1448" actId="2696"/>
+      <pc:sldChg chg="addSp delSp modSp mod modAnim">
+        <pc:chgData name="Aleksey Zimin" userId="7f2637d0bc515791" providerId="LiveId" clId="{5F359FD6-B8E9-41DA-90EC-0BA4FD0F3073}" dt="2026-10-28T17:39:31.556" v="743"/>
         <pc:sldMkLst>
           <pc:docMk/>
-          <pc:sldMk cId="2068933949" sldId="823"/>
+          <pc:sldMk cId="1248438669" sldId="824"/>
         </pc:sldMkLst>
-      </pc:sldChg>
-      <pc:sldChg chg="del">
-        <pc:chgData name="Aleksey Zimin" userId="7f2637d0bc515791" providerId="LiveId" clId="{5F359FD6-B8E9-41DA-90EC-0BA4FD0F3073}" dt="2026-10-20T18:24:06.195" v="1448" actId="2696"/>
-        <pc:sldMkLst>
-          <pc:docMk/>
-          <pc:sldMk cId="2622166328" sldId="825"/>
-        </pc:sldMkLst>
-      </pc:sldChg>
-      <pc:sldChg chg="del">
-        <pc:chgData name="Aleksey Zimin" userId="7f2637d0bc515791" providerId="LiveId" clId="{5F359FD6-B8E9-41DA-90EC-0BA4FD0F3073}" dt="2026-10-20T18:24:06.195" v="1448" actId="2696"/>
-        <pc:sldMkLst>
-          <pc:docMk/>
-          <pc:sldMk cId="2174087718" sldId="826"/>
-        </pc:sldMkLst>
-      </pc:sldChg>
-      <pc:sldChg chg="del">
-        <pc:chgData name="Aleksey Zimin" userId="7f2637d0bc515791" providerId="LiveId" clId="{5F359FD6-B8E9-41DA-90EC-0BA4FD0F3073}" dt="2026-10-20T18:24:06.195" v="1448" actId="2696"/>
-        <pc:sldMkLst>
-          <pc:docMk/>
-          <pc:sldMk cId="14013305" sldId="827"/>
-        </pc:sldMkLst>
-      </pc:sldChg>
-      <pc:sldChg chg="del">
-        <pc:chgData name="Aleksey Zimin" userId="7f2637d0bc515791" providerId="LiveId" clId="{5F359FD6-B8E9-41DA-90EC-0BA4FD0F3073}" dt="2026-10-20T18:24:06.195" v="1448" actId="2696"/>
-        <pc:sldMkLst>
-          <pc:docMk/>
-          <pc:sldMk cId="2055598344" sldId="828"/>
-        </pc:sldMkLst>
-      </pc:sldChg>
-      <pc:sldChg chg="modSp del mod">
-        <pc:chgData name="Aleksey Zimin" userId="7f2637d0bc515791" providerId="LiveId" clId="{5F359FD6-B8E9-41DA-90EC-0BA4FD0F3073}" dt="2026-10-20T18:14:40.085" v="1192" actId="2696"/>
-        <pc:sldMkLst>
-          <pc:docMk/>
-          <pc:sldMk cId="1495454639" sldId="832"/>
-        </pc:sldMkLst>
-        <pc:spChg chg="mod">
-          <ac:chgData name="Aleksey Zimin" userId="7f2637d0bc515791" providerId="LiveId" clId="{5F359FD6-B8E9-41DA-90EC-0BA4FD0F3073}" dt="2026-10-20T18:09:11.325" v="630" actId="20577"/>
+        <pc:spChg chg="add del mod">
+          <ac:chgData name="Aleksey Zimin" userId="7f2637d0bc515791" providerId="LiveId" clId="{5F359FD6-B8E9-41DA-90EC-0BA4FD0F3073}" dt="2026-10-28T17:27:53.212" v="156" actId="478"/>
           <ac:spMkLst>
             <pc:docMk/>
-            <pc:sldMk cId="1495454639" sldId="832"/>
-            <ac:spMk id="3" creationId="{72435F73-7EFD-DF06-380A-5766C516EF3C}"/>
+            <pc:sldMk cId="1248438669" sldId="824"/>
+            <ac:spMk id="3" creationId="{3BB23EBC-12D2-DEA9-75EB-A9D2577FC2B9}"/>
           </ac:spMkLst>
         </pc:spChg>
-      </pc:sldChg>
-      <pc:sldChg chg="add ord">
-        <pc:chgData name="Aleksey Zimin" userId="7f2637d0bc515791" providerId="LiveId" clId="{5F359FD6-B8E9-41DA-90EC-0BA4FD0F3073}" dt="2026-10-20T18:25:10.348" v="1481"/>
-        <pc:sldMkLst>
-          <pc:docMk/>
-          <pc:sldMk cId="4127514744" sldId="832"/>
-        </pc:sldMkLst>
-      </pc:sldChg>
-      <pc:sldChg chg="del">
-        <pc:chgData name="Aleksey Zimin" userId="7f2637d0bc515791" providerId="LiveId" clId="{5F359FD6-B8E9-41DA-90EC-0BA4FD0F3073}" dt="2026-10-20T18:14:03.942" v="1160" actId="47"/>
-        <pc:sldMkLst>
-          <pc:docMk/>
-          <pc:sldMk cId="3625668558" sldId="833"/>
-        </pc:sldMkLst>
-      </pc:sldChg>
-      <pc:sldChg chg="del">
-        <pc:chgData name="Aleksey Zimin" userId="7f2637d0bc515791" providerId="LiveId" clId="{5F359FD6-B8E9-41DA-90EC-0BA4FD0F3073}" dt="2026-10-20T18:18:10.818" v="1447" actId="2696"/>
-        <pc:sldMkLst>
-          <pc:docMk/>
-          <pc:sldMk cId="763290966" sldId="841"/>
-        </pc:sldMkLst>
-      </pc:sldChg>
-      <pc:sldChg chg="addSp delSp modSp new mod modAnim">
-        <pc:chgData name="Aleksey Zimin" userId="7f2637d0bc515791" providerId="LiveId" clId="{5F359FD6-B8E9-41DA-90EC-0BA4FD0F3073}" dt="2026-10-20T18:07:48.119" v="513"/>
-        <pc:sldMkLst>
-          <pc:docMk/>
-          <pc:sldMk cId="3983540213" sldId="884"/>
-        </pc:sldMkLst>
-        <pc:spChg chg="mod">
-          <ac:chgData name="Aleksey Zimin" userId="7f2637d0bc515791" providerId="LiveId" clId="{5F359FD6-B8E9-41DA-90EC-0BA4FD0F3073}" dt="2026-10-20T18:04:18.030" v="62" actId="1076"/>
+        <pc:spChg chg="add mod">
+          <ac:chgData name="Aleksey Zimin" userId="7f2637d0bc515791" providerId="LiveId" clId="{5F359FD6-B8E9-41DA-90EC-0BA4FD0F3073}" dt="2026-10-28T17:36:05.056" v="694" actId="27636"/>
           <ac:spMkLst>
             <pc:docMk/>
-            <pc:sldMk cId="3983540213" sldId="884"/>
-            <ac:spMk id="2" creationId="{35442D34-E2AD-0DFB-0C0A-D3F0E5D2306B}"/>
+            <pc:sldMk cId="1248438669" sldId="824"/>
+            <ac:spMk id="7" creationId="{4FBE7125-6198-264D-1FB2-291E2C8F2ADE}"/>
           </ac:spMkLst>
         </pc:spChg>
-        <pc:spChg chg="mod">
-          <ac:chgData name="Aleksey Zimin" userId="7f2637d0bc515791" providerId="LiveId" clId="{5F359FD6-B8E9-41DA-90EC-0BA4FD0F3073}" dt="2026-10-20T18:07:43.175" v="512" actId="27636"/>
-          <ac:spMkLst>
-            <pc:docMk/>
-            <pc:sldMk cId="3983540213" sldId="884"/>
-            <ac:spMk id="3" creationId="{ED3D7F42-F5E6-17B9-A02A-3D4341B8020C}"/>
-          </ac:spMkLst>
-        </pc:spChg>
-        <pc:picChg chg="add del mod">
-          <ac:chgData name="Aleksey Zimin" userId="7f2637d0bc515791" providerId="LiveId" clId="{5F359FD6-B8E9-41DA-90EC-0BA4FD0F3073}" dt="2026-10-20T18:07:39.628" v="510" actId="22"/>
+        <pc:picChg chg="del">
+          <ac:chgData name="Aleksey Zimin" userId="7f2637d0bc515791" providerId="LiveId" clId="{5F359FD6-B8E9-41DA-90EC-0BA4FD0F3073}" dt="2026-10-28T17:27:34.878" v="153" actId="478"/>
           <ac:picMkLst>
             <pc:docMk/>
-            <pc:sldMk cId="3983540213" sldId="884"/>
-            <ac:picMk id="6" creationId="{AAA8FA7D-C4EF-38B5-9DB8-32804DFA959E}"/>
+            <pc:sldMk cId="1248438669" sldId="824"/>
+            <ac:picMk id="5" creationId="{5413609A-1B79-8C95-DF04-74C5B41AFF97}"/>
+          </ac:picMkLst>
+        </pc:picChg>
+        <pc:picChg chg="add mod">
+          <ac:chgData name="Aleksey Zimin" userId="7f2637d0bc515791" providerId="LiveId" clId="{5F359FD6-B8E9-41DA-90EC-0BA4FD0F3073}" dt="2026-10-28T17:36:15.899" v="696" actId="1076"/>
+          <ac:picMkLst>
+            <pc:docMk/>
+            <pc:sldMk cId="1248438669" sldId="824"/>
+            <ac:picMk id="9" creationId="{8A0E811A-7FF3-C624-B8E7-E241DBBF2B90}"/>
+          </ac:picMkLst>
+        </pc:picChg>
+        <pc:picChg chg="add mod">
+          <ac:chgData name="Aleksey Zimin" userId="7f2637d0bc515791" providerId="LiveId" clId="{5F359FD6-B8E9-41DA-90EC-0BA4FD0F3073}" dt="2026-10-28T17:36:12.906" v="695" actId="1076"/>
+          <ac:picMkLst>
+            <pc:docMk/>
+            <pc:sldMk cId="1248438669" sldId="824"/>
+            <ac:picMk id="11" creationId="{B9AE46AE-862F-4E81-37DE-3639AB945A3A}"/>
+          </ac:picMkLst>
+        </pc:picChg>
+        <pc:picChg chg="add mod">
+          <ac:chgData name="Aleksey Zimin" userId="7f2637d0bc515791" providerId="LiveId" clId="{5F359FD6-B8E9-41DA-90EC-0BA4FD0F3073}" dt="2026-10-28T17:35:58.379" v="691" actId="1076"/>
+          <ac:picMkLst>
+            <pc:docMk/>
+            <pc:sldMk cId="1248438669" sldId="824"/>
+            <ac:picMk id="13" creationId="{F23E1190-4032-0C5C-F35D-7AE20B14508B}"/>
           </ac:picMkLst>
         </pc:picChg>
       </pc:sldChg>
-      <pc:sldChg chg="addSp modSp add mod modAnim">
-        <pc:chgData name="Aleksey Zimin" userId="7f2637d0bc515791" providerId="LiveId" clId="{5F359FD6-B8E9-41DA-90EC-0BA4FD0F3073}" dt="2026-10-20T18:18:02.575" v="1446" actId="20577"/>
-        <pc:sldMkLst>
-          <pc:docMk/>
-          <pc:sldMk cId="4263504989" sldId="885"/>
-        </pc:sldMkLst>
-        <pc:spChg chg="mod">
-          <ac:chgData name="Aleksey Zimin" userId="7f2637d0bc515791" providerId="LiveId" clId="{5F359FD6-B8E9-41DA-90EC-0BA4FD0F3073}" dt="2026-10-20T18:18:02.575" v="1446" actId="20577"/>
-          <ac:spMkLst>
-            <pc:docMk/>
-            <pc:sldMk cId="4263504989" sldId="885"/>
-            <ac:spMk id="3" creationId="{22D4979A-804B-EBAB-F47A-9D9DD295BBEB}"/>
-          </ac:spMkLst>
-        </pc:spChg>
-        <pc:picChg chg="add mod">
-          <ac:chgData name="Aleksey Zimin" userId="7f2637d0bc515791" providerId="LiveId" clId="{5F359FD6-B8E9-41DA-90EC-0BA4FD0F3073}" dt="2026-10-20T18:08:28.580" v="587" actId="1076"/>
-          <ac:picMkLst>
-            <pc:docMk/>
-            <pc:sldMk cId="4263504989" sldId="885"/>
-            <ac:picMk id="6" creationId="{E0ED68D6-E017-1944-A55A-CA7281EC5351}"/>
-          </ac:picMkLst>
-        </pc:picChg>
-      </pc:sldChg>
-      <pc:sldChg chg="modSp add del mod modAnim">
-        <pc:chgData name="Aleksey Zimin" userId="7f2637d0bc515791" providerId="LiveId" clId="{5F359FD6-B8E9-41DA-90EC-0BA4FD0F3073}" dt="2026-10-20T18:14:40.085" v="1192" actId="2696"/>
-        <pc:sldMkLst>
-          <pc:docMk/>
-          <pc:sldMk cId="93090143" sldId="886"/>
-        </pc:sldMkLst>
-        <pc:spChg chg="mod">
-          <ac:chgData name="Aleksey Zimin" userId="7f2637d0bc515791" providerId="LiveId" clId="{5F359FD6-B8E9-41DA-90EC-0BA4FD0F3073}" dt="2026-10-20T18:11:48.716" v="1045" actId="20577"/>
-          <ac:spMkLst>
-            <pc:docMk/>
-            <pc:sldMk cId="93090143" sldId="886"/>
-            <ac:spMk id="3" creationId="{CFC85884-4292-6FC4-A5E8-05C7B462C820}"/>
-          </ac:spMkLst>
-        </pc:spChg>
-      </pc:sldChg>
-      <pc:sldChg chg="modSp add mod">
-        <pc:chgData name="Aleksey Zimin" userId="7f2637d0bc515791" providerId="LiveId" clId="{5F359FD6-B8E9-41DA-90EC-0BA4FD0F3073}" dt="2026-10-20T18:25:48.843" v="1524" actId="20577"/>
-        <pc:sldMkLst>
-          <pc:docMk/>
-          <pc:sldMk cId="2517986677" sldId="886"/>
-        </pc:sldMkLst>
-        <pc:spChg chg="mod">
-          <ac:chgData name="Aleksey Zimin" userId="7f2637d0bc515791" providerId="LiveId" clId="{5F359FD6-B8E9-41DA-90EC-0BA4FD0F3073}" dt="2026-10-20T18:24:58.404" v="1479" actId="20577"/>
-          <ac:spMkLst>
-            <pc:docMk/>
-            <pc:sldMk cId="2517986677" sldId="886"/>
-            <ac:spMk id="2" creationId="{B217F9F4-05DE-2A3A-F675-585F77D5D4AF}"/>
-          </ac:spMkLst>
-        </pc:spChg>
-        <pc:spChg chg="mod">
-          <ac:chgData name="Aleksey Zimin" userId="7f2637d0bc515791" providerId="LiveId" clId="{5F359FD6-B8E9-41DA-90EC-0BA4FD0F3073}" dt="2026-10-20T18:25:48.843" v="1524" actId="20577"/>
-          <ac:spMkLst>
-            <pc:docMk/>
-            <pc:sldMk cId="2517986677" sldId="886"/>
-            <ac:spMk id="3" creationId="{CFC85884-4292-6FC4-A5E8-05C7B462C820}"/>
-          </ac:spMkLst>
-        </pc:spChg>
-      </pc:sldChg>
-      <pc:sldChg chg="modSp add mod ord">
-        <pc:chgData name="Aleksey Zimin" userId="7f2637d0bc515791" providerId="LiveId" clId="{5F359FD6-B8E9-41DA-90EC-0BA4FD0F3073}" dt="2026-10-20T18:14:26.319" v="1191" actId="20577"/>
+      <pc:sldChg chg="modSp mod">
+        <pc:chgData name="Aleksey Zimin" userId="7f2637d0bc515791" providerId="LiveId" clId="{5F359FD6-B8E9-41DA-90EC-0BA4FD0F3073}" dt="2026-10-28T17:42:50.692" v="849" actId="20577"/>
         <pc:sldMkLst>
           <pc:docMk/>
           <pc:sldMk cId="1808216714" sldId="887"/>
         </pc:sldMkLst>
         <pc:spChg chg="mod">
-          <ac:chgData name="Aleksey Zimin" userId="7f2637d0bc515791" providerId="LiveId" clId="{5F359FD6-B8E9-41DA-90EC-0BA4FD0F3073}" dt="2026-10-20T18:14:26.319" v="1191" actId="20577"/>
+          <ac:chgData name="Aleksey Zimin" userId="7f2637d0bc515791" providerId="LiveId" clId="{5F359FD6-B8E9-41DA-90EC-0BA4FD0F3073}" dt="2026-10-28T17:42:50.692" v="849" actId="20577"/>
           <ac:spMkLst>
             <pc:docMk/>
             <pc:sldMk cId="1808216714" sldId="887"/>
             <ac:spMk id="3" creationId="{DCA1204D-7970-ACB2-27DF-9650DE0A4466}"/>
+          </ac:spMkLst>
+        </pc:spChg>
+      </pc:sldChg>
+      <pc:sldChg chg="modSp add mod modAnim">
+        <pc:chgData name="Aleksey Zimin" userId="7f2637d0bc515791" providerId="LiveId" clId="{5F359FD6-B8E9-41DA-90EC-0BA4FD0F3073}" dt="2026-10-28T17:41:57.035" v="823" actId="20577"/>
+        <pc:sldMkLst>
+          <pc:docMk/>
+          <pc:sldMk cId="3756441050" sldId="888"/>
+        </pc:sldMkLst>
+        <pc:spChg chg="mod">
+          <ac:chgData name="Aleksey Zimin" userId="7f2637d0bc515791" providerId="LiveId" clId="{5F359FD6-B8E9-41DA-90EC-0BA4FD0F3073}" dt="2026-10-28T17:41:57.035" v="823" actId="20577"/>
+          <ac:spMkLst>
+            <pc:docMk/>
+            <pc:sldMk cId="3756441050" sldId="888"/>
+            <ac:spMk id="3" creationId="{B4B53EB6-1A0E-1499-57CF-08AE4F8261EF}"/>
           </ac:spMkLst>
         </pc:spChg>
       </pc:sldChg>
@@ -430,7 +338,7 @@
           <a:p>
             <a:fld id="{78C61B90-1233-4265-A8E1-4CB85DE126FB}" type="datetimeFigureOut">
               <a:rPr lang="en-US" smtClean="0"/>
-              <a:t>10/20/2026</a:t>
+              <a:t>10/28/2026</a:t>
             </a:fld>
             <a:endParaRPr lang="en-US"/>
           </a:p>
@@ -762,7 +670,7 @@
           <a:p>
             <a:fld id="{A6313FD6-7C7B-4426-BFC4-490AC0CFBE05}" type="slidenum">
               <a:rPr lang="en-US" smtClean="0"/>
-              <a:t>16</a:t>
+              <a:t>17</a:t>
             </a:fld>
             <a:endParaRPr lang="en-US"/>
           </a:p>
@@ -870,7 +778,7 @@
           <a:p>
             <a:fld id="{A6313FD6-7C7B-4426-BFC4-490AC0CFBE05}" type="slidenum">
               <a:rPr lang="en-US" smtClean="0"/>
-              <a:t>17</a:t>
+              <a:t>18</a:t>
             </a:fld>
             <a:endParaRPr lang="en-US"/>
           </a:p>
@@ -978,7 +886,7 @@
           <a:p>
             <a:fld id="{A6313FD6-7C7B-4426-BFC4-490AC0CFBE05}" type="slidenum">
               <a:rPr lang="en-US" smtClean="0"/>
-              <a:t>18</a:t>
+              <a:t>19</a:t>
             </a:fld>
             <a:endParaRPr lang="en-US"/>
           </a:p>
@@ -1208,7 +1116,7 @@
           <a:p>
             <a:fld id="{E2773EFF-6084-460D-96FA-2FA787A98816}" type="datetime1">
               <a:rPr lang="en-US" smtClean="0"/>
-              <a:t>10/20/2026</a:t>
+              <a:t>10/28/2026</a:t>
             </a:fld>
             <a:endParaRPr lang="en-US"/>
           </a:p>
@@ -1461,7 +1369,7 @@
           <a:p>
             <a:fld id="{013692F8-B2BD-4E07-9A92-E5080B238DFA}" type="datetime1">
               <a:rPr lang="en-US" smtClean="0"/>
-              <a:t>10/20/2026</a:t>
+              <a:t>10/28/2026</a:t>
             </a:fld>
             <a:endParaRPr lang="en-US"/>
           </a:p>
@@ -1630,7 +1538,7 @@
           <a:p>
             <a:fld id="{82A88673-6F42-4090-A040-176AF0E6DEAE}" type="datetime1">
               <a:rPr lang="en-US" smtClean="0"/>
-              <a:t>10/20/2026</a:t>
+              <a:t>10/28/2026</a:t>
             </a:fld>
             <a:endParaRPr lang="en-US"/>
           </a:p>
@@ -1809,7 +1717,7 @@
           <a:p>
             <a:fld id="{EC715288-B7FB-4510-97B0-C840A6671DDD}" type="datetime1">
               <a:rPr lang="en-US" smtClean="0"/>
-              <a:t>10/20/2026</a:t>
+              <a:t>10/28/2026</a:t>
             </a:fld>
             <a:endParaRPr lang="en-US"/>
           </a:p>
@@ -2470,7 +2378,7 @@
           <a:p>
             <a:fld id="{93FF86A1-0F17-41D8-9FFA-9520AF33BFC6}" type="datetime1">
               <a:rPr lang="en-US" smtClean="0"/>
-              <a:t>10/20/2026</a:t>
+              <a:t>10/28/2026</a:t>
             </a:fld>
             <a:endParaRPr lang="en-US"/>
           </a:p>
@@ -2705,7 +2613,7 @@
           <a:p>
             <a:fld id="{E41692F4-087A-4F4C-9829-F340F0646973}" type="datetime1">
               <a:rPr lang="en-US" smtClean="0"/>
-              <a:t>10/20/2026</a:t>
+              <a:t>10/28/2026</a:t>
             </a:fld>
             <a:endParaRPr lang="en-US"/>
           </a:p>
@@ -2951,7 +2859,7 @@
           <a:p>
             <a:fld id="{93E80BFE-E826-4B70-BF6B-3710B05194AF}" type="datetime1">
               <a:rPr lang="en-US" smtClean="0"/>
-              <a:t>10/20/2026</a:t>
+              <a:t>10/28/2026</a:t>
             </a:fld>
             <a:endParaRPr lang="en-US"/>
           </a:p>
@@ -3237,7 +3145,7 @@
           <a:p>
             <a:fld id="{9C5182DA-5425-42F9-BDB8-0DBDA15B981E}" type="datetime1">
               <a:rPr lang="en-US" smtClean="0"/>
-              <a:t>10/20/2026</a:t>
+              <a:t>10/28/2026</a:t>
             </a:fld>
             <a:endParaRPr lang="en-US"/>
           </a:p>
@@ -3736,7 +3644,7 @@
           <a:p>
             <a:fld id="{131B7164-C7F7-495E-9D5F-43BBDEBECF81}" type="datetime1">
               <a:rPr lang="en-US" smtClean="0"/>
-              <a:t>10/20/2026</a:t>
+              <a:t>10/28/2026</a:t>
             </a:fld>
             <a:endParaRPr lang="en-US"/>
           </a:p>
@@ -3854,7 +3762,7 @@
           <a:p>
             <a:fld id="{2D6C5AB8-78AA-4DA3-952F-F5057D2DAAA5}" type="datetime1">
               <a:rPr lang="en-US" smtClean="0"/>
-              <a:t>10/20/2026</a:t>
+              <a:t>10/28/2026</a:t>
             </a:fld>
             <a:endParaRPr lang="en-US"/>
           </a:p>
@@ -3950,7 +3858,7 @@
           <a:p>
             <a:fld id="{41CCB869-D2D8-4282-A525-D63712C1B900}" type="datetime1">
               <a:rPr lang="en-US" smtClean="0"/>
-              <a:t>10/20/2026</a:t>
+              <a:t>10/28/2026</a:t>
             </a:fld>
             <a:endParaRPr lang="en-US"/>
           </a:p>
@@ -4226,7 +4134,7 @@
           <a:p>
             <a:fld id="{25A8CF58-29B0-4D31-BE55-D9C1F05848B7}" type="datetime1">
               <a:rPr lang="en-US" smtClean="0"/>
-              <a:t>10/20/2026</a:t>
+              <a:t>10/28/2026</a:t>
             </a:fld>
             <a:endParaRPr lang="en-US"/>
           </a:p>
@@ -4447,7 +4355,7 @@
           <a:p>
             <a:fld id="{8F08395F-151A-4402-98B5-C84E535B9AEF}" type="datetime1">
               <a:rPr lang="en-US" smtClean="0"/>
-              <a:t>10/20/2026</a:t>
+              <a:t>10/28/2026</a:t>
             </a:fld>
             <a:endParaRPr lang="en-US"/>
           </a:p>
@@ -4991,6 +4899,202 @@
           <p:cNvPr id="2" name="Title 1">
             <a:extLst>
               <a:ext uri="{FF2B5EF4-FFF2-40B4-BE49-F238E27FC236}">
+                <a16:creationId xmlns:a16="http://schemas.microsoft.com/office/drawing/2014/main" id="{81654682-97AD-1D8D-F2D1-E5F28017AE25}"/>
+              </a:ext>
+            </a:extLst>
+          </p:cNvPr>
+          <p:cNvSpPr>
+            <a:spLocks noGrp="1"/>
+          </p:cNvSpPr>
+          <p:nvPr>
+            <p:ph type="title"/>
+          </p:nvPr>
+        </p:nvSpPr>
+        <p:spPr/>
+        <p:txBody>
+          <a:bodyPr>
+            <a:normAutofit fontScale="90000"/>
+          </a:bodyPr>
+          <a:lstStyle/>
+          <a:p>
+            <a:r>
+              <a:rPr lang="en-US" dirty="0"/>
+              <a:t>Measures of correctness</a:t>
+            </a:r>
+          </a:p>
+        </p:txBody>
+      </p:sp>
+      <p:sp>
+        <p:nvSpPr>
+          <p:cNvPr id="3" name="Content Placeholder 2">
+            <a:extLst>
+              <a:ext uri="{FF2B5EF4-FFF2-40B4-BE49-F238E27FC236}">
+                <a16:creationId xmlns:a16="http://schemas.microsoft.com/office/drawing/2014/main" id="{FF3B533E-098A-AB07-5BD0-A182675FCD3A}"/>
+              </a:ext>
+            </a:extLst>
+          </p:cNvPr>
+          <p:cNvSpPr>
+            <a:spLocks noGrp="1"/>
+          </p:cNvSpPr>
+          <p:nvPr>
+            <p:ph idx="1"/>
+          </p:nvPr>
+        </p:nvSpPr>
+        <p:spPr>
+          <a:xfrm>
+            <a:off x="194359" y="1615790"/>
+            <a:ext cx="10972800" cy="3918803"/>
+          </a:xfrm>
+        </p:spPr>
+        <p:txBody>
+          <a:bodyPr/>
+          <a:lstStyle/>
+          <a:p>
+            <a:r>
+              <a:rPr lang="en-US" dirty="0"/>
+              <a:t>Sensitivity (Recall), Specificity </a:t>
+            </a:r>
+            <a:br>
+              <a:rPr lang="en-US" dirty="0"/>
+            </a:br>
+            <a:r>
+              <a:rPr lang="en-US" dirty="0"/>
+              <a:t>and Precision</a:t>
+            </a:r>
+          </a:p>
+          <a:p>
+            <a:r>
+              <a:rPr lang="en-US" dirty="0"/>
+              <a:t>Image credit: Wikipedia</a:t>
+            </a:r>
+          </a:p>
+        </p:txBody>
+      </p:sp>
+      <p:sp>
+        <p:nvSpPr>
+          <p:cNvPr id="4" name="Slide Number Placeholder 3">
+            <a:extLst>
+              <a:ext uri="{FF2B5EF4-FFF2-40B4-BE49-F238E27FC236}">
+                <a16:creationId xmlns:a16="http://schemas.microsoft.com/office/drawing/2014/main" id="{DA292D60-DA5E-14F9-0F07-0CB969D6706D}"/>
+              </a:ext>
+            </a:extLst>
+          </p:cNvPr>
+          <p:cNvSpPr>
+            <a:spLocks noGrp="1"/>
+          </p:cNvSpPr>
+          <p:nvPr>
+            <p:ph type="sldNum" sz="quarter" idx="12"/>
+          </p:nvPr>
+        </p:nvSpPr>
+        <p:spPr/>
+        <p:txBody>
+          <a:bodyPr/>
+          <a:lstStyle/>
+          <a:p>
+            <a:fld id="{B82CCC60-E8CD-4174-8B1A-7DF615B22EEF}" type="slidenum">
+              <a:rPr lang="en-US" smtClean="0"/>
+              <a:pPr/>
+              <a:t>10</a:t>
+            </a:fld>
+            <a:endParaRPr lang="en-US"/>
+          </a:p>
+        </p:txBody>
+      </p:sp>
+      <p:pic>
+        <p:nvPicPr>
+          <p:cNvPr id="5" name="Picture 4">
+            <a:extLst>
+              <a:ext uri="{FF2B5EF4-FFF2-40B4-BE49-F238E27FC236}">
+                <a16:creationId xmlns:a16="http://schemas.microsoft.com/office/drawing/2014/main" id="{F3340996-5475-CEF7-03C4-9CB816CECE89}"/>
+              </a:ext>
+            </a:extLst>
+          </p:cNvPr>
+          <p:cNvPicPr>
+            <a:picLocks noChangeAspect="1"/>
+          </p:cNvPicPr>
+          <p:nvPr/>
+        </p:nvPicPr>
+        <p:blipFill>
+          <a:blip r:embed="rId2"/>
+          <a:stretch>
+            <a:fillRect/>
+          </a:stretch>
+        </p:blipFill>
+        <p:spPr>
+          <a:xfrm>
+            <a:off x="8653094" y="-13861"/>
+            <a:ext cx="3538906" cy="6735337"/>
+          </a:xfrm>
+          <a:prstGeom prst="rect">
+            <a:avLst/>
+          </a:prstGeom>
+        </p:spPr>
+      </p:pic>
+      <p:pic>
+        <p:nvPicPr>
+          <p:cNvPr id="6" name="Picture 5">
+            <a:extLst>
+              <a:ext uri="{FF2B5EF4-FFF2-40B4-BE49-F238E27FC236}">
+                <a16:creationId xmlns:a16="http://schemas.microsoft.com/office/drawing/2014/main" id="{DEA48554-3C2E-C870-63A6-4244E37829CF}"/>
+              </a:ext>
+            </a:extLst>
+          </p:cNvPr>
+          <p:cNvPicPr>
+            <a:picLocks noChangeAspect="1"/>
+          </p:cNvPicPr>
+          <p:nvPr/>
+        </p:nvPicPr>
+        <p:blipFill>
+          <a:blip r:embed="rId3"/>
+          <a:stretch>
+            <a:fillRect/>
+          </a:stretch>
+        </p:blipFill>
+        <p:spPr>
+          <a:xfrm>
+            <a:off x="5216423" y="-13861"/>
+            <a:ext cx="3436671" cy="6858000"/>
+          </a:xfrm>
+          <a:prstGeom prst="rect">
+            <a:avLst/>
+          </a:prstGeom>
+        </p:spPr>
+      </p:pic>
+    </p:spTree>
+    <p:extLst>
+      <p:ext uri="{BB962C8B-B14F-4D97-AF65-F5344CB8AC3E}">
+        <p14:creationId xmlns:p14="http://schemas.microsoft.com/office/powerpoint/2010/main" val="664404228"/>
+      </p:ext>
+    </p:extLst>
+  </p:cSld>
+  <p:clrMapOvr>
+    <a:masterClrMapping/>
+  </p:clrMapOvr>
+</p:sld>
+</file>
+
+<file path=ppt/slides/slide11.xml><?xml version="1.0" encoding="utf-8"?>
+<p:sld xmlns:a="http://schemas.openxmlformats.org/drawingml/2006/main" xmlns:r="http://schemas.openxmlformats.org/officeDocument/2006/relationships" xmlns:p="http://schemas.openxmlformats.org/presentationml/2006/main">
+  <p:cSld>
+    <p:spTree>
+      <p:nvGrpSpPr>
+        <p:cNvPr id="1" name=""/>
+        <p:cNvGrpSpPr/>
+        <p:nvPr/>
+      </p:nvGrpSpPr>
+      <p:grpSpPr>
+        <a:xfrm>
+          <a:off x="0" y="0"/>
+          <a:ext cx="0" cy="0"/>
+          <a:chOff x="0" y="0"/>
+          <a:chExt cx="0" cy="0"/>
+        </a:xfrm>
+      </p:grpSpPr>
+      <p:sp>
+        <p:nvSpPr>
+          <p:cNvPr id="2" name="Title 1">
+            <a:extLst>
+              <a:ext uri="{FF2B5EF4-FFF2-40B4-BE49-F238E27FC236}">
                 <a16:creationId xmlns:a16="http://schemas.microsoft.com/office/drawing/2014/main" id="{C72832CB-7DC8-E108-E32D-654A3AC76EE4}"/>
               </a:ext>
             </a:extLst>
@@ -5040,7 +5144,7 @@
             <a:fld id="{B82CCC60-E8CD-4174-8B1A-7DF615B22EEF}" type="slidenum">
               <a:rPr lang="en-US" smtClean="0"/>
               <a:pPr/>
-              <a:t>10</a:t>
+              <a:t>11</a:t>
             </a:fld>
             <a:endParaRPr lang="en-US"/>
           </a:p>
@@ -5091,7 +5195,7 @@
 </p:sld>
 </file>
 
-<file path=ppt/slides/slide11.xml><?xml version="1.0" encoding="utf-8"?>
+<file path=ppt/slides/slide12.xml><?xml version="1.0" encoding="utf-8"?>
 <p:sld xmlns:a="http://schemas.openxmlformats.org/drawingml/2006/main" xmlns:r="http://schemas.openxmlformats.org/officeDocument/2006/relationships" xmlns:p="http://schemas.openxmlformats.org/presentationml/2006/main">
   <p:cSld>
     <p:spTree>
@@ -5276,7 +5380,7 @@
             <a:fld id="{B82CCC60-E8CD-4174-8B1A-7DF615B22EEF}" type="slidenum">
               <a:rPr lang="en-US" smtClean="0"/>
               <a:pPr/>
-              <a:t>11</a:t>
+              <a:t>12</a:t>
             </a:fld>
             <a:endParaRPr lang="en-US"/>
           </a:p>
@@ -6794,7 +6898,7 @@
 </p:sld>
 </file>
 
-<file path=ppt/slides/slide12.xml><?xml version="1.0" encoding="utf-8"?>
+<file path=ppt/slides/slide13.xml><?xml version="1.0" encoding="utf-8"?>
 <p:sld xmlns:a="http://schemas.openxmlformats.org/drawingml/2006/main" xmlns:r="http://schemas.openxmlformats.org/officeDocument/2006/relationships" xmlns:p="http://schemas.openxmlformats.org/presentationml/2006/main">
   <p:cSld>
     <p:spTree>
@@ -6865,7 +6969,7 @@
             <a:fld id="{B82CCC60-E8CD-4174-8B1A-7DF615B22EEF}" type="slidenum">
               <a:rPr lang="en-US" smtClean="0"/>
               <a:pPr/>
-              <a:t>12</a:t>
+              <a:t>13</a:t>
             </a:fld>
             <a:endParaRPr lang="en-US"/>
           </a:p>
@@ -11266,7 +11370,7 @@
 </p:sld>
 </file>
 
-<file path=ppt/slides/slide13.xml><?xml version="1.0" encoding="utf-8"?>
+<file path=ppt/slides/slide14.xml><?xml version="1.0" encoding="utf-8"?>
 <p:sld xmlns:a="http://schemas.openxmlformats.org/drawingml/2006/main" xmlns:r="http://schemas.openxmlformats.org/officeDocument/2006/relationships" xmlns:p="http://schemas.openxmlformats.org/presentationml/2006/main">
   <p:cSld>
     <p:spTree>
@@ -11337,7 +11441,7 @@
             <a:fld id="{B82CCC60-E8CD-4174-8B1A-7DF615B22EEF}" type="slidenum">
               <a:rPr lang="en-US" smtClean="0"/>
               <a:pPr/>
-              <a:t>13</a:t>
+              <a:t>14</a:t>
             </a:fld>
             <a:endParaRPr lang="en-US"/>
           </a:p>
@@ -14246,7 +14350,7 @@
 </p:sld>
 </file>
 
-<file path=ppt/slides/slide14.xml><?xml version="1.0" encoding="utf-8"?>
+<file path=ppt/slides/slide15.xml><?xml version="1.0" encoding="utf-8"?>
 <p:sld xmlns:a="http://schemas.openxmlformats.org/drawingml/2006/main" xmlns:r="http://schemas.openxmlformats.org/officeDocument/2006/relationships" xmlns:p="http://schemas.openxmlformats.org/presentationml/2006/main">
   <p:cSld>
     <p:spTree>
@@ -14317,7 +14421,7 @@
             <a:fld id="{B82CCC60-E8CD-4174-8B1A-7DF615B22EEF}" type="slidenum">
               <a:rPr lang="en-US" smtClean="0"/>
               <a:pPr/>
-              <a:t>14</a:t>
+              <a:t>15</a:t>
             </a:fld>
             <a:endParaRPr lang="en-US"/>
           </a:p>
@@ -18917,7 +19021,7 @@
 </p:sld>
 </file>
 
-<file path=ppt/slides/slide15.xml><?xml version="1.0" encoding="utf-8"?>
+<file path=ppt/slides/slide16.xml><?xml version="1.0" encoding="utf-8"?>
 <p:sld xmlns:a="http://schemas.openxmlformats.org/drawingml/2006/main" xmlns:r="http://schemas.openxmlformats.org/officeDocument/2006/relationships" xmlns:p="http://schemas.openxmlformats.org/presentationml/2006/main">
   <p:cSld>
     <p:spTree>
@@ -18997,7 +19101,7 @@
             <a:fld id="{B82CCC60-E8CD-4174-8B1A-7DF615B22EEF}" type="slidenum">
               <a:rPr lang="en-US" smtClean="0"/>
               <a:pPr/>
-              <a:t>15</a:t>
+              <a:t>16</a:t>
             </a:fld>
             <a:endParaRPr lang="en-US"/>
           </a:p>
@@ -20399,7 +20503,7 @@
 </p:sld>
 </file>
 
-<file path=ppt/slides/slide16.xml><?xml version="1.0" encoding="utf-8"?>
+<file path=ppt/slides/slide17.xml><?xml version="1.0" encoding="utf-8"?>
 <p:sld xmlns:a="http://schemas.openxmlformats.org/drawingml/2006/main" xmlns:r="http://schemas.openxmlformats.org/officeDocument/2006/relationships" xmlns:p="http://schemas.openxmlformats.org/presentationml/2006/main">
   <p:cSld>
     <p:spTree>
@@ -20485,7 +20589,7 @@
             <a:fld id="{B82CCC60-E8CD-4174-8B1A-7DF615B22EEF}" type="slidenum">
               <a:rPr lang="en-US" smtClean="0"/>
               <a:pPr/>
-              <a:t>16</a:t>
+              <a:t>17</a:t>
             </a:fld>
             <a:endParaRPr lang="en-US"/>
           </a:p>
@@ -26882,7 +26986,7 @@
 </p:sld>
 </file>
 
-<file path=ppt/slides/slide17.xml><?xml version="1.0" encoding="utf-8"?>
+<file path=ppt/slides/slide18.xml><?xml version="1.0" encoding="utf-8"?>
 <p:sld xmlns:a="http://schemas.openxmlformats.org/drawingml/2006/main" xmlns:r="http://schemas.openxmlformats.org/officeDocument/2006/relationships" xmlns:p="http://schemas.openxmlformats.org/presentationml/2006/main">
   <p:cSld>
     <p:spTree>
@@ -26968,7 +27072,7 @@
             <a:fld id="{B82CCC60-E8CD-4174-8B1A-7DF615B22EEF}" type="slidenum">
               <a:rPr lang="en-US" smtClean="0"/>
               <a:pPr/>
-              <a:t>17</a:t>
+              <a:t>18</a:t>
             </a:fld>
             <a:endParaRPr lang="en-US"/>
           </a:p>
@@ -27516,7 +27620,7 @@
 </p:sld>
 </file>
 
-<file path=ppt/slides/slide18.xml><?xml version="1.0" encoding="utf-8"?>
+<file path=ppt/slides/slide19.xml><?xml version="1.0" encoding="utf-8"?>
 <p:sld xmlns:a="http://schemas.openxmlformats.org/drawingml/2006/main" xmlns:r="http://schemas.openxmlformats.org/officeDocument/2006/relationships" xmlns:p="http://schemas.openxmlformats.org/presentationml/2006/main">
   <p:cSld>
     <p:spTree>
@@ -27602,7 +27706,7 @@
             <a:fld id="{B82CCC60-E8CD-4174-8B1A-7DF615B22EEF}" type="slidenum">
               <a:rPr lang="en-US" smtClean="0"/>
               <a:pPr/>
-              <a:t>18</a:t>
+              <a:t>19</a:t>
             </a:fld>
             <a:endParaRPr lang="en-US"/>
           </a:p>
@@ -28065,7 +28169,372 @@
 </p:sld>
 </file>
 
-<file path=ppt/slides/slide19.xml><?xml version="1.0" encoding="utf-8"?>
+<file path=ppt/slides/slide2.xml><?xml version="1.0" encoding="utf-8"?>
+<p:sld xmlns:a="http://schemas.openxmlformats.org/drawingml/2006/main" xmlns:r="http://schemas.openxmlformats.org/officeDocument/2006/relationships" xmlns:p="http://schemas.openxmlformats.org/presentationml/2006/main">
+  <p:cSld>
+    <p:spTree>
+      <p:nvGrpSpPr>
+        <p:cNvPr id="1" name=""/>
+        <p:cNvGrpSpPr/>
+        <p:nvPr/>
+      </p:nvGrpSpPr>
+      <p:grpSpPr>
+        <a:xfrm>
+          <a:off x="0" y="0"/>
+          <a:ext cx="0" cy="0"/>
+          <a:chOff x="0" y="0"/>
+          <a:chExt cx="0" cy="0"/>
+        </a:xfrm>
+      </p:grpSpPr>
+      <p:sp>
+        <p:nvSpPr>
+          <p:cNvPr id="2" name="Title 1">
+            <a:extLst>
+              <a:ext uri="{FF2B5EF4-FFF2-40B4-BE49-F238E27FC236}">
+                <a16:creationId xmlns:a16="http://schemas.microsoft.com/office/drawing/2014/main" id="{CB2958E8-6553-6846-4A14-22724CEEB930}"/>
+              </a:ext>
+            </a:extLst>
+          </p:cNvPr>
+          <p:cNvSpPr>
+            <a:spLocks noGrp="1"/>
+          </p:cNvSpPr>
+          <p:nvPr>
+            <p:ph type="title"/>
+          </p:nvPr>
+        </p:nvSpPr>
+        <p:spPr/>
+        <p:txBody>
+          <a:bodyPr>
+            <a:normAutofit fontScale="90000"/>
+          </a:bodyPr>
+          <a:lstStyle/>
+          <a:p>
+            <a:r>
+              <a:rPr lang="en-US" dirty="0"/>
+              <a:t>Lab #5: Jaccard similarity</a:t>
+            </a:r>
+          </a:p>
+        </p:txBody>
+      </p:sp>
+      <p:sp>
+        <p:nvSpPr>
+          <p:cNvPr id="3" name="Content Placeholder 2">
+            <a:extLst>
+              <a:ext uri="{FF2B5EF4-FFF2-40B4-BE49-F238E27FC236}">
+                <a16:creationId xmlns:a16="http://schemas.microsoft.com/office/drawing/2014/main" id="{15BAB270-8CBA-89C2-3120-EF8B9E1726C7}"/>
+              </a:ext>
+            </a:extLst>
+          </p:cNvPr>
+          <p:cNvSpPr>
+            <a:spLocks noGrp="1"/>
+          </p:cNvSpPr>
+          <p:nvPr>
+            <p:ph idx="1"/>
+          </p:nvPr>
+        </p:nvSpPr>
+        <p:spPr>
+          <a:xfrm>
+            <a:off x="598620" y="1596540"/>
+            <a:ext cx="10972800" cy="5261460"/>
+          </a:xfrm>
+        </p:spPr>
+        <p:txBody>
+          <a:bodyPr>
+            <a:normAutofit fontScale="70000" lnSpcReduction="20000"/>
+          </a:bodyPr>
+          <a:lstStyle/>
+          <a:p>
+            <a:r>
+              <a:rPr lang="en-US" dirty="0"/>
+              <a:t>In this lab assignment you will write set of functions to compute Jaccard similarity between genomes based on comparison of their fixed size sketches. Due November 10</a:t>
+            </a:r>
+            <a:r>
+              <a:rPr lang="en-US" baseline="30000" dirty="0"/>
+              <a:t>th</a:t>
+            </a:r>
+            <a:r>
+              <a:rPr lang="en-US" dirty="0"/>
+              <a:t> at 8:00pm</a:t>
+            </a:r>
+          </a:p>
+          <a:p>
+            <a:r>
+              <a:rPr lang="en-US" dirty="0"/>
+              <a:t>The goal is to write a Python script named </a:t>
+            </a:r>
+            <a:r>
+              <a:rPr lang="en-US" b="1" dirty="0"/>
+              <a:t>jaccard.py</a:t>
+            </a:r>
+            <a:r>
+              <a:rPr lang="en-US" dirty="0"/>
+              <a:t> containing the following functions:</a:t>
+            </a:r>
+          </a:p>
+          <a:p>
+            <a:pPr lvl="1"/>
+            <a:r>
+              <a:rPr lang="en-US" i="1" dirty="0" err="1"/>
+              <a:t>reverse_complement</a:t>
+            </a:r>
+            <a:r>
+              <a:rPr lang="en-US" i="1" dirty="0"/>
+              <a:t>(seq): </a:t>
+            </a:r>
+            <a:r>
+              <a:rPr lang="en-US" dirty="0"/>
+              <a:t>returns reverse complement of sequence seq; </a:t>
+            </a:r>
+            <a:r>
+              <a:rPr lang="en-US" u="sng" dirty="0"/>
+              <a:t>reuse this function from Lab #2</a:t>
+            </a:r>
+            <a:r>
+              <a:rPr lang="en-US" dirty="0"/>
+              <a:t>.</a:t>
+            </a:r>
+          </a:p>
+          <a:p>
+            <a:pPr lvl="1"/>
+            <a:r>
+              <a:rPr lang="en-US" i="1" dirty="0" err="1"/>
+              <a:t>compute_num_value</a:t>
+            </a:r>
+            <a:r>
+              <a:rPr lang="en-US" i="1" dirty="0"/>
+              <a:t> (seq): </a:t>
+            </a:r>
+            <a:r>
+              <a:rPr lang="en-US" dirty="0"/>
+              <a:t>returns minimum numerical value between forward and reverse versions of the sequence </a:t>
+            </a:r>
+            <a:r>
+              <a:rPr lang="en-US" i="1" dirty="0"/>
+              <a:t>seq</a:t>
+            </a:r>
+            <a:r>
+              <a:rPr lang="en-US" dirty="0"/>
+              <a:t>; </a:t>
+            </a:r>
+            <a:r>
+              <a:rPr lang="en-US" u="sng" dirty="0"/>
+              <a:t>reuse this function from Lab #2</a:t>
+            </a:r>
+            <a:r>
+              <a:rPr lang="en-US" dirty="0"/>
+              <a:t>.</a:t>
+            </a:r>
+          </a:p>
+          <a:p>
+            <a:pPr lvl="1"/>
+            <a:r>
+              <a:rPr lang="en-US" dirty="0"/>
+              <a:t>(G:30pt,U:30pt) </a:t>
+            </a:r>
+            <a:r>
+              <a:rPr lang="en-US" i="1" dirty="0" err="1"/>
+              <a:t>load_fasta_to_dict</a:t>
+            </a:r>
+            <a:r>
+              <a:rPr lang="en-US" i="1" dirty="0"/>
+              <a:t>(</a:t>
+            </a:r>
+            <a:r>
+              <a:rPr lang="en-US" i="1" dirty="0" err="1"/>
+              <a:t>fasta_path</a:t>
+            </a:r>
+            <a:r>
+              <a:rPr lang="en-US" i="1" dirty="0"/>
+              <a:t>): </a:t>
+            </a:r>
+            <a:r>
+              <a:rPr lang="en-US" dirty="0"/>
+              <a:t>parses fasta file </a:t>
+            </a:r>
+            <a:r>
+              <a:rPr lang="en-US" i="1" dirty="0" err="1"/>
+              <a:t>fasta_path</a:t>
+            </a:r>
+            <a:r>
+              <a:rPr lang="en-US" i="1" dirty="0"/>
+              <a:t> </a:t>
+            </a:r>
+            <a:r>
+              <a:rPr lang="en-US" dirty="0"/>
+              <a:t>and returns a dictionary where keys are names of fasta sequences, and values are the genome sequences</a:t>
+            </a:r>
+          </a:p>
+          <a:p>
+            <a:pPr lvl="1"/>
+            <a:r>
+              <a:rPr lang="en-US" dirty="0"/>
+              <a:t>(G:30pt,U:30pt) </a:t>
+            </a:r>
+            <a:r>
+              <a:rPr lang="en-US" i="1" dirty="0" err="1"/>
+              <a:t>compute_sketch</a:t>
+            </a:r>
+            <a:r>
+              <a:rPr lang="en-US" i="1" dirty="0"/>
+              <a:t>(</a:t>
+            </a:r>
+            <a:r>
+              <a:rPr lang="en-US" i="1" dirty="0" err="1"/>
+              <a:t>seq_dict,k,s</a:t>
+            </a:r>
+            <a:r>
+              <a:rPr lang="en-US" i="1" dirty="0"/>
+              <a:t>): </a:t>
+            </a:r>
+            <a:r>
+              <a:rPr lang="en-US" dirty="0"/>
+              <a:t>returns a sketch, which is an array of </a:t>
+            </a:r>
+            <a:r>
+              <a:rPr lang="en-US" i="1" dirty="0"/>
+              <a:t>s</a:t>
+            </a:r>
+            <a:r>
+              <a:rPr lang="en-US" dirty="0"/>
+              <a:t> smallest distinct integer k-</a:t>
+            </a:r>
+            <a:r>
+              <a:rPr lang="en-US" dirty="0" err="1"/>
+              <a:t>mer</a:t>
+            </a:r>
+            <a:r>
+              <a:rPr lang="en-US" dirty="0"/>
+              <a:t> values sorted from </a:t>
+            </a:r>
+            <a:r>
+              <a:rPr lang="en-US" b="1" dirty="0"/>
+              <a:t>smallest to largest</a:t>
+            </a:r>
+            <a:r>
+              <a:rPr lang="en-US" dirty="0"/>
+              <a:t> for all k-</a:t>
+            </a:r>
+            <a:r>
+              <a:rPr lang="en-US" dirty="0" err="1"/>
+              <a:t>mers</a:t>
+            </a:r>
+            <a:r>
+              <a:rPr lang="en-US" dirty="0"/>
+              <a:t> of size </a:t>
+            </a:r>
+            <a:r>
+              <a:rPr lang="en-US" i="1" dirty="0"/>
+              <a:t>k</a:t>
+            </a:r>
+            <a:r>
+              <a:rPr lang="en-US" dirty="0"/>
+              <a:t> in all genome sequences in </a:t>
+            </a:r>
+            <a:r>
+              <a:rPr lang="en-US" i="1" dirty="0" err="1"/>
+              <a:t>seq_dict</a:t>
+            </a:r>
+            <a:endParaRPr lang="en-US" i="1" dirty="0"/>
+          </a:p>
+          <a:p>
+            <a:pPr lvl="1"/>
+            <a:r>
+              <a:rPr lang="en-US" dirty="0"/>
+              <a:t>(G:30pt,U:40pt) </a:t>
+            </a:r>
+            <a:r>
+              <a:rPr lang="en-US" i="1" dirty="0" err="1"/>
+              <a:t>compare_sketches</a:t>
+            </a:r>
+            <a:r>
+              <a:rPr lang="en-US" i="1" dirty="0"/>
+              <a:t>(sketch1,sketch2,s): </a:t>
+            </a:r>
+            <a:r>
+              <a:rPr lang="en-US" dirty="0"/>
+              <a:t>computes Jaccard similarity for sketches </a:t>
+            </a:r>
+            <a:r>
+              <a:rPr lang="en-US" i="1" dirty="0"/>
+              <a:t>sketch1</a:t>
+            </a:r>
+            <a:r>
+              <a:rPr lang="en-US" dirty="0"/>
+              <a:t> and </a:t>
+            </a:r>
+            <a:r>
+              <a:rPr lang="en-US" i="1" dirty="0"/>
+              <a:t>sketch2</a:t>
+            </a:r>
+            <a:r>
+              <a:rPr lang="en-US" dirty="0"/>
+              <a:t> of size </a:t>
+            </a:r>
+            <a:r>
+              <a:rPr lang="en-US" i="1" dirty="0"/>
+              <a:t>s, </a:t>
+            </a:r>
+            <a:r>
+              <a:rPr lang="en-US" dirty="0"/>
+              <a:t>returns a floating-point number between 0 and 1</a:t>
+            </a:r>
+            <a:r>
+              <a:rPr lang="en-US" i="1" dirty="0"/>
+              <a:t>.</a:t>
+            </a:r>
+          </a:p>
+          <a:p>
+            <a:r>
+              <a:rPr lang="en-US" dirty="0"/>
+              <a:t>Graduate students only: (10pt) download two HIV virus sequences from NCBI: accessions GCA_003109165.1 and GCA_003109225.1; use s=20, vary K from 6 to 101, plot Jaccard(K,s).  At what value of K Jaccard similarity becomes equal to 0? Upload a figure containing plot of Jaccard(K,s) as function of K. Add a box with value of K’ where Jaccard (K’,20)==0</a:t>
+            </a:r>
+          </a:p>
+        </p:txBody>
+      </p:sp>
+      <p:sp>
+        <p:nvSpPr>
+          <p:cNvPr id="4" name="Slide Number Placeholder 3">
+            <a:extLst>
+              <a:ext uri="{FF2B5EF4-FFF2-40B4-BE49-F238E27FC236}">
+                <a16:creationId xmlns:a16="http://schemas.microsoft.com/office/drawing/2014/main" id="{72CAADF0-F1F7-C3B8-ED06-EFFA1A9808E4}"/>
+              </a:ext>
+            </a:extLst>
+          </p:cNvPr>
+          <p:cNvSpPr>
+            <a:spLocks noGrp="1"/>
+          </p:cNvSpPr>
+          <p:nvPr>
+            <p:ph type="sldNum" sz="quarter" idx="12"/>
+          </p:nvPr>
+        </p:nvSpPr>
+        <p:spPr/>
+        <p:txBody>
+          <a:bodyPr/>
+          <a:lstStyle/>
+          <a:p>
+            <a:fld id="{B82CCC60-E8CD-4174-8B1A-7DF615B22EEF}" type="slidenum">
+              <a:rPr lang="en-US" smtClean="0"/>
+              <a:pPr/>
+              <a:t>2</a:t>
+            </a:fld>
+            <a:endParaRPr lang="en-US" dirty="0"/>
+          </a:p>
+        </p:txBody>
+      </p:sp>
+    </p:spTree>
+    <p:extLst>
+      <p:ext uri="{BB962C8B-B14F-4D97-AF65-F5344CB8AC3E}">
+        <p14:creationId xmlns:p14="http://schemas.microsoft.com/office/powerpoint/2010/main" val="1812347551"/>
+      </p:ext>
+    </p:extLst>
+  </p:cSld>
+  <p:clrMapOvr>
+    <a:masterClrMapping/>
+  </p:clrMapOvr>
+</p:sld>
+</file>
+
+<file path=ppt/slides/slide20.xml><?xml version="1.0" encoding="utf-8"?>
 <p:sld xmlns:a="http://schemas.openxmlformats.org/drawingml/2006/main" xmlns:r="http://schemas.openxmlformats.org/officeDocument/2006/relationships" xmlns:p="http://schemas.openxmlformats.org/presentationml/2006/main">
   <p:cSld>
     <p:spTree>
@@ -28136,7 +28605,7 @@
             <a:fld id="{B82CCC60-E8CD-4174-8B1A-7DF615B22EEF}" type="slidenum">
               <a:rPr lang="en-US" smtClean="0"/>
               <a:pPr/>
-              <a:t>19</a:t>
+              <a:t>20</a:t>
             </a:fld>
             <a:endParaRPr lang="en-US"/>
           </a:p>
@@ -28691,372 +29160,7 @@
 </p:sld>
 </file>
 
-<file path=ppt/slides/slide2.xml><?xml version="1.0" encoding="utf-8"?>
-<p:sld xmlns:a="http://schemas.openxmlformats.org/drawingml/2006/main" xmlns:r="http://schemas.openxmlformats.org/officeDocument/2006/relationships" xmlns:p="http://schemas.openxmlformats.org/presentationml/2006/main">
-  <p:cSld>
-    <p:spTree>
-      <p:nvGrpSpPr>
-        <p:cNvPr id="1" name=""/>
-        <p:cNvGrpSpPr/>
-        <p:nvPr/>
-      </p:nvGrpSpPr>
-      <p:grpSpPr>
-        <a:xfrm>
-          <a:off x="0" y="0"/>
-          <a:ext cx="0" cy="0"/>
-          <a:chOff x="0" y="0"/>
-          <a:chExt cx="0" cy="0"/>
-        </a:xfrm>
-      </p:grpSpPr>
-      <p:sp>
-        <p:nvSpPr>
-          <p:cNvPr id="2" name="Title 1">
-            <a:extLst>
-              <a:ext uri="{FF2B5EF4-FFF2-40B4-BE49-F238E27FC236}">
-                <a16:creationId xmlns:a16="http://schemas.microsoft.com/office/drawing/2014/main" id="{CB2958E8-6553-6846-4A14-22724CEEB930}"/>
-              </a:ext>
-            </a:extLst>
-          </p:cNvPr>
-          <p:cNvSpPr>
-            <a:spLocks noGrp="1"/>
-          </p:cNvSpPr>
-          <p:nvPr>
-            <p:ph type="title"/>
-          </p:nvPr>
-        </p:nvSpPr>
-        <p:spPr/>
-        <p:txBody>
-          <a:bodyPr>
-            <a:normAutofit fontScale="90000"/>
-          </a:bodyPr>
-          <a:lstStyle/>
-          <a:p>
-            <a:r>
-              <a:rPr lang="en-US" dirty="0"/>
-              <a:t>Lab #5: Jaccard similarity</a:t>
-            </a:r>
-          </a:p>
-        </p:txBody>
-      </p:sp>
-      <p:sp>
-        <p:nvSpPr>
-          <p:cNvPr id="3" name="Content Placeholder 2">
-            <a:extLst>
-              <a:ext uri="{FF2B5EF4-FFF2-40B4-BE49-F238E27FC236}">
-                <a16:creationId xmlns:a16="http://schemas.microsoft.com/office/drawing/2014/main" id="{15BAB270-8CBA-89C2-3120-EF8B9E1726C7}"/>
-              </a:ext>
-            </a:extLst>
-          </p:cNvPr>
-          <p:cNvSpPr>
-            <a:spLocks noGrp="1"/>
-          </p:cNvSpPr>
-          <p:nvPr>
-            <p:ph idx="1"/>
-          </p:nvPr>
-        </p:nvSpPr>
-        <p:spPr>
-          <a:xfrm>
-            <a:off x="598620" y="1596540"/>
-            <a:ext cx="10972800" cy="5261460"/>
-          </a:xfrm>
-        </p:spPr>
-        <p:txBody>
-          <a:bodyPr>
-            <a:normAutofit fontScale="70000" lnSpcReduction="20000"/>
-          </a:bodyPr>
-          <a:lstStyle/>
-          <a:p>
-            <a:r>
-              <a:rPr lang="en-US" dirty="0"/>
-              <a:t>In this lab assignment you will write set of functions to compute Jaccard similarity between genomes based on comparison of their fixed size sketches. Due November 10</a:t>
-            </a:r>
-            <a:r>
-              <a:rPr lang="en-US" baseline="30000" dirty="0"/>
-              <a:t>th</a:t>
-            </a:r>
-            <a:r>
-              <a:rPr lang="en-US" dirty="0"/>
-              <a:t> at 8:00pm</a:t>
-            </a:r>
-          </a:p>
-          <a:p>
-            <a:r>
-              <a:rPr lang="en-US" dirty="0"/>
-              <a:t>The goal is to write a Python script named </a:t>
-            </a:r>
-            <a:r>
-              <a:rPr lang="en-US" b="1" dirty="0"/>
-              <a:t>jaccard.py</a:t>
-            </a:r>
-            <a:r>
-              <a:rPr lang="en-US" dirty="0"/>
-              <a:t> containing the following functions:</a:t>
-            </a:r>
-          </a:p>
-          <a:p>
-            <a:pPr lvl="1"/>
-            <a:r>
-              <a:rPr lang="en-US" i="1" dirty="0" err="1"/>
-              <a:t>reverse_complement</a:t>
-            </a:r>
-            <a:r>
-              <a:rPr lang="en-US" i="1" dirty="0"/>
-              <a:t>(seq): </a:t>
-            </a:r>
-            <a:r>
-              <a:rPr lang="en-US" dirty="0"/>
-              <a:t>returns reverse complement of sequence seq; </a:t>
-            </a:r>
-            <a:r>
-              <a:rPr lang="en-US" u="sng" dirty="0"/>
-              <a:t>reuse this function from Lab #2</a:t>
-            </a:r>
-            <a:r>
-              <a:rPr lang="en-US" dirty="0"/>
-              <a:t>.</a:t>
-            </a:r>
-          </a:p>
-          <a:p>
-            <a:pPr lvl="1"/>
-            <a:r>
-              <a:rPr lang="en-US" i="1" dirty="0" err="1"/>
-              <a:t>compute_num_value</a:t>
-            </a:r>
-            <a:r>
-              <a:rPr lang="en-US" i="1" dirty="0"/>
-              <a:t> (seq): </a:t>
-            </a:r>
-            <a:r>
-              <a:rPr lang="en-US" dirty="0"/>
-              <a:t>returns minimum numerical value between forward and reverse versions of the sequence </a:t>
-            </a:r>
-            <a:r>
-              <a:rPr lang="en-US" i="1" dirty="0"/>
-              <a:t>seq</a:t>
-            </a:r>
-            <a:r>
-              <a:rPr lang="en-US" dirty="0"/>
-              <a:t>; </a:t>
-            </a:r>
-            <a:r>
-              <a:rPr lang="en-US" u="sng" dirty="0"/>
-              <a:t>reuse this function from Lab #2</a:t>
-            </a:r>
-            <a:r>
-              <a:rPr lang="en-US" dirty="0"/>
-              <a:t>.</a:t>
-            </a:r>
-          </a:p>
-          <a:p>
-            <a:pPr lvl="1"/>
-            <a:r>
-              <a:rPr lang="en-US" dirty="0"/>
-              <a:t>(G:30pt,U:30pt) </a:t>
-            </a:r>
-            <a:r>
-              <a:rPr lang="en-US" i="1" dirty="0" err="1"/>
-              <a:t>load_fasta_to_dict</a:t>
-            </a:r>
-            <a:r>
-              <a:rPr lang="en-US" i="1" dirty="0"/>
-              <a:t>(</a:t>
-            </a:r>
-            <a:r>
-              <a:rPr lang="en-US" i="1" dirty="0" err="1"/>
-              <a:t>fasta_path</a:t>
-            </a:r>
-            <a:r>
-              <a:rPr lang="en-US" i="1" dirty="0"/>
-              <a:t>): </a:t>
-            </a:r>
-            <a:r>
-              <a:rPr lang="en-US" dirty="0"/>
-              <a:t>parses fasta file </a:t>
-            </a:r>
-            <a:r>
-              <a:rPr lang="en-US" i="1" dirty="0" err="1"/>
-              <a:t>fasta_path</a:t>
-            </a:r>
-            <a:r>
-              <a:rPr lang="en-US" i="1" dirty="0"/>
-              <a:t> </a:t>
-            </a:r>
-            <a:r>
-              <a:rPr lang="en-US" dirty="0"/>
-              <a:t>and returns a dictionary where keys are names of fasta sequences, and values are the genome sequences</a:t>
-            </a:r>
-          </a:p>
-          <a:p>
-            <a:pPr lvl="1"/>
-            <a:r>
-              <a:rPr lang="en-US" dirty="0"/>
-              <a:t>(G:30pt,U:30pt) </a:t>
-            </a:r>
-            <a:r>
-              <a:rPr lang="en-US" i="1" dirty="0" err="1"/>
-              <a:t>compute_sketch</a:t>
-            </a:r>
-            <a:r>
-              <a:rPr lang="en-US" i="1" dirty="0"/>
-              <a:t>(</a:t>
-            </a:r>
-            <a:r>
-              <a:rPr lang="en-US" i="1" dirty="0" err="1"/>
-              <a:t>seq_dict,k,s</a:t>
-            </a:r>
-            <a:r>
-              <a:rPr lang="en-US" i="1" dirty="0"/>
-              <a:t>): </a:t>
-            </a:r>
-            <a:r>
-              <a:rPr lang="en-US" dirty="0"/>
-              <a:t>returns a sketch, which is an array of </a:t>
-            </a:r>
-            <a:r>
-              <a:rPr lang="en-US" i="1" dirty="0"/>
-              <a:t>s</a:t>
-            </a:r>
-            <a:r>
-              <a:rPr lang="en-US" dirty="0"/>
-              <a:t> smallest distinct integer k-</a:t>
-            </a:r>
-            <a:r>
-              <a:rPr lang="en-US" dirty="0" err="1"/>
-              <a:t>mer</a:t>
-            </a:r>
-            <a:r>
-              <a:rPr lang="en-US" dirty="0"/>
-              <a:t> values sorted from </a:t>
-            </a:r>
-            <a:r>
-              <a:rPr lang="en-US" b="1" dirty="0"/>
-              <a:t>smallest to largest</a:t>
-            </a:r>
-            <a:r>
-              <a:rPr lang="en-US" dirty="0"/>
-              <a:t> for all k-</a:t>
-            </a:r>
-            <a:r>
-              <a:rPr lang="en-US" dirty="0" err="1"/>
-              <a:t>mers</a:t>
-            </a:r>
-            <a:r>
-              <a:rPr lang="en-US" dirty="0"/>
-              <a:t> of size </a:t>
-            </a:r>
-            <a:r>
-              <a:rPr lang="en-US" i="1" dirty="0"/>
-              <a:t>k</a:t>
-            </a:r>
-            <a:r>
-              <a:rPr lang="en-US" dirty="0"/>
-              <a:t> in all genome sequences in </a:t>
-            </a:r>
-            <a:r>
-              <a:rPr lang="en-US" i="1" dirty="0" err="1"/>
-              <a:t>seq_dict</a:t>
-            </a:r>
-            <a:endParaRPr lang="en-US" i="1" dirty="0"/>
-          </a:p>
-          <a:p>
-            <a:pPr lvl="1"/>
-            <a:r>
-              <a:rPr lang="en-US" dirty="0"/>
-              <a:t>(G:30pt,U:40pt) </a:t>
-            </a:r>
-            <a:r>
-              <a:rPr lang="en-US" i="1" dirty="0" err="1"/>
-              <a:t>compare_sketches</a:t>
-            </a:r>
-            <a:r>
-              <a:rPr lang="en-US" i="1" dirty="0"/>
-              <a:t>(sketch1,sketch2,s): </a:t>
-            </a:r>
-            <a:r>
-              <a:rPr lang="en-US" dirty="0"/>
-              <a:t>computes Jaccard similarity for sketches </a:t>
-            </a:r>
-            <a:r>
-              <a:rPr lang="en-US" i="1" dirty="0"/>
-              <a:t>sketch1</a:t>
-            </a:r>
-            <a:r>
-              <a:rPr lang="en-US" dirty="0"/>
-              <a:t> and </a:t>
-            </a:r>
-            <a:r>
-              <a:rPr lang="en-US" i="1" dirty="0"/>
-              <a:t>sketch2</a:t>
-            </a:r>
-            <a:r>
-              <a:rPr lang="en-US" dirty="0"/>
-              <a:t> of size </a:t>
-            </a:r>
-            <a:r>
-              <a:rPr lang="en-US" i="1" dirty="0"/>
-              <a:t>s, </a:t>
-            </a:r>
-            <a:r>
-              <a:rPr lang="en-US" dirty="0"/>
-              <a:t>returns a floating-point number between 0 and 1</a:t>
-            </a:r>
-            <a:r>
-              <a:rPr lang="en-US" i="1" dirty="0"/>
-              <a:t>.</a:t>
-            </a:r>
-          </a:p>
-          <a:p>
-            <a:r>
-              <a:rPr lang="en-US" dirty="0"/>
-              <a:t>Graduate students only: (10pt) download two HIV virus sequences from NCBI: accessions GCA_003109165.1 and GCA_003109225.1; use s=20, vary K from 6 to 101, plot Jaccard(K,s).  At what value of K Jaccard similarity becomes equal to 0? Upload a figure containing plot of Jaccard(K,s) as function of K. Add a box with value of K’ where Jaccard (K’,20)==0</a:t>
-            </a:r>
-          </a:p>
-        </p:txBody>
-      </p:sp>
-      <p:sp>
-        <p:nvSpPr>
-          <p:cNvPr id="4" name="Slide Number Placeholder 3">
-            <a:extLst>
-              <a:ext uri="{FF2B5EF4-FFF2-40B4-BE49-F238E27FC236}">
-                <a16:creationId xmlns:a16="http://schemas.microsoft.com/office/drawing/2014/main" id="{72CAADF0-F1F7-C3B8-ED06-EFFA1A9808E4}"/>
-              </a:ext>
-            </a:extLst>
-          </p:cNvPr>
-          <p:cNvSpPr>
-            <a:spLocks noGrp="1"/>
-          </p:cNvSpPr>
-          <p:nvPr>
-            <p:ph type="sldNum" sz="quarter" idx="12"/>
-          </p:nvPr>
-        </p:nvSpPr>
-        <p:spPr/>
-        <p:txBody>
-          <a:bodyPr/>
-          <a:lstStyle/>
-          <a:p>
-            <a:fld id="{B82CCC60-E8CD-4174-8B1A-7DF615B22EEF}" type="slidenum">
-              <a:rPr lang="en-US" smtClean="0"/>
-              <a:pPr/>
-              <a:t>2</a:t>
-            </a:fld>
-            <a:endParaRPr lang="en-US" dirty="0"/>
-          </a:p>
-        </p:txBody>
-      </p:sp>
-    </p:spTree>
-    <p:extLst>
-      <p:ext uri="{BB962C8B-B14F-4D97-AF65-F5344CB8AC3E}">
-        <p14:creationId xmlns:p14="http://schemas.microsoft.com/office/powerpoint/2010/main" val="1812347551"/>
-      </p:ext>
-    </p:extLst>
-  </p:cSld>
-  <p:clrMapOvr>
-    <a:masterClrMapping/>
-  </p:clrMapOvr>
-</p:sld>
-</file>
-
-<file path=ppt/slides/slide20.xml><?xml version="1.0" encoding="utf-8"?>
+<file path=ppt/slides/slide21.xml><?xml version="1.0" encoding="utf-8"?>
 <p:sld xmlns:a="http://schemas.openxmlformats.org/drawingml/2006/main" xmlns:r="http://schemas.openxmlformats.org/officeDocument/2006/relationships" xmlns:p="http://schemas.openxmlformats.org/presentationml/2006/main">
   <p:cSld>
     <p:spTree>
@@ -29133,7 +29237,7 @@
             <a:fld id="{B82CCC60-E8CD-4174-8B1A-7DF615B22EEF}" type="slidenum">
               <a:rPr lang="en-US" smtClean="0"/>
               <a:pPr/>
-              <a:t>20</a:t>
+              <a:t>21</a:t>
             </a:fld>
             <a:endParaRPr lang="en-US"/>
           </a:p>
@@ -29360,7 +29464,7 @@
 </p:sld>
 </file>
 
-<file path=ppt/slides/slide21.xml><?xml version="1.0" encoding="utf-8"?>
+<file path=ppt/slides/slide22.xml><?xml version="1.0" encoding="utf-8"?>
 <p:sld xmlns:a="http://schemas.openxmlformats.org/drawingml/2006/main" xmlns:r="http://schemas.openxmlformats.org/officeDocument/2006/relationships" xmlns:p="http://schemas.openxmlformats.org/presentationml/2006/main">
   <p:cSld>
     <p:spTree>
@@ -29581,7 +29685,7 @@
             <a:fld id="{B82CCC60-E8CD-4174-8B1A-7DF615B22EEF}" type="slidenum">
               <a:rPr lang="en-US" smtClean="0"/>
               <a:pPr/>
-              <a:t>21</a:t>
+              <a:t>22</a:t>
             </a:fld>
             <a:endParaRPr lang="en-US"/>
           </a:p>
@@ -29710,7 +29814,7 @@
 </p:sld>
 </file>
 
-<file path=ppt/slides/slide22.xml><?xml version="1.0" encoding="utf-8"?>
+<file path=ppt/slides/slide23.xml><?xml version="1.0" encoding="utf-8"?>
 <p:sld xmlns:a="http://schemas.openxmlformats.org/drawingml/2006/main" xmlns:r="http://schemas.openxmlformats.org/officeDocument/2006/relationships" xmlns:p="http://schemas.openxmlformats.org/presentationml/2006/main">
   <p:cSld>
     <p:spTree>
@@ -29869,7 +29973,7 @@
             <a:fld id="{B82CCC60-E8CD-4174-8B1A-7DF615B22EEF}" type="slidenum">
               <a:rPr lang="en-US" smtClean="0"/>
               <a:pPr/>
-              <a:t>22</a:t>
+              <a:t>23</a:t>
             </a:fld>
             <a:endParaRPr lang="en-US"/>
           </a:p>
@@ -30060,7 +30164,7 @@
 </p:sld>
 </file>
 
-<file path=ppt/slides/slide23.xml><?xml version="1.0" encoding="utf-8"?>
+<file path=ppt/slides/slide24.xml><?xml version="1.0" encoding="utf-8"?>
 <p:sld xmlns:a="http://schemas.openxmlformats.org/drawingml/2006/main" xmlns:r="http://schemas.openxmlformats.org/officeDocument/2006/relationships" xmlns:p="http://schemas.openxmlformats.org/presentationml/2006/main">
   <p:cSld>
     <p:spTree>
@@ -30225,7 +30329,7 @@
             <a:fld id="{B82CCC60-E8CD-4174-8B1A-7DF615B22EEF}" type="slidenum">
               <a:rPr lang="en-US" smtClean="0"/>
               <a:pPr/>
-              <a:t>23</a:t>
+              <a:t>24</a:t>
             </a:fld>
             <a:endParaRPr lang="en-US"/>
           </a:p>
@@ -31380,31 +31484,223 @@
           </a:p>
         </p:txBody>
       </p:sp>
+      <p:sp>
+        <p:nvSpPr>
+          <p:cNvPr id="7" name="Content Placeholder 6">
+            <a:extLst>
+              <a:ext uri="{FF2B5EF4-FFF2-40B4-BE49-F238E27FC236}">
+                <a16:creationId xmlns:a16="http://schemas.microsoft.com/office/drawing/2014/main" id="{4FBE7125-6198-264D-1FB2-291E2C8F2ADE}"/>
+              </a:ext>
+            </a:extLst>
+          </p:cNvPr>
+          <p:cNvSpPr>
+            <a:spLocks noGrp="1"/>
+          </p:cNvSpPr>
+          <p:nvPr>
+            <p:ph idx="1"/>
+          </p:nvPr>
+        </p:nvSpPr>
+        <p:spPr>
+          <a:xfrm>
+            <a:off x="568534" y="1679713"/>
+            <a:ext cx="9042606" cy="5041763"/>
+          </a:xfrm>
+        </p:spPr>
+        <p:txBody>
+          <a:bodyPr>
+            <a:normAutofit fontScale="70000" lnSpcReduction="20000"/>
+          </a:bodyPr>
+          <a:lstStyle/>
+          <a:p>
+            <a:r>
+              <a:rPr lang="en-US" dirty="0"/>
+              <a:t>GENCODE annotation is made by merging the manual gene annotation produced by </a:t>
+            </a:r>
+            <a:r>
+              <a:rPr lang="en-US" dirty="0" err="1"/>
+              <a:t>Ensembl</a:t>
+            </a:r>
+            <a:r>
+              <a:rPr lang="en-US" dirty="0"/>
+              <a:t>-Havana team with the </a:t>
+            </a:r>
+            <a:r>
+              <a:rPr lang="en-US" dirty="0" err="1"/>
+              <a:t>Ensembl-genebuild</a:t>
+            </a:r>
+            <a:r>
+              <a:rPr lang="en-US" dirty="0"/>
+              <a:t> automated annotation</a:t>
+            </a:r>
+          </a:p>
+          <a:p>
+            <a:pPr lvl="1"/>
+            <a:r>
+              <a:rPr lang="en-US" dirty="0"/>
+              <a:t>Generally more permissive, contains more transcripts, incomplete protein coding genes</a:t>
+            </a:r>
+          </a:p>
+          <a:p>
+            <a:pPr lvl="1"/>
+            <a:r>
+              <a:rPr lang="en-US" dirty="0"/>
+              <a:t>Human annotation contains over 600,000 transcripts</a:t>
+            </a:r>
+          </a:p>
+          <a:p>
+            <a:pPr lvl="1"/>
+            <a:endParaRPr lang="en-US" dirty="0"/>
+          </a:p>
+          <a:p>
+            <a:pPr lvl="1"/>
+            <a:endParaRPr lang="en-US" dirty="0"/>
+          </a:p>
+          <a:p>
+            <a:r>
+              <a:rPr lang="en-US" dirty="0" err="1"/>
+              <a:t>RefSeq</a:t>
+            </a:r>
+            <a:r>
+              <a:rPr lang="en-US" dirty="0"/>
+              <a:t> annotation is produced, curated and hosted by NCBI</a:t>
+            </a:r>
+          </a:p>
+          <a:p>
+            <a:pPr lvl="1"/>
+            <a:r>
+              <a:rPr lang="en-US" dirty="0"/>
+              <a:t>More conservative, only complete proteins</a:t>
+            </a:r>
+          </a:p>
+          <a:p>
+            <a:pPr lvl="1"/>
+            <a:r>
+              <a:rPr lang="en-US" dirty="0"/>
+              <a:t>Human annotation contains about 200,000 transcripts</a:t>
+            </a:r>
+          </a:p>
+          <a:p>
+            <a:pPr lvl="1"/>
+            <a:endParaRPr lang="en-US" dirty="0"/>
+          </a:p>
+          <a:p>
+            <a:endParaRPr lang="en-US" dirty="0"/>
+          </a:p>
+          <a:p>
+            <a:r>
+              <a:rPr lang="en-US" dirty="0"/>
+              <a:t>CHESS annotation is built at JHU from &gt;20000 RNA-seq (</a:t>
+            </a:r>
+            <a:r>
+              <a:rPr lang="en-US" dirty="0" err="1"/>
+              <a:t>GTEx</a:t>
+            </a:r>
+            <a:r>
+              <a:rPr lang="en-US" dirty="0"/>
+              <a:t>) data sets, highly curated, some </a:t>
+            </a:r>
+            <a:r>
+              <a:rPr lang="en-US" dirty="0" err="1"/>
+              <a:t>RefSeq</a:t>
+            </a:r>
+            <a:r>
+              <a:rPr lang="en-US" dirty="0"/>
+              <a:t> transcripts are imported </a:t>
+            </a:r>
+          </a:p>
+          <a:p>
+            <a:pPr lvl="1"/>
+            <a:r>
+              <a:rPr lang="en-US" dirty="0"/>
+              <a:t>Human annotation contains about 141,000 transcripts</a:t>
+            </a:r>
+          </a:p>
+        </p:txBody>
+      </p:sp>
       <p:pic>
         <p:nvPicPr>
-          <p:cNvPr id="5" name="Content Placeholder 4">
+          <p:cNvPr id="9" name="Picture 8">
             <a:extLst>
               <a:ext uri="{FF2B5EF4-FFF2-40B4-BE49-F238E27FC236}">
-                <a16:creationId xmlns:a16="http://schemas.microsoft.com/office/drawing/2014/main" id="{5413609A-1B79-8C95-DF04-74C5B41AFF97}"/>
+                <a16:creationId xmlns:a16="http://schemas.microsoft.com/office/drawing/2014/main" id="{8A0E811A-7FF3-C624-B8E7-E241DBBF2B90}"/>
               </a:ext>
             </a:extLst>
           </p:cNvPr>
           <p:cNvPicPr>
-            <a:picLocks noGrp="1" noChangeAspect="1"/>
+            <a:picLocks noChangeAspect="1"/>
           </p:cNvPicPr>
-          <p:nvPr>
-            <p:ph idx="1"/>
-          </p:nvPr>
+          <p:nvPr/>
         </p:nvPicPr>
-        <p:blipFill rotWithShape="1">
+        <p:blipFill>
           <a:blip r:embed="rId2"/>
-          <a:srcRect t="13551" b="3388"/>
-          <a:stretch/>
+          <a:stretch>
+            <a:fillRect/>
+          </a:stretch>
         </p:blipFill>
         <p:spPr>
           <a:xfrm>
-            <a:off x="863314" y="1697067"/>
-            <a:ext cx="8280685" cy="5160933"/>
+            <a:off x="7675281" y="5682321"/>
+            <a:ext cx="3658111" cy="495369"/>
+          </a:xfrm>
+          <a:prstGeom prst="rect">
+            <a:avLst/>
+          </a:prstGeom>
+        </p:spPr>
+      </p:pic>
+      <p:pic>
+        <p:nvPicPr>
+          <p:cNvPr id="11" name="Picture 10">
+            <a:extLst>
+              <a:ext uri="{FF2B5EF4-FFF2-40B4-BE49-F238E27FC236}">
+                <a16:creationId xmlns:a16="http://schemas.microsoft.com/office/drawing/2014/main" id="{B9AE46AE-862F-4E81-37DE-3639AB945A3A}"/>
+              </a:ext>
+            </a:extLst>
+          </p:cNvPr>
+          <p:cNvPicPr>
+            <a:picLocks noChangeAspect="1"/>
+          </p:cNvPicPr>
+          <p:nvPr/>
+        </p:nvPicPr>
+        <p:blipFill>
+          <a:blip r:embed="rId3"/>
+          <a:stretch>
+            <a:fillRect/>
+          </a:stretch>
+        </p:blipFill>
+        <p:spPr>
+          <a:xfrm>
+            <a:off x="7038256" y="4009934"/>
+            <a:ext cx="5153744" cy="352474"/>
+          </a:xfrm>
+          <a:prstGeom prst="rect">
+            <a:avLst/>
+          </a:prstGeom>
+        </p:spPr>
+      </p:pic>
+      <p:pic>
+        <p:nvPicPr>
+          <p:cNvPr id="13" name="Picture 12">
+            <a:extLst>
+              <a:ext uri="{FF2B5EF4-FFF2-40B4-BE49-F238E27FC236}">
+                <a16:creationId xmlns:a16="http://schemas.microsoft.com/office/drawing/2014/main" id="{F23E1190-4032-0C5C-F35D-7AE20B14508B}"/>
+              </a:ext>
+            </a:extLst>
+          </p:cNvPr>
+          <p:cNvPicPr>
+            <a:picLocks noChangeAspect="1"/>
+          </p:cNvPicPr>
+          <p:nvPr/>
+        </p:nvPicPr>
+        <p:blipFill>
+          <a:blip r:embed="rId4"/>
+          <a:stretch>
+            <a:fillRect/>
+          </a:stretch>
+        </p:blipFill>
+        <p:spPr>
+          <a:xfrm>
+            <a:off x="9613411" y="1587307"/>
+            <a:ext cx="2010056" cy="781159"/>
           </a:xfrm>
           <a:prstGeom prst="rect">
             <a:avLst/>
@@ -31421,10 +31717,691 @@
   <p:clrMapOvr>
     <a:masterClrMapping/>
   </p:clrMapOvr>
+  <p:timing>
+    <p:tnLst>
+      <p:par>
+        <p:cTn id="1" dur="indefinite" restart="never" nodeType="tmRoot">
+          <p:childTnLst>
+            <p:seq concurrent="1" nextAc="seek">
+              <p:cTn id="2" dur="indefinite" nodeType="mainSeq">
+                <p:childTnLst>
+                  <p:par>
+                    <p:cTn id="3" fill="hold">
+                      <p:stCondLst>
+                        <p:cond delay="indefinite"/>
+                      </p:stCondLst>
+                      <p:childTnLst>
+                        <p:par>
+                          <p:cTn id="4" fill="hold">
+                            <p:stCondLst>
+                              <p:cond delay="0"/>
+                            </p:stCondLst>
+                            <p:childTnLst>
+                              <p:par>
+                                <p:cTn id="5" presetID="1" presetClass="entr" presetSubtype="0" fill="hold" grpId="0" nodeType="clickEffect">
+                                  <p:stCondLst>
+                                    <p:cond delay="0"/>
+                                  </p:stCondLst>
+                                  <p:childTnLst>
+                                    <p:set>
+                                      <p:cBhvr>
+                                        <p:cTn id="6" dur="1" fill="hold">
+                                          <p:stCondLst>
+                                            <p:cond delay="0"/>
+                                          </p:stCondLst>
+                                        </p:cTn>
+                                        <p:tgtEl>
+                                          <p:spTgt spid="7">
+                                            <p:txEl>
+                                              <p:pRg st="0" end="0"/>
+                                            </p:txEl>
+                                          </p:spTgt>
+                                        </p:tgtEl>
+                                        <p:attrNameLst>
+                                          <p:attrName>style.visibility</p:attrName>
+                                        </p:attrNameLst>
+                                      </p:cBhvr>
+                                      <p:to>
+                                        <p:strVal val="visible"/>
+                                      </p:to>
+                                    </p:set>
+                                  </p:childTnLst>
+                                </p:cTn>
+                              </p:par>
+                              <p:par>
+                                <p:cTn id="7" presetID="1" presetClass="entr" presetSubtype="0" fill="hold" grpId="0" nodeType="withEffect">
+                                  <p:stCondLst>
+                                    <p:cond delay="0"/>
+                                  </p:stCondLst>
+                                  <p:childTnLst>
+                                    <p:set>
+                                      <p:cBhvr>
+                                        <p:cTn id="8" dur="1" fill="hold">
+                                          <p:stCondLst>
+                                            <p:cond delay="0"/>
+                                          </p:stCondLst>
+                                        </p:cTn>
+                                        <p:tgtEl>
+                                          <p:spTgt spid="7">
+                                            <p:txEl>
+                                              <p:pRg st="1" end="1"/>
+                                            </p:txEl>
+                                          </p:spTgt>
+                                        </p:tgtEl>
+                                        <p:attrNameLst>
+                                          <p:attrName>style.visibility</p:attrName>
+                                        </p:attrNameLst>
+                                      </p:cBhvr>
+                                      <p:to>
+                                        <p:strVal val="visible"/>
+                                      </p:to>
+                                    </p:set>
+                                  </p:childTnLst>
+                                </p:cTn>
+                              </p:par>
+                              <p:par>
+                                <p:cTn id="9" presetID="1" presetClass="entr" presetSubtype="0" fill="hold" grpId="0" nodeType="withEffect">
+                                  <p:stCondLst>
+                                    <p:cond delay="0"/>
+                                  </p:stCondLst>
+                                  <p:childTnLst>
+                                    <p:set>
+                                      <p:cBhvr>
+                                        <p:cTn id="10" dur="1" fill="hold">
+                                          <p:stCondLst>
+                                            <p:cond delay="0"/>
+                                          </p:stCondLst>
+                                        </p:cTn>
+                                        <p:tgtEl>
+                                          <p:spTgt spid="7">
+                                            <p:txEl>
+                                              <p:pRg st="2" end="2"/>
+                                            </p:txEl>
+                                          </p:spTgt>
+                                        </p:tgtEl>
+                                        <p:attrNameLst>
+                                          <p:attrName>style.visibility</p:attrName>
+                                        </p:attrNameLst>
+                                      </p:cBhvr>
+                                      <p:to>
+                                        <p:strVal val="visible"/>
+                                      </p:to>
+                                    </p:set>
+                                  </p:childTnLst>
+                                </p:cTn>
+                              </p:par>
+                            </p:childTnLst>
+                          </p:cTn>
+                        </p:par>
+                      </p:childTnLst>
+                    </p:cTn>
+                  </p:par>
+                  <p:par>
+                    <p:cTn id="11" fill="hold">
+                      <p:stCondLst>
+                        <p:cond delay="indefinite"/>
+                      </p:stCondLst>
+                      <p:childTnLst>
+                        <p:par>
+                          <p:cTn id="12" fill="hold">
+                            <p:stCondLst>
+                              <p:cond delay="0"/>
+                            </p:stCondLst>
+                            <p:childTnLst>
+                              <p:par>
+                                <p:cTn id="13" presetID="1" presetClass="entr" presetSubtype="0" fill="hold" grpId="0" nodeType="clickEffect">
+                                  <p:stCondLst>
+                                    <p:cond delay="0"/>
+                                  </p:stCondLst>
+                                  <p:childTnLst>
+                                    <p:set>
+                                      <p:cBhvr>
+                                        <p:cTn id="14" dur="1" fill="hold">
+                                          <p:stCondLst>
+                                            <p:cond delay="0"/>
+                                          </p:stCondLst>
+                                        </p:cTn>
+                                        <p:tgtEl>
+                                          <p:spTgt spid="7">
+                                            <p:txEl>
+                                              <p:pRg st="5" end="5"/>
+                                            </p:txEl>
+                                          </p:spTgt>
+                                        </p:tgtEl>
+                                        <p:attrNameLst>
+                                          <p:attrName>style.visibility</p:attrName>
+                                        </p:attrNameLst>
+                                      </p:cBhvr>
+                                      <p:to>
+                                        <p:strVal val="visible"/>
+                                      </p:to>
+                                    </p:set>
+                                  </p:childTnLst>
+                                </p:cTn>
+                              </p:par>
+                              <p:par>
+                                <p:cTn id="15" presetID="1" presetClass="entr" presetSubtype="0" fill="hold" nodeType="withEffect">
+                                  <p:stCondLst>
+                                    <p:cond delay="0"/>
+                                  </p:stCondLst>
+                                  <p:childTnLst>
+                                    <p:set>
+                                      <p:cBhvr>
+                                        <p:cTn id="16" dur="1" fill="hold">
+                                          <p:stCondLst>
+                                            <p:cond delay="0"/>
+                                          </p:stCondLst>
+                                        </p:cTn>
+                                        <p:tgtEl>
+                                          <p:spTgt spid="13"/>
+                                        </p:tgtEl>
+                                        <p:attrNameLst>
+                                          <p:attrName>style.visibility</p:attrName>
+                                        </p:attrNameLst>
+                                      </p:cBhvr>
+                                      <p:to>
+                                        <p:strVal val="visible"/>
+                                      </p:to>
+                                    </p:set>
+                                  </p:childTnLst>
+                                </p:cTn>
+                              </p:par>
+                              <p:par>
+                                <p:cTn id="17" presetID="1" presetClass="entr" presetSubtype="0" fill="hold" grpId="0" nodeType="withEffect">
+                                  <p:stCondLst>
+                                    <p:cond delay="0"/>
+                                  </p:stCondLst>
+                                  <p:childTnLst>
+                                    <p:set>
+                                      <p:cBhvr>
+                                        <p:cTn id="18" dur="1" fill="hold">
+                                          <p:stCondLst>
+                                            <p:cond delay="0"/>
+                                          </p:stCondLst>
+                                        </p:cTn>
+                                        <p:tgtEl>
+                                          <p:spTgt spid="7">
+                                            <p:txEl>
+                                              <p:pRg st="6" end="6"/>
+                                            </p:txEl>
+                                          </p:spTgt>
+                                        </p:tgtEl>
+                                        <p:attrNameLst>
+                                          <p:attrName>style.visibility</p:attrName>
+                                        </p:attrNameLst>
+                                      </p:cBhvr>
+                                      <p:to>
+                                        <p:strVal val="visible"/>
+                                      </p:to>
+                                    </p:set>
+                                  </p:childTnLst>
+                                </p:cTn>
+                              </p:par>
+                              <p:par>
+                                <p:cTn id="19" presetID="1" presetClass="entr" presetSubtype="0" fill="hold" grpId="0" nodeType="withEffect">
+                                  <p:stCondLst>
+                                    <p:cond delay="0"/>
+                                  </p:stCondLst>
+                                  <p:childTnLst>
+                                    <p:set>
+                                      <p:cBhvr>
+                                        <p:cTn id="20" dur="1" fill="hold">
+                                          <p:stCondLst>
+                                            <p:cond delay="0"/>
+                                          </p:stCondLst>
+                                        </p:cTn>
+                                        <p:tgtEl>
+                                          <p:spTgt spid="7">
+                                            <p:txEl>
+                                              <p:pRg st="7" end="7"/>
+                                            </p:txEl>
+                                          </p:spTgt>
+                                        </p:tgtEl>
+                                        <p:attrNameLst>
+                                          <p:attrName>style.visibility</p:attrName>
+                                        </p:attrNameLst>
+                                      </p:cBhvr>
+                                      <p:to>
+                                        <p:strVal val="visible"/>
+                                      </p:to>
+                                    </p:set>
+                                  </p:childTnLst>
+                                </p:cTn>
+                              </p:par>
+                            </p:childTnLst>
+                          </p:cTn>
+                        </p:par>
+                      </p:childTnLst>
+                    </p:cTn>
+                  </p:par>
+                  <p:par>
+                    <p:cTn id="21" fill="hold">
+                      <p:stCondLst>
+                        <p:cond delay="indefinite"/>
+                      </p:stCondLst>
+                      <p:childTnLst>
+                        <p:par>
+                          <p:cTn id="22" fill="hold">
+                            <p:stCondLst>
+                              <p:cond delay="0"/>
+                            </p:stCondLst>
+                            <p:childTnLst>
+                              <p:par>
+                                <p:cTn id="23" presetID="1" presetClass="entr" presetSubtype="0" fill="hold" nodeType="clickEffect">
+                                  <p:stCondLst>
+                                    <p:cond delay="0"/>
+                                  </p:stCondLst>
+                                  <p:childTnLst>
+                                    <p:set>
+                                      <p:cBhvr>
+                                        <p:cTn id="24" dur="1" fill="hold">
+                                          <p:stCondLst>
+                                            <p:cond delay="0"/>
+                                          </p:stCondLst>
+                                        </p:cTn>
+                                        <p:tgtEl>
+                                          <p:spTgt spid="11"/>
+                                        </p:tgtEl>
+                                        <p:attrNameLst>
+                                          <p:attrName>style.visibility</p:attrName>
+                                        </p:attrNameLst>
+                                      </p:cBhvr>
+                                      <p:to>
+                                        <p:strVal val="visible"/>
+                                      </p:to>
+                                    </p:set>
+                                  </p:childTnLst>
+                                </p:cTn>
+                              </p:par>
+                            </p:childTnLst>
+                          </p:cTn>
+                        </p:par>
+                      </p:childTnLst>
+                    </p:cTn>
+                  </p:par>
+                  <p:par>
+                    <p:cTn id="25" fill="hold">
+                      <p:stCondLst>
+                        <p:cond delay="indefinite"/>
+                      </p:stCondLst>
+                      <p:childTnLst>
+                        <p:par>
+                          <p:cTn id="26" fill="hold">
+                            <p:stCondLst>
+                              <p:cond delay="0"/>
+                            </p:stCondLst>
+                            <p:childTnLst>
+                              <p:par>
+                                <p:cTn id="27" presetID="1" presetClass="entr" presetSubtype="0" fill="hold" grpId="0" nodeType="clickEffect">
+                                  <p:stCondLst>
+                                    <p:cond delay="0"/>
+                                  </p:stCondLst>
+                                  <p:childTnLst>
+                                    <p:set>
+                                      <p:cBhvr>
+                                        <p:cTn id="28" dur="1" fill="hold">
+                                          <p:stCondLst>
+                                            <p:cond delay="0"/>
+                                          </p:stCondLst>
+                                        </p:cTn>
+                                        <p:tgtEl>
+                                          <p:spTgt spid="7">
+                                            <p:txEl>
+                                              <p:pRg st="10" end="10"/>
+                                            </p:txEl>
+                                          </p:spTgt>
+                                        </p:tgtEl>
+                                        <p:attrNameLst>
+                                          <p:attrName>style.visibility</p:attrName>
+                                        </p:attrNameLst>
+                                      </p:cBhvr>
+                                      <p:to>
+                                        <p:strVal val="visible"/>
+                                      </p:to>
+                                    </p:set>
+                                  </p:childTnLst>
+                                </p:cTn>
+                              </p:par>
+                              <p:par>
+                                <p:cTn id="29" presetID="1" presetClass="entr" presetSubtype="0" fill="hold" grpId="0" nodeType="withEffect">
+                                  <p:stCondLst>
+                                    <p:cond delay="0"/>
+                                  </p:stCondLst>
+                                  <p:childTnLst>
+                                    <p:set>
+                                      <p:cBhvr>
+                                        <p:cTn id="30" dur="1" fill="hold">
+                                          <p:stCondLst>
+                                            <p:cond delay="0"/>
+                                          </p:stCondLst>
+                                        </p:cTn>
+                                        <p:tgtEl>
+                                          <p:spTgt spid="7">
+                                            <p:txEl>
+                                              <p:pRg st="11" end="11"/>
+                                            </p:txEl>
+                                          </p:spTgt>
+                                        </p:tgtEl>
+                                        <p:attrNameLst>
+                                          <p:attrName>style.visibility</p:attrName>
+                                        </p:attrNameLst>
+                                      </p:cBhvr>
+                                      <p:to>
+                                        <p:strVal val="visible"/>
+                                      </p:to>
+                                    </p:set>
+                                  </p:childTnLst>
+                                </p:cTn>
+                              </p:par>
+                            </p:childTnLst>
+                          </p:cTn>
+                        </p:par>
+                      </p:childTnLst>
+                    </p:cTn>
+                  </p:par>
+                  <p:par>
+                    <p:cTn id="31" fill="hold">
+                      <p:stCondLst>
+                        <p:cond delay="indefinite"/>
+                      </p:stCondLst>
+                      <p:childTnLst>
+                        <p:par>
+                          <p:cTn id="32" fill="hold">
+                            <p:stCondLst>
+                              <p:cond delay="0"/>
+                            </p:stCondLst>
+                            <p:childTnLst>
+                              <p:par>
+                                <p:cTn id="33" presetID="1" presetClass="entr" presetSubtype="0" fill="hold" nodeType="clickEffect">
+                                  <p:stCondLst>
+                                    <p:cond delay="0"/>
+                                  </p:stCondLst>
+                                  <p:childTnLst>
+                                    <p:set>
+                                      <p:cBhvr>
+                                        <p:cTn id="34" dur="1" fill="hold">
+                                          <p:stCondLst>
+                                            <p:cond delay="0"/>
+                                          </p:stCondLst>
+                                        </p:cTn>
+                                        <p:tgtEl>
+                                          <p:spTgt spid="9"/>
+                                        </p:tgtEl>
+                                        <p:attrNameLst>
+                                          <p:attrName>style.visibility</p:attrName>
+                                        </p:attrNameLst>
+                                      </p:cBhvr>
+                                      <p:to>
+                                        <p:strVal val="visible"/>
+                                      </p:to>
+                                    </p:set>
+                                  </p:childTnLst>
+                                </p:cTn>
+                              </p:par>
+                            </p:childTnLst>
+                          </p:cTn>
+                        </p:par>
+                      </p:childTnLst>
+                    </p:cTn>
+                  </p:par>
+                </p:childTnLst>
+              </p:cTn>
+              <p:prevCondLst>
+                <p:cond evt="onPrev" delay="0">
+                  <p:tgtEl>
+                    <p:sldTgt/>
+                  </p:tgtEl>
+                </p:cond>
+              </p:prevCondLst>
+              <p:nextCondLst>
+                <p:cond evt="onNext" delay="0">
+                  <p:tgtEl>
+                    <p:sldTgt/>
+                  </p:tgtEl>
+                </p:cond>
+              </p:nextCondLst>
+            </p:seq>
+          </p:childTnLst>
+        </p:cTn>
+      </p:par>
+    </p:tnLst>
+    <p:bldLst>
+      <p:bldP spid="7" grpId="0" uiExpand="1" build="p"/>
+    </p:bldLst>
+  </p:timing>
 </p:sld>
 </file>
 
 <file path=ppt/slides/slide6.xml><?xml version="1.0" encoding="utf-8"?>
+<p:sld xmlns:a="http://schemas.openxmlformats.org/drawingml/2006/main" xmlns:r="http://schemas.openxmlformats.org/officeDocument/2006/relationships" xmlns:p="http://schemas.openxmlformats.org/presentationml/2006/main">
+  <p:cSld>
+    <p:spTree>
+      <p:nvGrpSpPr>
+        <p:cNvPr id="1" name="">
+          <a:extLst>
+            <a:ext uri="{FF2B5EF4-FFF2-40B4-BE49-F238E27FC236}">
+              <a16:creationId xmlns:a16="http://schemas.microsoft.com/office/drawing/2014/main" id="{CB960BE4-AB11-6FEE-CBBB-54E39AB88D1E}"/>
+            </a:ext>
+          </a:extLst>
+        </p:cNvPr>
+        <p:cNvGrpSpPr/>
+        <p:nvPr/>
+      </p:nvGrpSpPr>
+      <p:grpSpPr>
+        <a:xfrm>
+          <a:off x="0" y="0"/>
+          <a:ext cx="0" cy="0"/>
+          <a:chOff x="0" y="0"/>
+          <a:chExt cx="0" cy="0"/>
+        </a:xfrm>
+      </p:grpSpPr>
+      <p:sp>
+        <p:nvSpPr>
+          <p:cNvPr id="2" name="Title 1">
+            <a:extLst>
+              <a:ext uri="{FF2B5EF4-FFF2-40B4-BE49-F238E27FC236}">
+                <a16:creationId xmlns:a16="http://schemas.microsoft.com/office/drawing/2014/main" id="{3E7816BB-49DC-B7A6-B85C-C187915E504D}"/>
+              </a:ext>
+            </a:extLst>
+          </p:cNvPr>
+          <p:cNvSpPr>
+            <a:spLocks noGrp="1"/>
+          </p:cNvSpPr>
+          <p:nvPr>
+            <p:ph type="title"/>
+          </p:nvPr>
+        </p:nvSpPr>
+        <p:spPr/>
+        <p:txBody>
+          <a:bodyPr>
+            <a:normAutofit fontScale="90000"/>
+          </a:bodyPr>
+          <a:lstStyle/>
+          <a:p>
+            <a:r>
+              <a:rPr lang="en-US" dirty="0"/>
+              <a:t>Evaluating </a:t>
+            </a:r>
+            <a:r>
+              <a:rPr lang="en-US" dirty="0" err="1"/>
+              <a:t>agains</a:t>
+            </a:r>
+            <a:r>
+              <a:rPr lang="en-US" dirty="0"/>
+              <a:t> the reference</a:t>
+            </a:r>
+          </a:p>
+        </p:txBody>
+      </p:sp>
+      <p:sp>
+        <p:nvSpPr>
+          <p:cNvPr id="3" name="Content Placeholder 2">
+            <a:extLst>
+              <a:ext uri="{FF2B5EF4-FFF2-40B4-BE49-F238E27FC236}">
+                <a16:creationId xmlns:a16="http://schemas.microsoft.com/office/drawing/2014/main" id="{B4B53EB6-1A0E-1499-57CF-08AE4F8261EF}"/>
+              </a:ext>
+            </a:extLst>
+          </p:cNvPr>
+          <p:cNvSpPr>
+            <a:spLocks noGrp="1"/>
+          </p:cNvSpPr>
+          <p:nvPr>
+            <p:ph idx="1"/>
+          </p:nvPr>
+        </p:nvSpPr>
+        <p:spPr>
+          <a:xfrm>
+            <a:off x="327259" y="1596540"/>
+            <a:ext cx="11244161" cy="4948639"/>
+          </a:xfrm>
+        </p:spPr>
+        <p:txBody>
+          <a:bodyPr>
+            <a:normAutofit/>
+          </a:bodyPr>
+          <a:lstStyle/>
+          <a:p>
+            <a:r>
+              <a:rPr lang="en-US" dirty="0">
+                <a:latin typeface="Calibri" panose="020F0502020204030204" pitchFamily="34" charset="0"/>
+                <a:cs typeface="Calibri" panose="020F0502020204030204" pitchFamily="34" charset="0"/>
+              </a:rPr>
+              <a:t>REMEMBER: there is no single complete reference (even human annotation is not perfect):</a:t>
+            </a:r>
+          </a:p>
+          <a:p>
+            <a:pPr lvl="1"/>
+            <a:r>
+              <a:rPr lang="en-US" dirty="0">
+                <a:latin typeface="Calibri" panose="020F0502020204030204" pitchFamily="34" charset="0"/>
+                <a:cs typeface="Calibri" panose="020F0502020204030204" pitchFamily="34" charset="0"/>
+              </a:rPr>
+              <a:t>If assembled transcript matches the reference, it is most likely correct</a:t>
+            </a:r>
+          </a:p>
+          <a:p>
+            <a:pPr lvl="1"/>
+            <a:r>
+              <a:rPr lang="en-US" dirty="0">
+                <a:latin typeface="Calibri" panose="020F0502020204030204" pitchFamily="34" charset="0"/>
+                <a:cs typeface="Calibri" panose="020F0502020204030204" pitchFamily="34" charset="0"/>
+              </a:rPr>
+              <a:t>If assembled transcript does not match the reference, it </a:t>
+            </a:r>
+            <a:r>
+              <a:rPr lang="en-US" i="1" dirty="0">
+                <a:latin typeface="Calibri" panose="020F0502020204030204" pitchFamily="34" charset="0"/>
+                <a:cs typeface="Calibri" panose="020F0502020204030204" pitchFamily="34" charset="0"/>
+              </a:rPr>
+              <a:t>may be </a:t>
+            </a:r>
+            <a:r>
+              <a:rPr lang="en-US" dirty="0">
+                <a:latin typeface="Calibri" panose="020F0502020204030204" pitchFamily="34" charset="0"/>
+                <a:cs typeface="Calibri" panose="020F0502020204030204" pitchFamily="34" charset="0"/>
+              </a:rPr>
+              <a:t>correct</a:t>
+            </a:r>
+          </a:p>
+          <a:p>
+            <a:pPr lvl="1"/>
+            <a:r>
+              <a:rPr lang="en-US" dirty="0">
+                <a:latin typeface="Calibri" panose="020F0502020204030204" pitchFamily="34" charset="0"/>
+                <a:cs typeface="Calibri" panose="020F0502020204030204" pitchFamily="34" charset="0"/>
+              </a:rPr>
+              <a:t>Transcript may match one reference version but not the other</a:t>
+            </a:r>
+          </a:p>
+          <a:p>
+            <a:pPr lvl="1"/>
+            <a:endParaRPr lang="en-US" dirty="0">
+              <a:latin typeface="Calibri" panose="020F0502020204030204" pitchFamily="34" charset="0"/>
+              <a:cs typeface="Calibri" panose="020F0502020204030204" pitchFamily="34" charset="0"/>
+            </a:endParaRPr>
+          </a:p>
+          <a:p>
+            <a:pPr lvl="1"/>
+            <a:endParaRPr lang="en-US" dirty="0">
+              <a:latin typeface="Calibri" panose="020F0502020204030204" pitchFamily="34" charset="0"/>
+              <a:cs typeface="Calibri" panose="020F0502020204030204" pitchFamily="34" charset="0"/>
+            </a:endParaRPr>
+          </a:p>
+          <a:p>
+            <a:pPr marL="457200" lvl="1" indent="0">
+              <a:buNone/>
+            </a:pPr>
+            <a:endParaRPr lang="en-US" dirty="0">
+              <a:latin typeface="Calibri" panose="020F0502020204030204" pitchFamily="34" charset="0"/>
+              <a:cs typeface="Calibri" panose="020F0502020204030204" pitchFamily="34" charset="0"/>
+            </a:endParaRPr>
+          </a:p>
+          <a:p>
+            <a:pPr lvl="1"/>
+            <a:endParaRPr lang="en-US" dirty="0">
+              <a:latin typeface="Calibri" panose="020F0502020204030204" pitchFamily="34" charset="0"/>
+              <a:cs typeface="Calibri" panose="020F0502020204030204" pitchFamily="34" charset="0"/>
+            </a:endParaRPr>
+          </a:p>
+          <a:p>
+            <a:endParaRPr lang="en-US" dirty="0">
+              <a:latin typeface="AdvTT6489ba6c"/>
+            </a:endParaRPr>
+          </a:p>
+          <a:p>
+            <a:endParaRPr lang="en-US" dirty="0">
+              <a:latin typeface="AdvTT6489ba6c"/>
+            </a:endParaRPr>
+          </a:p>
+          <a:p>
+            <a:endParaRPr lang="en-US" dirty="0"/>
+          </a:p>
+        </p:txBody>
+      </p:sp>
+      <p:sp>
+        <p:nvSpPr>
+          <p:cNvPr id="4" name="Slide Number Placeholder 3">
+            <a:extLst>
+              <a:ext uri="{FF2B5EF4-FFF2-40B4-BE49-F238E27FC236}">
+                <a16:creationId xmlns:a16="http://schemas.microsoft.com/office/drawing/2014/main" id="{E01A8A10-BEDE-1871-F490-1FC14B0F46CB}"/>
+              </a:ext>
+            </a:extLst>
+          </p:cNvPr>
+          <p:cNvSpPr>
+            <a:spLocks noGrp="1"/>
+          </p:cNvSpPr>
+          <p:nvPr>
+            <p:ph type="sldNum" sz="quarter" idx="12"/>
+          </p:nvPr>
+        </p:nvSpPr>
+        <p:spPr/>
+        <p:txBody>
+          <a:bodyPr/>
+          <a:lstStyle/>
+          <a:p>
+            <a:fld id="{B82CCC60-E8CD-4174-8B1A-7DF615B22EEF}" type="slidenum">
+              <a:rPr lang="en-US" smtClean="0"/>
+              <a:pPr/>
+              <a:t>6</a:t>
+            </a:fld>
+            <a:endParaRPr lang="en-US"/>
+          </a:p>
+        </p:txBody>
+      </p:sp>
+    </p:spTree>
+    <p:extLst>
+      <p:ext uri="{BB962C8B-B14F-4D97-AF65-F5344CB8AC3E}">
+        <p14:creationId xmlns:p14="http://schemas.microsoft.com/office/powerpoint/2010/main" val="3756441050"/>
+      </p:ext>
+    </p:extLst>
+  </p:cSld>
+  <p:clrMapOvr>
+    <a:masterClrMapping/>
+  </p:clrMapOvr>
+</p:sld>
+</file>
+
+<file path=ppt/slides/slide7.xml><?xml version="1.0" encoding="utf-8"?>
 <p:sld xmlns:a="http://schemas.openxmlformats.org/drawingml/2006/main" xmlns:r="http://schemas.openxmlformats.org/officeDocument/2006/relationships" xmlns:p="http://schemas.openxmlformats.org/presentationml/2006/main">
   <p:cSld>
     <p:spTree>
@@ -31664,7 +32641,7 @@
             <a:fld id="{B82CCC60-E8CD-4174-8B1A-7DF615B22EEF}" type="slidenum">
               <a:rPr lang="en-US" smtClean="0"/>
               <a:pPr/>
-              <a:t>6</a:t>
+              <a:t>7</a:t>
             </a:fld>
             <a:endParaRPr lang="en-US"/>
           </a:p>
@@ -31683,7 +32660,7 @@
 </p:sld>
 </file>
 
-<file path=ppt/slides/slide7.xml><?xml version="1.0" encoding="utf-8"?>
+<file path=ppt/slides/slide8.xml><?xml version="1.0" encoding="utf-8"?>
 <p:sld xmlns:a="http://schemas.openxmlformats.org/drawingml/2006/main" xmlns:r="http://schemas.openxmlformats.org/officeDocument/2006/relationships" xmlns:p="http://schemas.openxmlformats.org/presentationml/2006/main">
   <p:cSld>
     <p:spTree>
@@ -31769,8 +32746,19 @@
                 <a:latin typeface="Calibri" panose="020F0502020204030204" pitchFamily="34" charset="0"/>
                 <a:cs typeface="Calibri" panose="020F0502020204030204" pitchFamily="34" charset="0"/>
               </a:rPr>
-              <a:t>To evaluate transcriptome assemblies we can compare them to a reference (reliable) transcriptome</a:t>
-            </a:r>
+              <a:t>Compare to </a:t>
+            </a:r>
+            <a:r>
+              <a:rPr lang="en-US">
+                <a:latin typeface="Calibri" panose="020F0502020204030204" pitchFamily="34" charset="0"/>
+                <a:cs typeface="Calibri" panose="020F0502020204030204" pitchFamily="34" charset="0"/>
+              </a:rPr>
+              <a:t>the reference</a:t>
+            </a:r>
+            <a:endParaRPr lang="en-US" dirty="0">
+              <a:latin typeface="Calibri" panose="020F0502020204030204" pitchFamily="34" charset="0"/>
+              <a:cs typeface="Calibri" panose="020F0502020204030204" pitchFamily="34" charset="0"/>
+            </a:endParaRPr>
           </a:p>
           <a:p>
             <a:endParaRPr lang="en-US" dirty="0">
@@ -31934,7 +32922,7 @@
             <a:fld id="{B82CCC60-E8CD-4174-8B1A-7DF615B22EEF}" type="slidenum">
               <a:rPr lang="en-US" smtClean="0"/>
               <a:pPr/>
-              <a:t>7</a:t>
+              <a:t>8</a:t>
             </a:fld>
             <a:endParaRPr lang="en-US"/>
           </a:p>
@@ -31953,7 +32941,7 @@
 </p:sld>
 </file>
 
-<file path=ppt/slides/slide8.xml><?xml version="1.0" encoding="utf-8"?>
+<file path=ppt/slides/slide9.xml><?xml version="1.0" encoding="utf-8"?>
 <p:sld xmlns:a="http://schemas.openxmlformats.org/drawingml/2006/main" xmlns:r="http://schemas.openxmlformats.org/officeDocument/2006/relationships" xmlns:p="http://schemas.openxmlformats.org/presentationml/2006/main">
   <p:cSld>
     <p:spTree>
@@ -32024,7 +33012,7 @@
             <a:fld id="{B82CCC60-E8CD-4174-8B1A-7DF615B22EEF}" type="slidenum">
               <a:rPr lang="en-US" smtClean="0"/>
               <a:pPr/>
-              <a:t>8</a:t>
+              <a:t>9</a:t>
             </a:fld>
             <a:endParaRPr lang="en-US"/>
           </a:p>
@@ -32122,202 +33110,6 @@
     <p:extLst>
       <p:ext uri="{BB962C8B-B14F-4D97-AF65-F5344CB8AC3E}">
         <p14:creationId xmlns:p14="http://schemas.microsoft.com/office/powerpoint/2010/main" val="2230780895"/>
-      </p:ext>
-    </p:extLst>
-  </p:cSld>
-  <p:clrMapOvr>
-    <a:masterClrMapping/>
-  </p:clrMapOvr>
-</p:sld>
-</file>
-
-<file path=ppt/slides/slide9.xml><?xml version="1.0" encoding="utf-8"?>
-<p:sld xmlns:a="http://schemas.openxmlformats.org/drawingml/2006/main" xmlns:r="http://schemas.openxmlformats.org/officeDocument/2006/relationships" xmlns:p="http://schemas.openxmlformats.org/presentationml/2006/main">
-  <p:cSld>
-    <p:spTree>
-      <p:nvGrpSpPr>
-        <p:cNvPr id="1" name=""/>
-        <p:cNvGrpSpPr/>
-        <p:nvPr/>
-      </p:nvGrpSpPr>
-      <p:grpSpPr>
-        <a:xfrm>
-          <a:off x="0" y="0"/>
-          <a:ext cx="0" cy="0"/>
-          <a:chOff x="0" y="0"/>
-          <a:chExt cx="0" cy="0"/>
-        </a:xfrm>
-      </p:grpSpPr>
-      <p:sp>
-        <p:nvSpPr>
-          <p:cNvPr id="2" name="Title 1">
-            <a:extLst>
-              <a:ext uri="{FF2B5EF4-FFF2-40B4-BE49-F238E27FC236}">
-                <a16:creationId xmlns:a16="http://schemas.microsoft.com/office/drawing/2014/main" id="{81654682-97AD-1D8D-F2D1-E5F28017AE25}"/>
-              </a:ext>
-            </a:extLst>
-          </p:cNvPr>
-          <p:cNvSpPr>
-            <a:spLocks noGrp="1"/>
-          </p:cNvSpPr>
-          <p:nvPr>
-            <p:ph type="title"/>
-          </p:nvPr>
-        </p:nvSpPr>
-        <p:spPr/>
-        <p:txBody>
-          <a:bodyPr>
-            <a:normAutofit fontScale="90000"/>
-          </a:bodyPr>
-          <a:lstStyle/>
-          <a:p>
-            <a:r>
-              <a:rPr lang="en-US" dirty="0"/>
-              <a:t>Measures of correctness</a:t>
-            </a:r>
-          </a:p>
-        </p:txBody>
-      </p:sp>
-      <p:sp>
-        <p:nvSpPr>
-          <p:cNvPr id="3" name="Content Placeholder 2">
-            <a:extLst>
-              <a:ext uri="{FF2B5EF4-FFF2-40B4-BE49-F238E27FC236}">
-                <a16:creationId xmlns:a16="http://schemas.microsoft.com/office/drawing/2014/main" id="{FF3B533E-098A-AB07-5BD0-A182675FCD3A}"/>
-              </a:ext>
-            </a:extLst>
-          </p:cNvPr>
-          <p:cNvSpPr>
-            <a:spLocks noGrp="1"/>
-          </p:cNvSpPr>
-          <p:nvPr>
-            <p:ph idx="1"/>
-          </p:nvPr>
-        </p:nvSpPr>
-        <p:spPr>
-          <a:xfrm>
-            <a:off x="194359" y="1615790"/>
-            <a:ext cx="10972800" cy="3918803"/>
-          </a:xfrm>
-        </p:spPr>
-        <p:txBody>
-          <a:bodyPr/>
-          <a:lstStyle/>
-          <a:p>
-            <a:r>
-              <a:rPr lang="en-US" dirty="0"/>
-              <a:t>Sensitivity (Recall), Specificity </a:t>
-            </a:r>
-            <a:br>
-              <a:rPr lang="en-US" dirty="0"/>
-            </a:br>
-            <a:r>
-              <a:rPr lang="en-US" dirty="0"/>
-              <a:t>and Precision</a:t>
-            </a:r>
-          </a:p>
-          <a:p>
-            <a:r>
-              <a:rPr lang="en-US" dirty="0"/>
-              <a:t>Image credit: Wikipedia</a:t>
-            </a:r>
-          </a:p>
-        </p:txBody>
-      </p:sp>
-      <p:sp>
-        <p:nvSpPr>
-          <p:cNvPr id="4" name="Slide Number Placeholder 3">
-            <a:extLst>
-              <a:ext uri="{FF2B5EF4-FFF2-40B4-BE49-F238E27FC236}">
-                <a16:creationId xmlns:a16="http://schemas.microsoft.com/office/drawing/2014/main" id="{DA292D60-DA5E-14F9-0F07-0CB969D6706D}"/>
-              </a:ext>
-            </a:extLst>
-          </p:cNvPr>
-          <p:cNvSpPr>
-            <a:spLocks noGrp="1"/>
-          </p:cNvSpPr>
-          <p:nvPr>
-            <p:ph type="sldNum" sz="quarter" idx="12"/>
-          </p:nvPr>
-        </p:nvSpPr>
-        <p:spPr/>
-        <p:txBody>
-          <a:bodyPr/>
-          <a:lstStyle/>
-          <a:p>
-            <a:fld id="{B82CCC60-E8CD-4174-8B1A-7DF615B22EEF}" type="slidenum">
-              <a:rPr lang="en-US" smtClean="0"/>
-              <a:pPr/>
-              <a:t>9</a:t>
-            </a:fld>
-            <a:endParaRPr lang="en-US"/>
-          </a:p>
-        </p:txBody>
-      </p:sp>
-      <p:pic>
-        <p:nvPicPr>
-          <p:cNvPr id="5" name="Picture 4">
-            <a:extLst>
-              <a:ext uri="{FF2B5EF4-FFF2-40B4-BE49-F238E27FC236}">
-                <a16:creationId xmlns:a16="http://schemas.microsoft.com/office/drawing/2014/main" id="{F3340996-5475-CEF7-03C4-9CB816CECE89}"/>
-              </a:ext>
-            </a:extLst>
-          </p:cNvPr>
-          <p:cNvPicPr>
-            <a:picLocks noChangeAspect="1"/>
-          </p:cNvPicPr>
-          <p:nvPr/>
-        </p:nvPicPr>
-        <p:blipFill>
-          <a:blip r:embed="rId2"/>
-          <a:stretch>
-            <a:fillRect/>
-          </a:stretch>
-        </p:blipFill>
-        <p:spPr>
-          <a:xfrm>
-            <a:off x="8653094" y="-13861"/>
-            <a:ext cx="3538906" cy="6735337"/>
-          </a:xfrm>
-          <a:prstGeom prst="rect">
-            <a:avLst/>
-          </a:prstGeom>
-        </p:spPr>
-      </p:pic>
-      <p:pic>
-        <p:nvPicPr>
-          <p:cNvPr id="6" name="Picture 5">
-            <a:extLst>
-              <a:ext uri="{FF2B5EF4-FFF2-40B4-BE49-F238E27FC236}">
-                <a16:creationId xmlns:a16="http://schemas.microsoft.com/office/drawing/2014/main" id="{DEA48554-3C2E-C870-63A6-4244E37829CF}"/>
-              </a:ext>
-            </a:extLst>
-          </p:cNvPr>
-          <p:cNvPicPr>
-            <a:picLocks noChangeAspect="1"/>
-          </p:cNvPicPr>
-          <p:nvPr/>
-        </p:nvPicPr>
-        <p:blipFill>
-          <a:blip r:embed="rId3"/>
-          <a:stretch>
-            <a:fillRect/>
-          </a:stretch>
-        </p:blipFill>
-        <p:spPr>
-          <a:xfrm>
-            <a:off x="5216423" y="-13861"/>
-            <a:ext cx="3436671" cy="6858000"/>
-          </a:xfrm>
-          <a:prstGeom prst="rect">
-            <a:avLst/>
-          </a:prstGeom>
-        </p:spPr>
-      </p:pic>
-    </p:spTree>
-    <p:extLst>
-      <p:ext uri="{BB962C8B-B14F-4D97-AF65-F5344CB8AC3E}">
-        <p14:creationId xmlns:p14="http://schemas.microsoft.com/office/powerpoint/2010/main" val="664404228"/>
       </p:ext>
     </p:extLst>
   </p:cSld>

--- a/Lectures/Week 10 -- Evaluation of Transcript assemblies.pptx
+++ b/Lectures/Week 10 -- Evaluation of Transcript assemblies.pptx
@@ -5,33 +5,31 @@
     <p:sldMasterId id="2147483648" r:id="rId1"/>
   </p:sldMasterIdLst>
   <p:notesMasterIdLst>
-    <p:notesMasterId r:id="rId26"/>
+    <p:notesMasterId r:id="rId24"/>
   </p:notesMasterIdLst>
   <p:sldIdLst>
     <p:sldId id="272" r:id="rId2"/>
-    <p:sldId id="850" r:id="rId3"/>
-    <p:sldId id="572" r:id="rId4"/>
-    <p:sldId id="831" r:id="rId5"/>
-    <p:sldId id="824" r:id="rId6"/>
-    <p:sldId id="888" r:id="rId7"/>
-    <p:sldId id="832" r:id="rId8"/>
-    <p:sldId id="887" r:id="rId9"/>
-    <p:sldId id="834" r:id="rId10"/>
-    <p:sldId id="835" r:id="rId11"/>
-    <p:sldId id="836" r:id="rId12"/>
-    <p:sldId id="883" r:id="rId13"/>
-    <p:sldId id="837" r:id="rId14"/>
-    <p:sldId id="838" r:id="rId15"/>
-    <p:sldId id="839" r:id="rId16"/>
-    <p:sldId id="840" r:id="rId17"/>
-    <p:sldId id="842" r:id="rId18"/>
-    <p:sldId id="844" r:id="rId19"/>
-    <p:sldId id="845" r:id="rId20"/>
-    <p:sldId id="843" r:id="rId21"/>
-    <p:sldId id="846" r:id="rId22"/>
-    <p:sldId id="886" r:id="rId23"/>
-    <p:sldId id="884" r:id="rId24"/>
-    <p:sldId id="885" r:id="rId25"/>
+    <p:sldId id="831" r:id="rId3"/>
+    <p:sldId id="824" r:id="rId4"/>
+    <p:sldId id="888" r:id="rId5"/>
+    <p:sldId id="832" r:id="rId6"/>
+    <p:sldId id="887" r:id="rId7"/>
+    <p:sldId id="834" r:id="rId8"/>
+    <p:sldId id="835" r:id="rId9"/>
+    <p:sldId id="836" r:id="rId10"/>
+    <p:sldId id="883" r:id="rId11"/>
+    <p:sldId id="837" r:id="rId12"/>
+    <p:sldId id="838" r:id="rId13"/>
+    <p:sldId id="839" r:id="rId14"/>
+    <p:sldId id="840" r:id="rId15"/>
+    <p:sldId id="842" r:id="rId16"/>
+    <p:sldId id="844" r:id="rId17"/>
+    <p:sldId id="845" r:id="rId18"/>
+    <p:sldId id="843" r:id="rId19"/>
+    <p:sldId id="846" r:id="rId20"/>
+    <p:sldId id="886" r:id="rId21"/>
+    <p:sldId id="884" r:id="rId22"/>
+    <p:sldId id="885" r:id="rId23"/>
   </p:sldIdLst>
   <p:sldSz cx="12192000" cy="6858000"/>
   <p:notesSz cx="6858000" cy="9144000"/>
@@ -152,7 +150,7 @@
 <file path=ppt/revisionInfo.xml><?xml version="1.0" encoding="utf-8"?>
 <p1510:revInfo xmlns:a="http://schemas.openxmlformats.org/drawingml/2006/main" xmlns:r="http://schemas.openxmlformats.org/officeDocument/2006/relationships" xmlns:p1510="http://schemas.microsoft.com/office/powerpoint/2015/10/main">
   <p1510:revLst>
-    <p1510:client id="{CE72F1D9-0B96-4765-ABAC-5A7B3984C109}" v="51" dt="2026-10-28T17:41:18.880"/>
+    <p1510:client id="{CE72F1D9-0B96-4765-ABAC-5A7B3984C109}" v="53" dt="2026-10-30T15:32:25.882"/>
   </p1510:revLst>
 </p1510:revInfo>
 </file>
@@ -161,25 +159,24 @@
 <pc:chgInfo xmlns:a="http://schemas.openxmlformats.org/drawingml/2006/main" xmlns:r="http://schemas.openxmlformats.org/officeDocument/2006/relationships" xmlns:ac="http://schemas.microsoft.com/office/drawing/2013/main/command" xmlns:pc="http://schemas.microsoft.com/office/powerpoint/2013/main/command">
   <pc:docChgLst>
     <pc:chgData name="Aleksey Zimin" userId="7f2637d0bc515791" providerId="LiveId" clId="{5F359FD6-B8E9-41DA-90EC-0BA4FD0F3073}"/>
-    <pc:docChg chg="custSel addSld modSld">
-      <pc:chgData name="Aleksey Zimin" userId="7f2637d0bc515791" providerId="LiveId" clId="{5F359FD6-B8E9-41DA-90EC-0BA4FD0F3073}" dt="2026-10-28T17:42:50.692" v="849" actId="20577"/>
+    <pc:docChg chg="undo custSel addSld delSld modSld">
+      <pc:chgData name="Aleksey Zimin" userId="7f2637d0bc515791" providerId="LiveId" clId="{5F359FD6-B8E9-41DA-90EC-0BA4FD0F3073}" dt="2026-10-30T15:33:03.964" v="1055" actId="5793"/>
       <pc:docMkLst>
         <pc:docMk/>
       </pc:docMkLst>
+      <pc:sldChg chg="del">
+        <pc:chgData name="Aleksey Zimin" userId="7f2637d0bc515791" providerId="LiveId" clId="{5F359FD6-B8E9-41DA-90EC-0BA4FD0F3073}" dt="2026-10-30T15:28:54.111" v="852" actId="2696"/>
+        <pc:sldMkLst>
+          <pc:docMk/>
+          <pc:sldMk cId="3644876859" sldId="572"/>
+        </pc:sldMkLst>
+      </pc:sldChg>
       <pc:sldChg chg="addSp delSp modSp mod modAnim">
         <pc:chgData name="Aleksey Zimin" userId="7f2637d0bc515791" providerId="LiveId" clId="{5F359FD6-B8E9-41DA-90EC-0BA4FD0F3073}" dt="2026-10-28T17:39:31.556" v="743"/>
         <pc:sldMkLst>
           <pc:docMk/>
           <pc:sldMk cId="1248438669" sldId="824"/>
         </pc:sldMkLst>
-        <pc:spChg chg="add del mod">
-          <ac:chgData name="Aleksey Zimin" userId="7f2637d0bc515791" providerId="LiveId" clId="{5F359FD6-B8E9-41DA-90EC-0BA4FD0F3073}" dt="2026-10-28T17:27:53.212" v="156" actId="478"/>
-          <ac:spMkLst>
-            <pc:docMk/>
-            <pc:sldMk cId="1248438669" sldId="824"/>
-            <ac:spMk id="3" creationId="{3BB23EBC-12D2-DEA9-75EB-A9D2577FC2B9}"/>
-          </ac:spMkLst>
-        </pc:spChg>
         <pc:spChg chg="add mod">
           <ac:chgData name="Aleksey Zimin" userId="7f2637d0bc515791" providerId="LiveId" clId="{5F359FD6-B8E9-41DA-90EC-0BA4FD0F3073}" dt="2026-10-28T17:36:05.056" v="694" actId="27636"/>
           <ac:spMkLst>
@@ -188,14 +185,6 @@
             <ac:spMk id="7" creationId="{4FBE7125-6198-264D-1FB2-291E2C8F2ADE}"/>
           </ac:spMkLst>
         </pc:spChg>
-        <pc:picChg chg="del">
-          <ac:chgData name="Aleksey Zimin" userId="7f2637d0bc515791" providerId="LiveId" clId="{5F359FD6-B8E9-41DA-90EC-0BA4FD0F3073}" dt="2026-10-28T17:27:34.878" v="153" actId="478"/>
-          <ac:picMkLst>
-            <pc:docMk/>
-            <pc:sldMk cId="1248438669" sldId="824"/>
-            <ac:picMk id="5" creationId="{5413609A-1B79-8C95-DF04-74C5B41AFF97}"/>
-          </ac:picMkLst>
-        </pc:picChg>
         <pc:picChg chg="add mod">
           <ac:chgData name="Aleksey Zimin" userId="7f2637d0bc515791" providerId="LiveId" clId="{5F359FD6-B8E9-41DA-90EC-0BA4FD0F3073}" dt="2026-10-28T17:36:15.899" v="696" actId="1076"/>
           <ac:picMkLst>
@@ -221,14 +210,36 @@
           </ac:picMkLst>
         </pc:picChg>
       </pc:sldChg>
+      <pc:sldChg chg="modSp mod modAnim">
+        <pc:chgData name="Aleksey Zimin" userId="7f2637d0bc515791" providerId="LiveId" clId="{5F359FD6-B8E9-41DA-90EC-0BA4FD0F3073}" dt="2026-10-30T15:32:25.881" v="1054"/>
+        <pc:sldMkLst>
+          <pc:docMk/>
+          <pc:sldMk cId="4127514744" sldId="832"/>
+        </pc:sldMkLst>
+        <pc:spChg chg="mod">
+          <ac:chgData name="Aleksey Zimin" userId="7f2637d0bc515791" providerId="LiveId" clId="{5F359FD6-B8E9-41DA-90EC-0BA4FD0F3073}" dt="2026-10-30T15:32:08.612" v="1052" actId="20577"/>
+          <ac:spMkLst>
+            <pc:docMk/>
+            <pc:sldMk cId="4127514744" sldId="832"/>
+            <ac:spMk id="3" creationId="{72435F73-7EFD-DF06-380A-5766C516EF3C}"/>
+          </ac:spMkLst>
+        </pc:spChg>
+      </pc:sldChg>
+      <pc:sldChg chg="add del">
+        <pc:chgData name="Aleksey Zimin" userId="7f2637d0bc515791" providerId="LiveId" clId="{5F359FD6-B8E9-41DA-90EC-0BA4FD0F3073}" dt="2026-10-30T15:28:54.111" v="852" actId="2696"/>
+        <pc:sldMkLst>
+          <pc:docMk/>
+          <pc:sldMk cId="1812347551" sldId="850"/>
+        </pc:sldMkLst>
+      </pc:sldChg>
       <pc:sldChg chg="modSp mod">
-        <pc:chgData name="Aleksey Zimin" userId="7f2637d0bc515791" providerId="LiveId" clId="{5F359FD6-B8E9-41DA-90EC-0BA4FD0F3073}" dt="2026-10-28T17:42:50.692" v="849" actId="20577"/>
+        <pc:chgData name="Aleksey Zimin" userId="7f2637d0bc515791" providerId="LiveId" clId="{5F359FD6-B8E9-41DA-90EC-0BA4FD0F3073}" dt="2026-10-30T15:33:03.964" v="1055" actId="5793"/>
         <pc:sldMkLst>
           <pc:docMk/>
           <pc:sldMk cId="1808216714" sldId="887"/>
         </pc:sldMkLst>
         <pc:spChg chg="mod">
-          <ac:chgData name="Aleksey Zimin" userId="7f2637d0bc515791" providerId="LiveId" clId="{5F359FD6-B8E9-41DA-90EC-0BA4FD0F3073}" dt="2026-10-28T17:42:50.692" v="849" actId="20577"/>
+          <ac:chgData name="Aleksey Zimin" userId="7f2637d0bc515791" providerId="LiveId" clId="{5F359FD6-B8E9-41DA-90EC-0BA4FD0F3073}" dt="2026-10-30T15:33:03.964" v="1055" actId="5793"/>
           <ac:spMkLst>
             <pc:docMk/>
             <pc:sldMk cId="1808216714" sldId="887"/>
@@ -338,7 +349,7 @@
           <a:p>
             <a:fld id="{78C61B90-1233-4265-A8E1-4CB85DE126FB}" type="datetimeFigureOut">
               <a:rPr lang="en-US" smtClean="0"/>
-              <a:t>10/28/2026</a:t>
+              <a:t>10/30/2026</a:t>
             </a:fld>
             <a:endParaRPr lang="en-US"/>
           </a:p>
@@ -670,7 +681,7 @@
           <a:p>
             <a:fld id="{A6313FD6-7C7B-4426-BFC4-490AC0CFBE05}" type="slidenum">
               <a:rPr lang="en-US" smtClean="0"/>
-              <a:t>17</a:t>
+              <a:t>15</a:t>
             </a:fld>
             <a:endParaRPr lang="en-US"/>
           </a:p>
@@ -778,7 +789,7 @@
           <a:p>
             <a:fld id="{A6313FD6-7C7B-4426-BFC4-490AC0CFBE05}" type="slidenum">
               <a:rPr lang="en-US" smtClean="0"/>
-              <a:t>18</a:t>
+              <a:t>16</a:t>
             </a:fld>
             <a:endParaRPr lang="en-US"/>
           </a:p>
@@ -886,7 +897,7 @@
           <a:p>
             <a:fld id="{A6313FD6-7C7B-4426-BFC4-490AC0CFBE05}" type="slidenum">
               <a:rPr lang="en-US" smtClean="0"/>
-              <a:t>19</a:t>
+              <a:t>17</a:t>
             </a:fld>
             <a:endParaRPr lang="en-US"/>
           </a:p>
@@ -1116,7 +1127,7 @@
           <a:p>
             <a:fld id="{E2773EFF-6084-460D-96FA-2FA787A98816}" type="datetime1">
               <a:rPr lang="en-US" smtClean="0"/>
-              <a:t>10/28/2026</a:t>
+              <a:t>10/30/2026</a:t>
             </a:fld>
             <a:endParaRPr lang="en-US"/>
           </a:p>
@@ -1369,7 +1380,7 @@
           <a:p>
             <a:fld id="{013692F8-B2BD-4E07-9A92-E5080B238DFA}" type="datetime1">
               <a:rPr lang="en-US" smtClean="0"/>
-              <a:t>10/28/2026</a:t>
+              <a:t>10/30/2026</a:t>
             </a:fld>
             <a:endParaRPr lang="en-US"/>
           </a:p>
@@ -1538,7 +1549,7 @@
           <a:p>
             <a:fld id="{82A88673-6F42-4090-A040-176AF0E6DEAE}" type="datetime1">
               <a:rPr lang="en-US" smtClean="0"/>
-              <a:t>10/28/2026</a:t>
+              <a:t>10/30/2026</a:t>
             </a:fld>
             <a:endParaRPr lang="en-US"/>
           </a:p>
@@ -1717,7 +1728,7 @@
           <a:p>
             <a:fld id="{EC715288-B7FB-4510-97B0-C840A6671DDD}" type="datetime1">
               <a:rPr lang="en-US" smtClean="0"/>
-              <a:t>10/28/2026</a:t>
+              <a:t>10/30/2026</a:t>
             </a:fld>
             <a:endParaRPr lang="en-US"/>
           </a:p>
@@ -2378,7 +2389,7 @@
           <a:p>
             <a:fld id="{93FF86A1-0F17-41D8-9FFA-9520AF33BFC6}" type="datetime1">
               <a:rPr lang="en-US" smtClean="0"/>
-              <a:t>10/28/2026</a:t>
+              <a:t>10/30/2026</a:t>
             </a:fld>
             <a:endParaRPr lang="en-US"/>
           </a:p>
@@ -2613,7 +2624,7 @@
           <a:p>
             <a:fld id="{E41692F4-087A-4F4C-9829-F340F0646973}" type="datetime1">
               <a:rPr lang="en-US" smtClean="0"/>
-              <a:t>10/28/2026</a:t>
+              <a:t>10/30/2026</a:t>
             </a:fld>
             <a:endParaRPr lang="en-US"/>
           </a:p>
@@ -2859,7 +2870,7 @@
           <a:p>
             <a:fld id="{93E80BFE-E826-4B70-BF6B-3710B05194AF}" type="datetime1">
               <a:rPr lang="en-US" smtClean="0"/>
-              <a:t>10/28/2026</a:t>
+              <a:t>10/30/2026</a:t>
             </a:fld>
             <a:endParaRPr lang="en-US"/>
           </a:p>
@@ -3145,7 +3156,7 @@
           <a:p>
             <a:fld id="{9C5182DA-5425-42F9-BDB8-0DBDA15B981E}" type="datetime1">
               <a:rPr lang="en-US" smtClean="0"/>
-              <a:t>10/28/2026</a:t>
+              <a:t>10/30/2026</a:t>
             </a:fld>
             <a:endParaRPr lang="en-US"/>
           </a:p>
@@ -3644,7 +3655,7 @@
           <a:p>
             <a:fld id="{131B7164-C7F7-495E-9D5F-43BBDEBECF81}" type="datetime1">
               <a:rPr lang="en-US" smtClean="0"/>
-              <a:t>10/28/2026</a:t>
+              <a:t>10/30/2026</a:t>
             </a:fld>
             <a:endParaRPr lang="en-US"/>
           </a:p>
@@ -3762,7 +3773,7 @@
           <a:p>
             <a:fld id="{2D6C5AB8-78AA-4DA3-952F-F5057D2DAAA5}" type="datetime1">
               <a:rPr lang="en-US" smtClean="0"/>
-              <a:t>10/28/2026</a:t>
+              <a:t>10/30/2026</a:t>
             </a:fld>
             <a:endParaRPr lang="en-US"/>
           </a:p>
@@ -3858,7 +3869,7 @@
           <a:p>
             <a:fld id="{41CCB869-D2D8-4282-A525-D63712C1B900}" type="datetime1">
               <a:rPr lang="en-US" smtClean="0"/>
-              <a:t>10/28/2026</a:t>
+              <a:t>10/30/2026</a:t>
             </a:fld>
             <a:endParaRPr lang="en-US"/>
           </a:p>
@@ -4134,7 +4145,7 @@
           <a:p>
             <a:fld id="{25A8CF58-29B0-4D31-BE55-D9C1F05848B7}" type="datetime1">
               <a:rPr lang="en-US" smtClean="0"/>
-              <a:t>10/28/2026</a:t>
+              <a:t>10/30/2026</a:t>
             </a:fld>
             <a:endParaRPr lang="en-US"/>
           </a:p>
@@ -4355,7 +4366,7 @@
           <a:p>
             <a:fld id="{8F08395F-151A-4402-98B5-C84E535B9AEF}" type="datetime1">
               <a:rPr lang="en-US" smtClean="0"/>
-              <a:t>10/28/2026</a:t>
+              <a:t>10/30/2026</a:t>
             </a:fld>
             <a:endParaRPr lang="en-US"/>
           </a:p>
@@ -4899,324 +4910,6 @@
           <p:cNvPr id="2" name="Title 1">
             <a:extLst>
               <a:ext uri="{FF2B5EF4-FFF2-40B4-BE49-F238E27FC236}">
-                <a16:creationId xmlns:a16="http://schemas.microsoft.com/office/drawing/2014/main" id="{81654682-97AD-1D8D-F2D1-E5F28017AE25}"/>
-              </a:ext>
-            </a:extLst>
-          </p:cNvPr>
-          <p:cNvSpPr>
-            <a:spLocks noGrp="1"/>
-          </p:cNvSpPr>
-          <p:nvPr>
-            <p:ph type="title"/>
-          </p:nvPr>
-        </p:nvSpPr>
-        <p:spPr/>
-        <p:txBody>
-          <a:bodyPr>
-            <a:normAutofit fontScale="90000"/>
-          </a:bodyPr>
-          <a:lstStyle/>
-          <a:p>
-            <a:r>
-              <a:rPr lang="en-US" dirty="0"/>
-              <a:t>Measures of correctness</a:t>
-            </a:r>
-          </a:p>
-        </p:txBody>
-      </p:sp>
-      <p:sp>
-        <p:nvSpPr>
-          <p:cNvPr id="3" name="Content Placeholder 2">
-            <a:extLst>
-              <a:ext uri="{FF2B5EF4-FFF2-40B4-BE49-F238E27FC236}">
-                <a16:creationId xmlns:a16="http://schemas.microsoft.com/office/drawing/2014/main" id="{FF3B533E-098A-AB07-5BD0-A182675FCD3A}"/>
-              </a:ext>
-            </a:extLst>
-          </p:cNvPr>
-          <p:cNvSpPr>
-            <a:spLocks noGrp="1"/>
-          </p:cNvSpPr>
-          <p:nvPr>
-            <p:ph idx="1"/>
-          </p:nvPr>
-        </p:nvSpPr>
-        <p:spPr>
-          <a:xfrm>
-            <a:off x="194359" y="1615790"/>
-            <a:ext cx="10972800" cy="3918803"/>
-          </a:xfrm>
-        </p:spPr>
-        <p:txBody>
-          <a:bodyPr/>
-          <a:lstStyle/>
-          <a:p>
-            <a:r>
-              <a:rPr lang="en-US" dirty="0"/>
-              <a:t>Sensitivity (Recall), Specificity </a:t>
-            </a:r>
-            <a:br>
-              <a:rPr lang="en-US" dirty="0"/>
-            </a:br>
-            <a:r>
-              <a:rPr lang="en-US" dirty="0"/>
-              <a:t>and Precision</a:t>
-            </a:r>
-          </a:p>
-          <a:p>
-            <a:r>
-              <a:rPr lang="en-US" dirty="0"/>
-              <a:t>Image credit: Wikipedia</a:t>
-            </a:r>
-          </a:p>
-        </p:txBody>
-      </p:sp>
-      <p:sp>
-        <p:nvSpPr>
-          <p:cNvPr id="4" name="Slide Number Placeholder 3">
-            <a:extLst>
-              <a:ext uri="{FF2B5EF4-FFF2-40B4-BE49-F238E27FC236}">
-                <a16:creationId xmlns:a16="http://schemas.microsoft.com/office/drawing/2014/main" id="{DA292D60-DA5E-14F9-0F07-0CB969D6706D}"/>
-              </a:ext>
-            </a:extLst>
-          </p:cNvPr>
-          <p:cNvSpPr>
-            <a:spLocks noGrp="1"/>
-          </p:cNvSpPr>
-          <p:nvPr>
-            <p:ph type="sldNum" sz="quarter" idx="12"/>
-          </p:nvPr>
-        </p:nvSpPr>
-        <p:spPr/>
-        <p:txBody>
-          <a:bodyPr/>
-          <a:lstStyle/>
-          <a:p>
-            <a:fld id="{B82CCC60-E8CD-4174-8B1A-7DF615B22EEF}" type="slidenum">
-              <a:rPr lang="en-US" smtClean="0"/>
-              <a:pPr/>
-              <a:t>10</a:t>
-            </a:fld>
-            <a:endParaRPr lang="en-US"/>
-          </a:p>
-        </p:txBody>
-      </p:sp>
-      <p:pic>
-        <p:nvPicPr>
-          <p:cNvPr id="5" name="Picture 4">
-            <a:extLst>
-              <a:ext uri="{FF2B5EF4-FFF2-40B4-BE49-F238E27FC236}">
-                <a16:creationId xmlns:a16="http://schemas.microsoft.com/office/drawing/2014/main" id="{F3340996-5475-CEF7-03C4-9CB816CECE89}"/>
-              </a:ext>
-            </a:extLst>
-          </p:cNvPr>
-          <p:cNvPicPr>
-            <a:picLocks noChangeAspect="1"/>
-          </p:cNvPicPr>
-          <p:nvPr/>
-        </p:nvPicPr>
-        <p:blipFill>
-          <a:blip r:embed="rId2"/>
-          <a:stretch>
-            <a:fillRect/>
-          </a:stretch>
-        </p:blipFill>
-        <p:spPr>
-          <a:xfrm>
-            <a:off x="8653094" y="-13861"/>
-            <a:ext cx="3538906" cy="6735337"/>
-          </a:xfrm>
-          <a:prstGeom prst="rect">
-            <a:avLst/>
-          </a:prstGeom>
-        </p:spPr>
-      </p:pic>
-      <p:pic>
-        <p:nvPicPr>
-          <p:cNvPr id="6" name="Picture 5">
-            <a:extLst>
-              <a:ext uri="{FF2B5EF4-FFF2-40B4-BE49-F238E27FC236}">
-                <a16:creationId xmlns:a16="http://schemas.microsoft.com/office/drawing/2014/main" id="{DEA48554-3C2E-C870-63A6-4244E37829CF}"/>
-              </a:ext>
-            </a:extLst>
-          </p:cNvPr>
-          <p:cNvPicPr>
-            <a:picLocks noChangeAspect="1"/>
-          </p:cNvPicPr>
-          <p:nvPr/>
-        </p:nvPicPr>
-        <p:blipFill>
-          <a:blip r:embed="rId3"/>
-          <a:stretch>
-            <a:fillRect/>
-          </a:stretch>
-        </p:blipFill>
-        <p:spPr>
-          <a:xfrm>
-            <a:off x="5216423" y="-13861"/>
-            <a:ext cx="3436671" cy="6858000"/>
-          </a:xfrm>
-          <a:prstGeom prst="rect">
-            <a:avLst/>
-          </a:prstGeom>
-        </p:spPr>
-      </p:pic>
-    </p:spTree>
-    <p:extLst>
-      <p:ext uri="{BB962C8B-B14F-4D97-AF65-F5344CB8AC3E}">
-        <p14:creationId xmlns:p14="http://schemas.microsoft.com/office/powerpoint/2010/main" val="664404228"/>
-      </p:ext>
-    </p:extLst>
-  </p:cSld>
-  <p:clrMapOvr>
-    <a:masterClrMapping/>
-  </p:clrMapOvr>
-</p:sld>
-</file>
-
-<file path=ppt/slides/slide11.xml><?xml version="1.0" encoding="utf-8"?>
-<p:sld xmlns:a="http://schemas.openxmlformats.org/drawingml/2006/main" xmlns:r="http://schemas.openxmlformats.org/officeDocument/2006/relationships" xmlns:p="http://schemas.openxmlformats.org/presentationml/2006/main">
-  <p:cSld>
-    <p:spTree>
-      <p:nvGrpSpPr>
-        <p:cNvPr id="1" name=""/>
-        <p:cNvGrpSpPr/>
-        <p:nvPr/>
-      </p:nvGrpSpPr>
-      <p:grpSpPr>
-        <a:xfrm>
-          <a:off x="0" y="0"/>
-          <a:ext cx="0" cy="0"/>
-          <a:chOff x="0" y="0"/>
-          <a:chExt cx="0" cy="0"/>
-        </a:xfrm>
-      </p:grpSpPr>
-      <p:sp>
-        <p:nvSpPr>
-          <p:cNvPr id="2" name="Title 1">
-            <a:extLst>
-              <a:ext uri="{FF2B5EF4-FFF2-40B4-BE49-F238E27FC236}">
-                <a16:creationId xmlns:a16="http://schemas.microsoft.com/office/drawing/2014/main" id="{C72832CB-7DC8-E108-E32D-654A3AC76EE4}"/>
-              </a:ext>
-            </a:extLst>
-          </p:cNvPr>
-          <p:cNvSpPr>
-            <a:spLocks noGrp="1"/>
-          </p:cNvSpPr>
-          <p:nvPr>
-            <p:ph type="title"/>
-          </p:nvPr>
-        </p:nvSpPr>
-        <p:spPr/>
-        <p:txBody>
-          <a:bodyPr>
-            <a:normAutofit fontScale="90000"/>
-          </a:bodyPr>
-          <a:lstStyle/>
-          <a:p>
-            <a:r>
-              <a:rPr lang="en-US" dirty="0"/>
-              <a:t>Sensitivity and Specificity</a:t>
-            </a:r>
-          </a:p>
-        </p:txBody>
-      </p:sp>
-      <p:sp>
-        <p:nvSpPr>
-          <p:cNvPr id="4" name="Slide Number Placeholder 3">
-            <a:extLst>
-              <a:ext uri="{FF2B5EF4-FFF2-40B4-BE49-F238E27FC236}">
-                <a16:creationId xmlns:a16="http://schemas.microsoft.com/office/drawing/2014/main" id="{2F6C5A7E-4A1D-EB66-7BAD-92F3F8D03BA0}"/>
-              </a:ext>
-            </a:extLst>
-          </p:cNvPr>
-          <p:cNvSpPr>
-            <a:spLocks noGrp="1"/>
-          </p:cNvSpPr>
-          <p:nvPr>
-            <p:ph type="sldNum" sz="quarter" idx="12"/>
-          </p:nvPr>
-        </p:nvSpPr>
-        <p:spPr/>
-        <p:txBody>
-          <a:bodyPr/>
-          <a:lstStyle/>
-          <a:p>
-            <a:fld id="{B82CCC60-E8CD-4174-8B1A-7DF615B22EEF}" type="slidenum">
-              <a:rPr lang="en-US" smtClean="0"/>
-              <a:pPr/>
-              <a:t>11</a:t>
-            </a:fld>
-            <a:endParaRPr lang="en-US"/>
-          </a:p>
-        </p:txBody>
-      </p:sp>
-      <p:pic>
-        <p:nvPicPr>
-          <p:cNvPr id="5" name="Content Placeholder 4">
-            <a:extLst>
-              <a:ext uri="{FF2B5EF4-FFF2-40B4-BE49-F238E27FC236}">
-                <a16:creationId xmlns:a16="http://schemas.microsoft.com/office/drawing/2014/main" id="{0955CE53-1B01-98F3-BE32-FB789CB90F63}"/>
-              </a:ext>
-            </a:extLst>
-          </p:cNvPr>
-          <p:cNvPicPr>
-            <a:picLocks noGrp="1" noChangeAspect="1"/>
-          </p:cNvPicPr>
-          <p:nvPr>
-            <p:ph idx="1"/>
-          </p:nvPr>
-        </p:nvPicPr>
-        <p:blipFill>
-          <a:blip r:embed="rId2"/>
-          <a:stretch>
-            <a:fillRect/>
-          </a:stretch>
-        </p:blipFill>
-        <p:spPr>
-          <a:xfrm>
-            <a:off x="992422" y="2019417"/>
-            <a:ext cx="9010650" cy="3400425"/>
-          </a:xfrm>
-          <a:prstGeom prst="rect">
-            <a:avLst/>
-          </a:prstGeom>
-        </p:spPr>
-      </p:pic>
-    </p:spTree>
-    <p:extLst>
-      <p:ext uri="{BB962C8B-B14F-4D97-AF65-F5344CB8AC3E}">
-        <p14:creationId xmlns:p14="http://schemas.microsoft.com/office/powerpoint/2010/main" val="3256696827"/>
-      </p:ext>
-    </p:extLst>
-  </p:cSld>
-  <p:clrMapOvr>
-    <a:masterClrMapping/>
-  </p:clrMapOvr>
-</p:sld>
-</file>
-
-<file path=ppt/slides/slide12.xml><?xml version="1.0" encoding="utf-8"?>
-<p:sld xmlns:a="http://schemas.openxmlformats.org/drawingml/2006/main" xmlns:r="http://schemas.openxmlformats.org/officeDocument/2006/relationships" xmlns:p="http://schemas.openxmlformats.org/presentationml/2006/main">
-  <p:cSld>
-    <p:spTree>
-      <p:nvGrpSpPr>
-        <p:cNvPr id="1" name=""/>
-        <p:cNvGrpSpPr/>
-        <p:nvPr/>
-      </p:nvGrpSpPr>
-      <p:grpSpPr>
-        <a:xfrm>
-          <a:off x="0" y="0"/>
-          <a:ext cx="0" cy="0"/>
-          <a:chOff x="0" y="0"/>
-          <a:chExt cx="0" cy="0"/>
-        </a:xfrm>
-      </p:grpSpPr>
-      <p:sp>
-        <p:nvSpPr>
-          <p:cNvPr id="2" name="Title 1">
-            <a:extLst>
-              <a:ext uri="{FF2B5EF4-FFF2-40B4-BE49-F238E27FC236}">
                 <a16:creationId xmlns:a16="http://schemas.microsoft.com/office/drawing/2014/main" id="{3D958D13-8AB2-4BAF-B355-30EA7AC66932}"/>
               </a:ext>
             </a:extLst>
@@ -5380,7 +5073,7 @@
             <a:fld id="{B82CCC60-E8CD-4174-8B1A-7DF615B22EEF}" type="slidenum">
               <a:rPr lang="en-US" smtClean="0"/>
               <a:pPr/>
-              <a:t>12</a:t>
+              <a:t>10</a:t>
             </a:fld>
             <a:endParaRPr lang="en-US"/>
           </a:p>
@@ -6898,7 +6591,7 @@
 </p:sld>
 </file>
 
-<file path=ppt/slides/slide13.xml><?xml version="1.0" encoding="utf-8"?>
+<file path=ppt/slides/slide11.xml><?xml version="1.0" encoding="utf-8"?>
 <p:sld xmlns:a="http://schemas.openxmlformats.org/drawingml/2006/main" xmlns:r="http://schemas.openxmlformats.org/officeDocument/2006/relationships" xmlns:p="http://schemas.openxmlformats.org/presentationml/2006/main">
   <p:cSld>
     <p:spTree>
@@ -6969,7 +6662,7 @@
             <a:fld id="{B82CCC60-E8CD-4174-8B1A-7DF615B22EEF}" type="slidenum">
               <a:rPr lang="en-US" smtClean="0"/>
               <a:pPr/>
-              <a:t>13</a:t>
+              <a:t>11</a:t>
             </a:fld>
             <a:endParaRPr lang="en-US"/>
           </a:p>
@@ -11370,7 +11063,7 @@
 </p:sld>
 </file>
 
-<file path=ppt/slides/slide14.xml><?xml version="1.0" encoding="utf-8"?>
+<file path=ppt/slides/slide12.xml><?xml version="1.0" encoding="utf-8"?>
 <p:sld xmlns:a="http://schemas.openxmlformats.org/drawingml/2006/main" xmlns:r="http://schemas.openxmlformats.org/officeDocument/2006/relationships" xmlns:p="http://schemas.openxmlformats.org/presentationml/2006/main">
   <p:cSld>
     <p:spTree>
@@ -11441,7 +11134,7 @@
             <a:fld id="{B82CCC60-E8CD-4174-8B1A-7DF615B22EEF}" type="slidenum">
               <a:rPr lang="en-US" smtClean="0"/>
               <a:pPr/>
-              <a:t>14</a:t>
+              <a:t>12</a:t>
             </a:fld>
             <a:endParaRPr lang="en-US"/>
           </a:p>
@@ -14350,7 +14043,7 @@
 </p:sld>
 </file>
 
-<file path=ppt/slides/slide15.xml><?xml version="1.0" encoding="utf-8"?>
+<file path=ppt/slides/slide13.xml><?xml version="1.0" encoding="utf-8"?>
 <p:sld xmlns:a="http://schemas.openxmlformats.org/drawingml/2006/main" xmlns:r="http://schemas.openxmlformats.org/officeDocument/2006/relationships" xmlns:p="http://schemas.openxmlformats.org/presentationml/2006/main">
   <p:cSld>
     <p:spTree>
@@ -14421,7 +14114,7 @@
             <a:fld id="{B82CCC60-E8CD-4174-8B1A-7DF615B22EEF}" type="slidenum">
               <a:rPr lang="en-US" smtClean="0"/>
               <a:pPr/>
-              <a:t>15</a:t>
+              <a:t>13</a:t>
             </a:fld>
             <a:endParaRPr lang="en-US"/>
           </a:p>
@@ -19021,7 +18714,7 @@
 </p:sld>
 </file>
 
-<file path=ppt/slides/slide16.xml><?xml version="1.0" encoding="utf-8"?>
+<file path=ppt/slides/slide14.xml><?xml version="1.0" encoding="utf-8"?>
 <p:sld xmlns:a="http://schemas.openxmlformats.org/drawingml/2006/main" xmlns:r="http://schemas.openxmlformats.org/officeDocument/2006/relationships" xmlns:p="http://schemas.openxmlformats.org/presentationml/2006/main">
   <p:cSld>
     <p:spTree>
@@ -19101,7 +18794,7 @@
             <a:fld id="{B82CCC60-E8CD-4174-8B1A-7DF615B22EEF}" type="slidenum">
               <a:rPr lang="en-US" smtClean="0"/>
               <a:pPr/>
-              <a:t>16</a:t>
+              <a:t>14</a:t>
             </a:fld>
             <a:endParaRPr lang="en-US"/>
           </a:p>
@@ -20503,7 +20196,7 @@
 </p:sld>
 </file>
 
-<file path=ppt/slides/slide17.xml><?xml version="1.0" encoding="utf-8"?>
+<file path=ppt/slides/slide15.xml><?xml version="1.0" encoding="utf-8"?>
 <p:sld xmlns:a="http://schemas.openxmlformats.org/drawingml/2006/main" xmlns:r="http://schemas.openxmlformats.org/officeDocument/2006/relationships" xmlns:p="http://schemas.openxmlformats.org/presentationml/2006/main">
   <p:cSld>
     <p:spTree>
@@ -20589,7 +20282,7 @@
             <a:fld id="{B82CCC60-E8CD-4174-8B1A-7DF615B22EEF}" type="slidenum">
               <a:rPr lang="en-US" smtClean="0"/>
               <a:pPr/>
-              <a:t>17</a:t>
+              <a:t>15</a:t>
             </a:fld>
             <a:endParaRPr lang="en-US"/>
           </a:p>
@@ -26986,7 +26679,7 @@
 </p:sld>
 </file>
 
-<file path=ppt/slides/slide18.xml><?xml version="1.0" encoding="utf-8"?>
+<file path=ppt/slides/slide16.xml><?xml version="1.0" encoding="utf-8"?>
 <p:sld xmlns:a="http://schemas.openxmlformats.org/drawingml/2006/main" xmlns:r="http://schemas.openxmlformats.org/officeDocument/2006/relationships" xmlns:p="http://schemas.openxmlformats.org/presentationml/2006/main">
   <p:cSld>
     <p:spTree>
@@ -27072,7 +26765,7 @@
             <a:fld id="{B82CCC60-E8CD-4174-8B1A-7DF615B22EEF}" type="slidenum">
               <a:rPr lang="en-US" smtClean="0"/>
               <a:pPr/>
-              <a:t>18</a:t>
+              <a:t>16</a:t>
             </a:fld>
             <a:endParaRPr lang="en-US"/>
           </a:p>
@@ -27620,7 +27313,7 @@
 </p:sld>
 </file>
 
-<file path=ppt/slides/slide19.xml><?xml version="1.0" encoding="utf-8"?>
+<file path=ppt/slides/slide17.xml><?xml version="1.0" encoding="utf-8"?>
 <p:sld xmlns:a="http://schemas.openxmlformats.org/drawingml/2006/main" xmlns:r="http://schemas.openxmlformats.org/officeDocument/2006/relationships" xmlns:p="http://schemas.openxmlformats.org/presentationml/2006/main">
   <p:cSld>
     <p:spTree>
@@ -27706,7 +27399,7 @@
             <a:fld id="{B82CCC60-E8CD-4174-8B1A-7DF615B22EEF}" type="slidenum">
               <a:rPr lang="en-US" smtClean="0"/>
               <a:pPr/>
-              <a:t>19</a:t>
+              <a:t>17</a:t>
             </a:fld>
             <a:endParaRPr lang="en-US"/>
           </a:p>
@@ -28169,372 +27862,7 @@
 </p:sld>
 </file>
 
-<file path=ppt/slides/slide2.xml><?xml version="1.0" encoding="utf-8"?>
-<p:sld xmlns:a="http://schemas.openxmlformats.org/drawingml/2006/main" xmlns:r="http://schemas.openxmlformats.org/officeDocument/2006/relationships" xmlns:p="http://schemas.openxmlformats.org/presentationml/2006/main">
-  <p:cSld>
-    <p:spTree>
-      <p:nvGrpSpPr>
-        <p:cNvPr id="1" name=""/>
-        <p:cNvGrpSpPr/>
-        <p:nvPr/>
-      </p:nvGrpSpPr>
-      <p:grpSpPr>
-        <a:xfrm>
-          <a:off x="0" y="0"/>
-          <a:ext cx="0" cy="0"/>
-          <a:chOff x="0" y="0"/>
-          <a:chExt cx="0" cy="0"/>
-        </a:xfrm>
-      </p:grpSpPr>
-      <p:sp>
-        <p:nvSpPr>
-          <p:cNvPr id="2" name="Title 1">
-            <a:extLst>
-              <a:ext uri="{FF2B5EF4-FFF2-40B4-BE49-F238E27FC236}">
-                <a16:creationId xmlns:a16="http://schemas.microsoft.com/office/drawing/2014/main" id="{CB2958E8-6553-6846-4A14-22724CEEB930}"/>
-              </a:ext>
-            </a:extLst>
-          </p:cNvPr>
-          <p:cNvSpPr>
-            <a:spLocks noGrp="1"/>
-          </p:cNvSpPr>
-          <p:nvPr>
-            <p:ph type="title"/>
-          </p:nvPr>
-        </p:nvSpPr>
-        <p:spPr/>
-        <p:txBody>
-          <a:bodyPr>
-            <a:normAutofit fontScale="90000"/>
-          </a:bodyPr>
-          <a:lstStyle/>
-          <a:p>
-            <a:r>
-              <a:rPr lang="en-US" dirty="0"/>
-              <a:t>Lab #5: Jaccard similarity</a:t>
-            </a:r>
-          </a:p>
-        </p:txBody>
-      </p:sp>
-      <p:sp>
-        <p:nvSpPr>
-          <p:cNvPr id="3" name="Content Placeholder 2">
-            <a:extLst>
-              <a:ext uri="{FF2B5EF4-FFF2-40B4-BE49-F238E27FC236}">
-                <a16:creationId xmlns:a16="http://schemas.microsoft.com/office/drawing/2014/main" id="{15BAB270-8CBA-89C2-3120-EF8B9E1726C7}"/>
-              </a:ext>
-            </a:extLst>
-          </p:cNvPr>
-          <p:cNvSpPr>
-            <a:spLocks noGrp="1"/>
-          </p:cNvSpPr>
-          <p:nvPr>
-            <p:ph idx="1"/>
-          </p:nvPr>
-        </p:nvSpPr>
-        <p:spPr>
-          <a:xfrm>
-            <a:off x="598620" y="1596540"/>
-            <a:ext cx="10972800" cy="5261460"/>
-          </a:xfrm>
-        </p:spPr>
-        <p:txBody>
-          <a:bodyPr>
-            <a:normAutofit fontScale="70000" lnSpcReduction="20000"/>
-          </a:bodyPr>
-          <a:lstStyle/>
-          <a:p>
-            <a:r>
-              <a:rPr lang="en-US" dirty="0"/>
-              <a:t>In this lab assignment you will write set of functions to compute Jaccard similarity between genomes based on comparison of their fixed size sketches. Due November 10</a:t>
-            </a:r>
-            <a:r>
-              <a:rPr lang="en-US" baseline="30000" dirty="0"/>
-              <a:t>th</a:t>
-            </a:r>
-            <a:r>
-              <a:rPr lang="en-US" dirty="0"/>
-              <a:t> at 8:00pm</a:t>
-            </a:r>
-          </a:p>
-          <a:p>
-            <a:r>
-              <a:rPr lang="en-US" dirty="0"/>
-              <a:t>The goal is to write a Python script named </a:t>
-            </a:r>
-            <a:r>
-              <a:rPr lang="en-US" b="1" dirty="0"/>
-              <a:t>jaccard.py</a:t>
-            </a:r>
-            <a:r>
-              <a:rPr lang="en-US" dirty="0"/>
-              <a:t> containing the following functions:</a:t>
-            </a:r>
-          </a:p>
-          <a:p>
-            <a:pPr lvl="1"/>
-            <a:r>
-              <a:rPr lang="en-US" i="1" dirty="0" err="1"/>
-              <a:t>reverse_complement</a:t>
-            </a:r>
-            <a:r>
-              <a:rPr lang="en-US" i="1" dirty="0"/>
-              <a:t>(seq): </a:t>
-            </a:r>
-            <a:r>
-              <a:rPr lang="en-US" dirty="0"/>
-              <a:t>returns reverse complement of sequence seq; </a:t>
-            </a:r>
-            <a:r>
-              <a:rPr lang="en-US" u="sng" dirty="0"/>
-              <a:t>reuse this function from Lab #2</a:t>
-            </a:r>
-            <a:r>
-              <a:rPr lang="en-US" dirty="0"/>
-              <a:t>.</a:t>
-            </a:r>
-          </a:p>
-          <a:p>
-            <a:pPr lvl="1"/>
-            <a:r>
-              <a:rPr lang="en-US" i="1" dirty="0" err="1"/>
-              <a:t>compute_num_value</a:t>
-            </a:r>
-            <a:r>
-              <a:rPr lang="en-US" i="1" dirty="0"/>
-              <a:t> (seq): </a:t>
-            </a:r>
-            <a:r>
-              <a:rPr lang="en-US" dirty="0"/>
-              <a:t>returns minimum numerical value between forward and reverse versions of the sequence </a:t>
-            </a:r>
-            <a:r>
-              <a:rPr lang="en-US" i="1" dirty="0"/>
-              <a:t>seq</a:t>
-            </a:r>
-            <a:r>
-              <a:rPr lang="en-US" dirty="0"/>
-              <a:t>; </a:t>
-            </a:r>
-            <a:r>
-              <a:rPr lang="en-US" u="sng" dirty="0"/>
-              <a:t>reuse this function from Lab #2</a:t>
-            </a:r>
-            <a:r>
-              <a:rPr lang="en-US" dirty="0"/>
-              <a:t>.</a:t>
-            </a:r>
-          </a:p>
-          <a:p>
-            <a:pPr lvl="1"/>
-            <a:r>
-              <a:rPr lang="en-US" dirty="0"/>
-              <a:t>(G:30pt,U:30pt) </a:t>
-            </a:r>
-            <a:r>
-              <a:rPr lang="en-US" i="1" dirty="0" err="1"/>
-              <a:t>load_fasta_to_dict</a:t>
-            </a:r>
-            <a:r>
-              <a:rPr lang="en-US" i="1" dirty="0"/>
-              <a:t>(</a:t>
-            </a:r>
-            <a:r>
-              <a:rPr lang="en-US" i="1" dirty="0" err="1"/>
-              <a:t>fasta_path</a:t>
-            </a:r>
-            <a:r>
-              <a:rPr lang="en-US" i="1" dirty="0"/>
-              <a:t>): </a:t>
-            </a:r>
-            <a:r>
-              <a:rPr lang="en-US" dirty="0"/>
-              <a:t>parses fasta file </a:t>
-            </a:r>
-            <a:r>
-              <a:rPr lang="en-US" i="1" dirty="0" err="1"/>
-              <a:t>fasta_path</a:t>
-            </a:r>
-            <a:r>
-              <a:rPr lang="en-US" i="1" dirty="0"/>
-              <a:t> </a:t>
-            </a:r>
-            <a:r>
-              <a:rPr lang="en-US" dirty="0"/>
-              <a:t>and returns a dictionary where keys are names of fasta sequences, and values are the genome sequences</a:t>
-            </a:r>
-          </a:p>
-          <a:p>
-            <a:pPr lvl="1"/>
-            <a:r>
-              <a:rPr lang="en-US" dirty="0"/>
-              <a:t>(G:30pt,U:30pt) </a:t>
-            </a:r>
-            <a:r>
-              <a:rPr lang="en-US" i="1" dirty="0" err="1"/>
-              <a:t>compute_sketch</a:t>
-            </a:r>
-            <a:r>
-              <a:rPr lang="en-US" i="1" dirty="0"/>
-              <a:t>(</a:t>
-            </a:r>
-            <a:r>
-              <a:rPr lang="en-US" i="1" dirty="0" err="1"/>
-              <a:t>seq_dict,k,s</a:t>
-            </a:r>
-            <a:r>
-              <a:rPr lang="en-US" i="1" dirty="0"/>
-              <a:t>): </a:t>
-            </a:r>
-            <a:r>
-              <a:rPr lang="en-US" dirty="0"/>
-              <a:t>returns a sketch, which is an array of </a:t>
-            </a:r>
-            <a:r>
-              <a:rPr lang="en-US" i="1" dirty="0"/>
-              <a:t>s</a:t>
-            </a:r>
-            <a:r>
-              <a:rPr lang="en-US" dirty="0"/>
-              <a:t> smallest distinct integer k-</a:t>
-            </a:r>
-            <a:r>
-              <a:rPr lang="en-US" dirty="0" err="1"/>
-              <a:t>mer</a:t>
-            </a:r>
-            <a:r>
-              <a:rPr lang="en-US" dirty="0"/>
-              <a:t> values sorted from </a:t>
-            </a:r>
-            <a:r>
-              <a:rPr lang="en-US" b="1" dirty="0"/>
-              <a:t>smallest to largest</a:t>
-            </a:r>
-            <a:r>
-              <a:rPr lang="en-US" dirty="0"/>
-              <a:t> for all k-</a:t>
-            </a:r>
-            <a:r>
-              <a:rPr lang="en-US" dirty="0" err="1"/>
-              <a:t>mers</a:t>
-            </a:r>
-            <a:r>
-              <a:rPr lang="en-US" dirty="0"/>
-              <a:t> of size </a:t>
-            </a:r>
-            <a:r>
-              <a:rPr lang="en-US" i="1" dirty="0"/>
-              <a:t>k</a:t>
-            </a:r>
-            <a:r>
-              <a:rPr lang="en-US" dirty="0"/>
-              <a:t> in all genome sequences in </a:t>
-            </a:r>
-            <a:r>
-              <a:rPr lang="en-US" i="1" dirty="0" err="1"/>
-              <a:t>seq_dict</a:t>
-            </a:r>
-            <a:endParaRPr lang="en-US" i="1" dirty="0"/>
-          </a:p>
-          <a:p>
-            <a:pPr lvl="1"/>
-            <a:r>
-              <a:rPr lang="en-US" dirty="0"/>
-              <a:t>(G:30pt,U:40pt) </a:t>
-            </a:r>
-            <a:r>
-              <a:rPr lang="en-US" i="1" dirty="0" err="1"/>
-              <a:t>compare_sketches</a:t>
-            </a:r>
-            <a:r>
-              <a:rPr lang="en-US" i="1" dirty="0"/>
-              <a:t>(sketch1,sketch2,s): </a:t>
-            </a:r>
-            <a:r>
-              <a:rPr lang="en-US" dirty="0"/>
-              <a:t>computes Jaccard similarity for sketches </a:t>
-            </a:r>
-            <a:r>
-              <a:rPr lang="en-US" i="1" dirty="0"/>
-              <a:t>sketch1</a:t>
-            </a:r>
-            <a:r>
-              <a:rPr lang="en-US" dirty="0"/>
-              <a:t> and </a:t>
-            </a:r>
-            <a:r>
-              <a:rPr lang="en-US" i="1" dirty="0"/>
-              <a:t>sketch2</a:t>
-            </a:r>
-            <a:r>
-              <a:rPr lang="en-US" dirty="0"/>
-              <a:t> of size </a:t>
-            </a:r>
-            <a:r>
-              <a:rPr lang="en-US" i="1" dirty="0"/>
-              <a:t>s, </a:t>
-            </a:r>
-            <a:r>
-              <a:rPr lang="en-US" dirty="0"/>
-              <a:t>returns a floating-point number between 0 and 1</a:t>
-            </a:r>
-            <a:r>
-              <a:rPr lang="en-US" i="1" dirty="0"/>
-              <a:t>.</a:t>
-            </a:r>
-          </a:p>
-          <a:p>
-            <a:r>
-              <a:rPr lang="en-US" dirty="0"/>
-              <a:t>Graduate students only: (10pt) download two HIV virus sequences from NCBI: accessions GCA_003109165.1 and GCA_003109225.1; use s=20, vary K from 6 to 101, plot Jaccard(K,s).  At what value of K Jaccard similarity becomes equal to 0? Upload a figure containing plot of Jaccard(K,s) as function of K. Add a box with value of K’ where Jaccard (K’,20)==0</a:t>
-            </a:r>
-          </a:p>
-        </p:txBody>
-      </p:sp>
-      <p:sp>
-        <p:nvSpPr>
-          <p:cNvPr id="4" name="Slide Number Placeholder 3">
-            <a:extLst>
-              <a:ext uri="{FF2B5EF4-FFF2-40B4-BE49-F238E27FC236}">
-                <a16:creationId xmlns:a16="http://schemas.microsoft.com/office/drawing/2014/main" id="{72CAADF0-F1F7-C3B8-ED06-EFFA1A9808E4}"/>
-              </a:ext>
-            </a:extLst>
-          </p:cNvPr>
-          <p:cNvSpPr>
-            <a:spLocks noGrp="1"/>
-          </p:cNvSpPr>
-          <p:nvPr>
-            <p:ph type="sldNum" sz="quarter" idx="12"/>
-          </p:nvPr>
-        </p:nvSpPr>
-        <p:spPr/>
-        <p:txBody>
-          <a:bodyPr/>
-          <a:lstStyle/>
-          <a:p>
-            <a:fld id="{B82CCC60-E8CD-4174-8B1A-7DF615B22EEF}" type="slidenum">
-              <a:rPr lang="en-US" smtClean="0"/>
-              <a:pPr/>
-              <a:t>2</a:t>
-            </a:fld>
-            <a:endParaRPr lang="en-US" dirty="0"/>
-          </a:p>
-        </p:txBody>
-      </p:sp>
-    </p:spTree>
-    <p:extLst>
-      <p:ext uri="{BB962C8B-B14F-4D97-AF65-F5344CB8AC3E}">
-        <p14:creationId xmlns:p14="http://schemas.microsoft.com/office/powerpoint/2010/main" val="1812347551"/>
-      </p:ext>
-    </p:extLst>
-  </p:cSld>
-  <p:clrMapOvr>
-    <a:masterClrMapping/>
-  </p:clrMapOvr>
-</p:sld>
-</file>
-
-<file path=ppt/slides/slide20.xml><?xml version="1.0" encoding="utf-8"?>
+<file path=ppt/slides/slide18.xml><?xml version="1.0" encoding="utf-8"?>
 <p:sld xmlns:a="http://schemas.openxmlformats.org/drawingml/2006/main" xmlns:r="http://schemas.openxmlformats.org/officeDocument/2006/relationships" xmlns:p="http://schemas.openxmlformats.org/presentationml/2006/main">
   <p:cSld>
     <p:spTree>
@@ -28605,7 +27933,7 @@
             <a:fld id="{B82CCC60-E8CD-4174-8B1A-7DF615B22EEF}" type="slidenum">
               <a:rPr lang="en-US" smtClean="0"/>
               <a:pPr/>
-              <a:t>20</a:t>
+              <a:t>18</a:t>
             </a:fld>
             <a:endParaRPr lang="en-US"/>
           </a:p>
@@ -29160,7 +28488,7 @@
 </p:sld>
 </file>
 
-<file path=ppt/slides/slide21.xml><?xml version="1.0" encoding="utf-8"?>
+<file path=ppt/slides/slide19.xml><?xml version="1.0" encoding="utf-8"?>
 <p:sld xmlns:a="http://schemas.openxmlformats.org/drawingml/2006/main" xmlns:r="http://schemas.openxmlformats.org/officeDocument/2006/relationships" xmlns:p="http://schemas.openxmlformats.org/presentationml/2006/main">
   <p:cSld>
     <p:spTree>
@@ -29237,7 +28565,7 @@
             <a:fld id="{B82CCC60-E8CD-4174-8B1A-7DF615B22EEF}" type="slidenum">
               <a:rPr lang="en-US" smtClean="0"/>
               <a:pPr/>
-              <a:t>21</a:t>
+              <a:t>19</a:t>
             </a:fld>
             <a:endParaRPr lang="en-US"/>
           </a:p>
@@ -29464,7 +28792,187 @@
 </p:sld>
 </file>
 
-<file path=ppt/slides/slide22.xml><?xml version="1.0" encoding="utf-8"?>
+<file path=ppt/slides/slide2.xml><?xml version="1.0" encoding="utf-8"?>
+<p:sld xmlns:a="http://schemas.openxmlformats.org/drawingml/2006/main" xmlns:r="http://schemas.openxmlformats.org/officeDocument/2006/relationships" xmlns:p="http://schemas.openxmlformats.org/presentationml/2006/main">
+  <p:cSld>
+    <p:spTree>
+      <p:nvGrpSpPr>
+        <p:cNvPr id="1" name=""/>
+        <p:cNvGrpSpPr/>
+        <p:nvPr/>
+      </p:nvGrpSpPr>
+      <p:grpSpPr>
+        <a:xfrm>
+          <a:off x="0" y="0"/>
+          <a:ext cx="0" cy="0"/>
+          <a:chOff x="0" y="0"/>
+          <a:chExt cx="0" cy="0"/>
+        </a:xfrm>
+      </p:grpSpPr>
+      <p:sp>
+        <p:nvSpPr>
+          <p:cNvPr id="2" name="Title 1">
+            <a:extLst>
+              <a:ext uri="{FF2B5EF4-FFF2-40B4-BE49-F238E27FC236}">
+                <a16:creationId xmlns:a16="http://schemas.microsoft.com/office/drawing/2014/main" id="{1789BB8C-6D26-E7CE-00B3-168F05C536BC}"/>
+              </a:ext>
+            </a:extLst>
+          </p:cNvPr>
+          <p:cNvSpPr>
+            <a:spLocks noGrp="1"/>
+          </p:cNvSpPr>
+          <p:nvPr>
+            <p:ph type="title"/>
+          </p:nvPr>
+        </p:nvSpPr>
+        <p:spPr/>
+        <p:txBody>
+          <a:bodyPr>
+            <a:normAutofit fontScale="90000"/>
+          </a:bodyPr>
+          <a:lstStyle/>
+          <a:p>
+            <a:r>
+              <a:rPr lang="en-US" dirty="0"/>
+              <a:t>Evaluating transcript assembly</a:t>
+            </a:r>
+          </a:p>
+        </p:txBody>
+      </p:sp>
+      <p:sp>
+        <p:nvSpPr>
+          <p:cNvPr id="3" name="Content Placeholder 2">
+            <a:extLst>
+              <a:ext uri="{FF2B5EF4-FFF2-40B4-BE49-F238E27FC236}">
+                <a16:creationId xmlns:a16="http://schemas.microsoft.com/office/drawing/2014/main" id="{EA47D1B9-170D-520A-C276-39860A1323E0}"/>
+              </a:ext>
+            </a:extLst>
+          </p:cNvPr>
+          <p:cNvSpPr>
+            <a:spLocks noGrp="1"/>
+          </p:cNvSpPr>
+          <p:nvPr>
+            <p:ph idx="1"/>
+          </p:nvPr>
+        </p:nvSpPr>
+        <p:spPr>
+          <a:xfrm>
+            <a:off x="598620" y="1596540"/>
+            <a:ext cx="10972800" cy="4581150"/>
+          </a:xfrm>
+        </p:spPr>
+        <p:txBody>
+          <a:bodyPr>
+            <a:normAutofit lnSpcReduction="10000"/>
+          </a:bodyPr>
+          <a:lstStyle/>
+          <a:p>
+            <a:r>
+              <a:rPr lang="en-US" dirty="0">
+                <a:latin typeface="Calibri" panose="020F0502020204030204" pitchFamily="34" charset="0"/>
+                <a:cs typeface="Calibri" panose="020F0502020204030204" pitchFamily="34" charset="0"/>
+              </a:rPr>
+              <a:t>We want to compare the assembly output against a benchmark transcriptome where correct sequences of all transcripts are known.</a:t>
+            </a:r>
+          </a:p>
+          <a:p>
+            <a:pPr marL="285750" indent="-285750">
+              <a:buFontTx/>
+              <a:buChar char="-"/>
+            </a:pPr>
+            <a:endParaRPr lang="en-US" dirty="0">
+              <a:latin typeface="Calibri" panose="020F0502020204030204" pitchFamily="34" charset="0"/>
+              <a:cs typeface="Calibri" panose="020F0502020204030204" pitchFamily="34" charset="0"/>
+            </a:endParaRPr>
+          </a:p>
+          <a:p>
+            <a:r>
+              <a:rPr lang="en-US" b="1" dirty="0">
+                <a:latin typeface="Calibri" panose="020F0502020204030204" pitchFamily="34" charset="0"/>
+                <a:cs typeface="Calibri" panose="020F0502020204030204" pitchFamily="34" charset="0"/>
+              </a:rPr>
+              <a:t>Limitations of using a known reference transcriptome</a:t>
+            </a:r>
+            <a:r>
+              <a:rPr lang="en-US" dirty="0">
+                <a:latin typeface="Calibri" panose="020F0502020204030204" pitchFamily="34" charset="0"/>
+                <a:cs typeface="Calibri" panose="020F0502020204030204" pitchFamily="34" charset="0"/>
+              </a:rPr>
+              <a:t>:</a:t>
+            </a:r>
+          </a:p>
+          <a:p>
+            <a:pPr marL="285750" indent="-285750">
+              <a:buFontTx/>
+              <a:buChar char="-"/>
+            </a:pPr>
+            <a:r>
+              <a:rPr lang="en-US" dirty="0">
+                <a:latin typeface="Calibri" panose="020F0502020204030204" pitchFamily="34" charset="0"/>
+                <a:cs typeface="Calibri" panose="020F0502020204030204" pitchFamily="34" charset="0"/>
+              </a:rPr>
+              <a:t>variability in the transcriptome (e.g. among e.g. cell types) makes  it impossible to determine whether sequences from the reference that are missing from the assembled transcriptome are due to assembly errors, or whether they were not expressed in the library sequenced</a:t>
+            </a:r>
+          </a:p>
+          <a:p>
+            <a:pPr marL="285750" indent="-285750">
+              <a:buFontTx/>
+              <a:buChar char="-"/>
+            </a:pPr>
+            <a:r>
+              <a:rPr lang="en-US" dirty="0">
+                <a:latin typeface="Calibri" panose="020F0502020204030204" pitchFamily="34" charset="0"/>
+                <a:cs typeface="Calibri" panose="020F0502020204030204" pitchFamily="34" charset="0"/>
+              </a:rPr>
+              <a:t>transcriptome sequences may also vary between the individual under study and the reference</a:t>
+            </a:r>
+          </a:p>
+        </p:txBody>
+      </p:sp>
+      <p:sp>
+        <p:nvSpPr>
+          <p:cNvPr id="4" name="Slide Number Placeholder 3">
+            <a:extLst>
+              <a:ext uri="{FF2B5EF4-FFF2-40B4-BE49-F238E27FC236}">
+                <a16:creationId xmlns:a16="http://schemas.microsoft.com/office/drawing/2014/main" id="{93F364A0-E602-1C0F-ABF0-AD654D7FC850}"/>
+              </a:ext>
+            </a:extLst>
+          </p:cNvPr>
+          <p:cNvSpPr>
+            <a:spLocks noGrp="1"/>
+          </p:cNvSpPr>
+          <p:nvPr>
+            <p:ph type="sldNum" sz="quarter" idx="12"/>
+          </p:nvPr>
+        </p:nvSpPr>
+        <p:spPr/>
+        <p:txBody>
+          <a:bodyPr/>
+          <a:lstStyle/>
+          <a:p>
+            <a:fld id="{B82CCC60-E8CD-4174-8B1A-7DF615B22EEF}" type="slidenum">
+              <a:rPr lang="en-US" smtClean="0"/>
+              <a:pPr/>
+              <a:t>2</a:t>
+            </a:fld>
+            <a:endParaRPr lang="en-US"/>
+          </a:p>
+        </p:txBody>
+      </p:sp>
+    </p:spTree>
+    <p:extLst>
+      <p:ext uri="{BB962C8B-B14F-4D97-AF65-F5344CB8AC3E}">
+        <p14:creationId xmlns:p14="http://schemas.microsoft.com/office/powerpoint/2010/main" val="2290969468"/>
+      </p:ext>
+    </p:extLst>
+  </p:cSld>
+  <p:clrMapOvr>
+    <a:masterClrMapping/>
+  </p:clrMapOvr>
+</p:sld>
+</file>
+
+<file path=ppt/slides/slide20.xml><?xml version="1.0" encoding="utf-8"?>
 <p:sld xmlns:a="http://schemas.openxmlformats.org/drawingml/2006/main" xmlns:r="http://schemas.openxmlformats.org/officeDocument/2006/relationships" xmlns:p="http://schemas.openxmlformats.org/presentationml/2006/main">
   <p:cSld>
     <p:spTree>
@@ -29685,7 +29193,7 @@
             <a:fld id="{B82CCC60-E8CD-4174-8B1A-7DF615B22EEF}" type="slidenum">
               <a:rPr lang="en-US" smtClean="0"/>
               <a:pPr/>
-              <a:t>22</a:t>
+              <a:t>20</a:t>
             </a:fld>
             <a:endParaRPr lang="en-US"/>
           </a:p>
@@ -29814,7 +29322,7 @@
 </p:sld>
 </file>
 
-<file path=ppt/slides/slide23.xml><?xml version="1.0" encoding="utf-8"?>
+<file path=ppt/slides/slide21.xml><?xml version="1.0" encoding="utf-8"?>
 <p:sld xmlns:a="http://schemas.openxmlformats.org/drawingml/2006/main" xmlns:r="http://schemas.openxmlformats.org/officeDocument/2006/relationships" xmlns:p="http://schemas.openxmlformats.org/presentationml/2006/main">
   <p:cSld>
     <p:spTree>
@@ -29973,7 +29481,7 @@
             <a:fld id="{B82CCC60-E8CD-4174-8B1A-7DF615B22EEF}" type="slidenum">
               <a:rPr lang="en-US" smtClean="0"/>
               <a:pPr/>
-              <a:t>23</a:t>
+              <a:t>21</a:t>
             </a:fld>
             <a:endParaRPr lang="en-US"/>
           </a:p>
@@ -30164,7 +29672,7 @@
 </p:sld>
 </file>
 
-<file path=ppt/slides/slide24.xml><?xml version="1.0" encoding="utf-8"?>
+<file path=ppt/slides/slide22.xml><?xml version="1.0" encoding="utf-8"?>
 <p:sld xmlns:a="http://schemas.openxmlformats.org/drawingml/2006/main" xmlns:r="http://schemas.openxmlformats.org/officeDocument/2006/relationships" xmlns:p="http://schemas.openxmlformats.org/presentationml/2006/main">
   <p:cSld>
     <p:spTree>
@@ -30329,7 +29837,7 @@
             <a:fld id="{B82CCC60-E8CD-4174-8B1A-7DF615B22EEF}" type="slidenum">
               <a:rPr lang="en-US" smtClean="0"/>
               <a:pPr/>
-              <a:t>24</a:t>
+              <a:t>22</a:t>
             </a:fld>
             <a:endParaRPr lang="en-US"/>
           </a:p>
@@ -30400,1035 +29908,6 @@
           <p:cNvPr id="2" name="Title 1">
             <a:extLst>
               <a:ext uri="{FF2B5EF4-FFF2-40B4-BE49-F238E27FC236}">
-                <a16:creationId xmlns:a16="http://schemas.microsoft.com/office/drawing/2014/main" id="{A9E94263-242C-6CC7-B01C-AFEB51159959}"/>
-              </a:ext>
-            </a:extLst>
-          </p:cNvPr>
-          <p:cNvSpPr>
-            <a:spLocks noGrp="1"/>
-          </p:cNvSpPr>
-          <p:nvPr>
-            <p:ph type="title"/>
-          </p:nvPr>
-        </p:nvSpPr>
-        <p:spPr/>
-        <p:txBody>
-          <a:bodyPr>
-            <a:normAutofit fontScale="90000"/>
-          </a:bodyPr>
-          <a:lstStyle/>
-          <a:p>
-            <a:r>
-              <a:rPr lang="en-US"/>
-              <a:t>Jaccard similarity </a:t>
-            </a:r>
-            <a:r>
-              <a:rPr lang="en-US" dirty="0"/>
-              <a:t>example</a:t>
-            </a:r>
-          </a:p>
-        </p:txBody>
-      </p:sp>
-      <p:sp>
-        <p:nvSpPr>
-          <p:cNvPr id="4" name="Slide Number Placeholder 3">
-            <a:extLst>
-              <a:ext uri="{FF2B5EF4-FFF2-40B4-BE49-F238E27FC236}">
-                <a16:creationId xmlns:a16="http://schemas.microsoft.com/office/drawing/2014/main" id="{DF16F097-DD93-03E1-4C18-E74BAA43F5DD}"/>
-              </a:ext>
-            </a:extLst>
-          </p:cNvPr>
-          <p:cNvSpPr>
-            <a:spLocks noGrp="1"/>
-          </p:cNvSpPr>
-          <p:nvPr>
-            <p:ph type="sldNum" sz="quarter" idx="12"/>
-          </p:nvPr>
-        </p:nvSpPr>
-        <p:spPr/>
-        <p:txBody>
-          <a:bodyPr/>
-          <a:lstStyle/>
-          <a:p>
-            <a:fld id="{B82CCC60-E8CD-4174-8B1A-7DF615B22EEF}" type="slidenum">
-              <a:rPr lang="en-US" smtClean="0"/>
-              <a:pPr/>
-              <a:t>3</a:t>
-            </a:fld>
-            <a:endParaRPr lang="en-US"/>
-          </a:p>
-        </p:txBody>
-      </p:sp>
-      <p:pic>
-        <p:nvPicPr>
-          <p:cNvPr id="6" name="Picture 5">
-            <a:extLst>
-              <a:ext uri="{FF2B5EF4-FFF2-40B4-BE49-F238E27FC236}">
-                <a16:creationId xmlns:a16="http://schemas.microsoft.com/office/drawing/2014/main" id="{7DF11E5F-D808-C7A6-A6C8-ABC8D0FF5E7F}"/>
-              </a:ext>
-            </a:extLst>
-          </p:cNvPr>
-          <p:cNvPicPr>
-            <a:picLocks noChangeAspect="1"/>
-          </p:cNvPicPr>
-          <p:nvPr/>
-        </p:nvPicPr>
-        <p:blipFill>
-          <a:blip r:embed="rId2"/>
-          <a:stretch>
-            <a:fillRect/>
-          </a:stretch>
-        </p:blipFill>
-        <p:spPr>
-          <a:xfrm>
-            <a:off x="950685" y="2356839"/>
-            <a:ext cx="7586294" cy="4501161"/>
-          </a:xfrm>
-          <a:prstGeom prst="rect">
-            <a:avLst/>
-          </a:prstGeom>
-        </p:spPr>
-      </p:pic>
-      <mc:AlternateContent xmlns:mc="http://schemas.openxmlformats.org/markup-compatibility/2006" xmlns:a14="http://schemas.microsoft.com/office/drawing/2010/main">
-        <mc:Choice Requires="a14">
-          <p:sp>
-            <p:nvSpPr>
-              <p:cNvPr id="7" name="TextBox 6">
-                <a:extLst>
-                  <a:ext uri="{FF2B5EF4-FFF2-40B4-BE49-F238E27FC236}">
-                    <a16:creationId xmlns:a16="http://schemas.microsoft.com/office/drawing/2014/main" id="{509F9420-DCE3-AB8F-F68E-52DDC1D0B528}"/>
-                  </a:ext>
-                </a:extLst>
-              </p:cNvPr>
-              <p:cNvSpPr txBox="1"/>
-              <p:nvPr/>
-            </p:nvSpPr>
-            <p:spPr>
-              <a:xfrm>
-                <a:off x="4743832" y="5074047"/>
-                <a:ext cx="5783943" cy="909480"/>
-              </a:xfrm>
-              <a:prstGeom prst="rect">
-                <a:avLst/>
-              </a:prstGeom>
-              <a:noFill/>
-            </p:spPr>
-            <p:txBody>
-              <a:bodyPr wrap="square" lIns="0" tIns="0" rIns="0" bIns="0" rtlCol="0">
-                <a:spAutoFit/>
-              </a:bodyPr>
-              <a:lstStyle/>
-              <a:p>
-                <a:pPr/>
-                <a14:m>
-                  <m:oMathPara xmlns:m="http://schemas.openxmlformats.org/officeDocument/2006/math">
-                    <m:oMath>
-                      <m:r>
-                        <a:rPr lang="en-US" sz="2800" b="0" i="1" smtClean="0">
-                          <a:latin typeface="Cambria Math" panose="02040503050406030204" pitchFamily="18" charset="0"/>
-                        </a:rPr>
-                        <m:t>𝐽</m:t>
-                      </m:r>
-                      <m:r>
-                        <a:rPr lang="en-US" sz="2800" b="0" i="1" smtClean="0">
-                          <a:latin typeface="Cambria Math" panose="02040503050406030204" pitchFamily="18" charset="0"/>
-                        </a:rPr>
-                        <m:t>(</m:t>
-                      </m:r>
-                      <m:r>
-                        <a:rPr lang="en-US" sz="2800" b="0" i="1" smtClean="0">
-                          <a:latin typeface="Cambria Math" panose="02040503050406030204" pitchFamily="18" charset="0"/>
-                        </a:rPr>
-                        <m:t>𝐴</m:t>
-                      </m:r>
-                      <m:r>
-                        <a:rPr lang="en-US" sz="2800" b="0" i="1" smtClean="0">
-                          <a:latin typeface="Cambria Math" panose="02040503050406030204" pitchFamily="18" charset="0"/>
-                        </a:rPr>
-                        <m:t>,</m:t>
-                      </m:r>
-                      <m:r>
-                        <a:rPr lang="en-US" sz="2800" b="0" i="1" smtClean="0">
-                          <a:latin typeface="Cambria Math" panose="02040503050406030204" pitchFamily="18" charset="0"/>
-                        </a:rPr>
-                        <m:t>𝐵</m:t>
-                      </m:r>
-                      <m:r>
-                        <a:rPr lang="en-US" sz="2800" b="0" i="1" smtClean="0">
-                          <a:latin typeface="Cambria Math" panose="02040503050406030204" pitchFamily="18" charset="0"/>
-                        </a:rPr>
-                        <m:t>)≈</m:t>
-                      </m:r>
-                      <m:f>
-                        <m:fPr>
-                          <m:ctrlPr>
-                            <a:rPr lang="en-US" sz="2800" i="1">
-                              <a:latin typeface="Cambria Math" panose="02040503050406030204" pitchFamily="18" charset="0"/>
-                            </a:rPr>
-                          </m:ctrlPr>
-                        </m:fPr>
-                        <m:num>
-                          <m:d>
-                            <m:dPr>
-                              <m:begChr m:val="|"/>
-                              <m:endChr m:val="|"/>
-                              <m:ctrlPr>
-                                <a:rPr lang="en-US" sz="2800" i="1">
-                                  <a:latin typeface="Cambria Math" panose="02040503050406030204" pitchFamily="18" charset="0"/>
-                                </a:rPr>
-                              </m:ctrlPr>
-                            </m:dPr>
-                            <m:e>
-                              <m:r>
-                                <a:rPr lang="en-US" sz="2800" i="1">
-                                  <a:latin typeface="Cambria Math" panose="02040503050406030204" pitchFamily="18" charset="0"/>
-                                </a:rPr>
-                                <m:t>𝑆</m:t>
-                              </m:r>
-                              <m:r>
-                                <a:rPr lang="en-US" sz="2800" i="1">
-                                  <a:latin typeface="Cambria Math" panose="02040503050406030204" pitchFamily="18" charset="0"/>
-                                </a:rPr>
-                                <m:t>(</m:t>
-                              </m:r>
-                              <m:r>
-                                <a:rPr lang="en-US" sz="2800" i="1">
-                                  <a:latin typeface="Cambria Math" panose="02040503050406030204" pitchFamily="18" charset="0"/>
-                                </a:rPr>
-                                <m:t>𝐴</m:t>
-                              </m:r>
-                              <m:nary>
-                                <m:naryPr>
-                                  <m:chr m:val="⋃"/>
-                                  <m:subHide m:val="on"/>
-                                  <m:supHide m:val="on"/>
-                                  <m:ctrlPr>
-                                    <a:rPr lang="en-US" sz="2800" i="1" smtClean="0">
-                                      <a:latin typeface="Cambria Math" panose="02040503050406030204" pitchFamily="18" charset="0"/>
-                                    </a:rPr>
-                                  </m:ctrlPr>
-                                </m:naryPr>
-                                <m:sub/>
-                                <m:sup/>
-                                <m:e>
-                                  <m:r>
-                                    <a:rPr lang="en-US" sz="2800" b="0" i="1" smtClean="0">
-                                      <a:latin typeface="Cambria Math" panose="02040503050406030204" pitchFamily="18" charset="0"/>
-                                    </a:rPr>
-                                    <m:t>𝐵</m:t>
-                                  </m:r>
-                                  <m:r>
-                                    <a:rPr lang="en-US" sz="2800" b="0" i="1" smtClean="0">
-                                      <a:latin typeface="Cambria Math" panose="02040503050406030204" pitchFamily="18" charset="0"/>
-                                    </a:rPr>
-                                    <m:t>)</m:t>
-                                  </m:r>
-                                  <m:nary>
-                                    <m:naryPr>
-                                      <m:chr m:val="⋂"/>
-                                      <m:subHide m:val="on"/>
-                                      <m:supHide m:val="on"/>
-                                      <m:ctrlPr>
-                                        <a:rPr lang="en-US" sz="2800" b="0" i="1" smtClean="0">
-                                          <a:latin typeface="Cambria Math" panose="02040503050406030204" pitchFamily="18" charset="0"/>
-                                        </a:rPr>
-                                      </m:ctrlPr>
-                                    </m:naryPr>
-                                    <m:sub/>
-                                    <m:sup/>
-                                    <m:e>
-                                      <m:r>
-                                        <a:rPr lang="en-US" sz="2800" i="1">
-                                          <a:latin typeface="Cambria Math" panose="02040503050406030204" pitchFamily="18" charset="0"/>
-                                        </a:rPr>
-                                        <m:t>𝑆</m:t>
-                                      </m:r>
-                                      <m:r>
-                                        <a:rPr lang="en-US" sz="2800" i="1">
-                                          <a:latin typeface="Cambria Math" panose="02040503050406030204" pitchFamily="18" charset="0"/>
-                                        </a:rPr>
-                                        <m:t>(</m:t>
-                                      </m:r>
-                                      <m:r>
-                                        <a:rPr lang="en-US" sz="2800" i="1">
-                                          <a:latin typeface="Cambria Math" panose="02040503050406030204" pitchFamily="18" charset="0"/>
-                                        </a:rPr>
-                                        <m:t>𝐴</m:t>
-                                      </m:r>
-                                      <m:r>
-                                        <a:rPr lang="en-US" sz="2800" b="0" i="1" smtClean="0">
-                                          <a:latin typeface="Cambria Math" panose="02040503050406030204" pitchFamily="18" charset="0"/>
-                                        </a:rPr>
-                                        <m:t>)</m:t>
-                                      </m:r>
-                                    </m:e>
-                                  </m:nary>
-                                  <m:nary>
-                                    <m:naryPr>
-                                      <m:chr m:val="⋂"/>
-                                      <m:subHide m:val="on"/>
-                                      <m:supHide m:val="on"/>
-                                      <m:ctrlPr>
-                                        <a:rPr lang="en-US" sz="2800" b="0" i="1" smtClean="0">
-                                          <a:latin typeface="Cambria Math" panose="02040503050406030204" pitchFamily="18" charset="0"/>
-                                        </a:rPr>
-                                      </m:ctrlPr>
-                                    </m:naryPr>
-                                    <m:sub/>
-                                    <m:sup/>
-                                    <m:e>
-                                      <m:r>
-                                        <a:rPr lang="en-US" sz="2800" b="0" i="1" smtClean="0">
-                                          <a:latin typeface="Cambria Math" panose="02040503050406030204" pitchFamily="18" charset="0"/>
-                                        </a:rPr>
-                                        <m:t>𝑆</m:t>
-                                      </m:r>
-                                      <m:r>
-                                        <a:rPr lang="en-US" sz="2800" b="0" i="1" smtClean="0">
-                                          <a:latin typeface="Cambria Math" panose="02040503050406030204" pitchFamily="18" charset="0"/>
-                                        </a:rPr>
-                                        <m:t>(</m:t>
-                                      </m:r>
-                                      <m:r>
-                                        <a:rPr lang="en-US" sz="2800" b="0" i="1" smtClean="0">
-                                          <a:latin typeface="Cambria Math" panose="02040503050406030204" pitchFamily="18" charset="0"/>
-                                        </a:rPr>
-                                        <m:t>𝐵</m:t>
-                                      </m:r>
-                                      <m:r>
-                                        <a:rPr lang="en-US" sz="2800" b="0" i="1" smtClean="0">
-                                          <a:latin typeface="Cambria Math" panose="02040503050406030204" pitchFamily="18" charset="0"/>
-                                        </a:rPr>
-                                        <m:t>)</m:t>
-                                      </m:r>
-                                    </m:e>
-                                  </m:nary>
-                                </m:e>
-                              </m:nary>
-                            </m:e>
-                          </m:d>
-                        </m:num>
-                        <m:den>
-                          <m:d>
-                            <m:dPr>
-                              <m:begChr m:val="|"/>
-                              <m:endChr m:val="|"/>
-                              <m:ctrlPr>
-                                <a:rPr lang="en-US" sz="2800" i="1">
-                                  <a:latin typeface="Cambria Math" panose="02040503050406030204" pitchFamily="18" charset="0"/>
-                                </a:rPr>
-                              </m:ctrlPr>
-                            </m:dPr>
-                            <m:e>
-                              <m:r>
-                                <a:rPr lang="en-US" sz="2800" i="1">
-                                  <a:latin typeface="Cambria Math" panose="02040503050406030204" pitchFamily="18" charset="0"/>
-                                </a:rPr>
-                                <m:t>𝑆</m:t>
-                              </m:r>
-                              <m:r>
-                                <a:rPr lang="en-US" sz="2800" i="1">
-                                  <a:latin typeface="Cambria Math" panose="02040503050406030204" pitchFamily="18" charset="0"/>
-                                </a:rPr>
-                                <m:t>(</m:t>
-                              </m:r>
-                              <m:r>
-                                <a:rPr lang="en-US" sz="2800" i="1">
-                                  <a:latin typeface="Cambria Math" panose="02040503050406030204" pitchFamily="18" charset="0"/>
-                                </a:rPr>
-                                <m:t>𝐴</m:t>
-                              </m:r>
-                              <m:nary>
-                                <m:naryPr>
-                                  <m:chr m:val="⋃"/>
-                                  <m:subHide m:val="on"/>
-                                  <m:supHide m:val="on"/>
-                                  <m:ctrlPr>
-                                    <a:rPr lang="en-US" sz="2800" i="1">
-                                      <a:latin typeface="Cambria Math" panose="02040503050406030204" pitchFamily="18" charset="0"/>
-                                    </a:rPr>
-                                  </m:ctrlPr>
-                                </m:naryPr>
-                                <m:sub/>
-                                <m:sup/>
-                                <m:e>
-                                  <m:r>
-                                    <a:rPr lang="en-US" sz="2800" i="1">
-                                      <a:latin typeface="Cambria Math" panose="02040503050406030204" pitchFamily="18" charset="0"/>
-                                    </a:rPr>
-                                    <m:t>𝐵</m:t>
-                                  </m:r>
-                                  <m:r>
-                                    <a:rPr lang="en-US" sz="2800" i="1">
-                                      <a:latin typeface="Cambria Math" panose="02040503050406030204" pitchFamily="18" charset="0"/>
-                                    </a:rPr>
-                                    <m:t>) </m:t>
-                                  </m:r>
-                                </m:e>
-                              </m:nary>
-                            </m:e>
-                          </m:d>
-                        </m:den>
-                      </m:f>
-                    </m:oMath>
-                  </m:oMathPara>
-                </a14:m>
-                <a:endParaRPr lang="en-US" sz="2800" dirty="0"/>
-              </a:p>
-            </p:txBody>
-          </p:sp>
-        </mc:Choice>
-        <mc:Fallback xmlns="">
-          <p:sp>
-            <p:nvSpPr>
-              <p:cNvPr id="7" name="TextBox 6">
-                <a:extLst>
-                  <a:ext uri="{FF2B5EF4-FFF2-40B4-BE49-F238E27FC236}">
-                    <a16:creationId xmlns:a16="http://schemas.microsoft.com/office/drawing/2014/main" id="{509F9420-DCE3-AB8F-F68E-52DDC1D0B528}"/>
-                  </a:ext>
-                </a:extLst>
-              </p:cNvPr>
-              <p:cNvSpPr txBox="1">
-                <a:spLocks noRot="1" noChangeAspect="1" noMove="1" noResize="1" noEditPoints="1" noAdjustHandles="1" noChangeArrowheads="1" noChangeShapeType="1" noTextEdit="1"/>
-              </p:cNvSpPr>
-              <p:nvPr/>
-            </p:nvSpPr>
-            <p:spPr>
-              <a:xfrm>
-                <a:off x="4743832" y="5074047"/>
-                <a:ext cx="5783943" cy="909480"/>
-              </a:xfrm>
-              <a:prstGeom prst="rect">
-                <a:avLst/>
-              </a:prstGeom>
-              <a:blipFill>
-                <a:blip r:embed="rId3"/>
-                <a:stretch>
-                  <a:fillRect/>
-                </a:stretch>
-              </a:blipFill>
-            </p:spPr>
-            <p:txBody>
-              <a:bodyPr/>
-              <a:lstStyle/>
-              <a:p>
-                <a:r>
-                  <a:rPr lang="en-US">
-                    <a:noFill/>
-                  </a:rPr>
-                  <a:t> </a:t>
-                </a:r>
-              </a:p>
-            </p:txBody>
-          </p:sp>
-        </mc:Fallback>
-      </mc:AlternateContent>
-      <p:pic>
-        <p:nvPicPr>
-          <p:cNvPr id="9" name="Picture 8">
-            <a:extLst>
-              <a:ext uri="{FF2B5EF4-FFF2-40B4-BE49-F238E27FC236}">
-                <a16:creationId xmlns:a16="http://schemas.microsoft.com/office/drawing/2014/main" id="{7BF95251-9893-30FB-7630-A9AFBA80724F}"/>
-              </a:ext>
-            </a:extLst>
-          </p:cNvPr>
-          <p:cNvPicPr>
-            <a:picLocks noChangeAspect="1"/>
-          </p:cNvPicPr>
-          <p:nvPr/>
-        </p:nvPicPr>
-        <p:blipFill>
-          <a:blip r:embed="rId4"/>
-          <a:stretch>
-            <a:fillRect/>
-          </a:stretch>
-        </p:blipFill>
-        <p:spPr>
-          <a:xfrm>
-            <a:off x="3077028" y="1329213"/>
-            <a:ext cx="7679346" cy="980215"/>
-          </a:xfrm>
-          <a:prstGeom prst="rect">
-            <a:avLst/>
-          </a:prstGeom>
-        </p:spPr>
-      </p:pic>
-      <mc:AlternateContent xmlns:mc="http://schemas.openxmlformats.org/markup-compatibility/2006" xmlns:a14="http://schemas.microsoft.com/office/drawing/2010/main">
-        <mc:Choice Requires="a14">
-          <p:sp>
-            <p:nvSpPr>
-              <p:cNvPr id="11" name="TextBox 10">
-                <a:extLst>
-                  <a:ext uri="{FF2B5EF4-FFF2-40B4-BE49-F238E27FC236}">
-                    <a16:creationId xmlns:a16="http://schemas.microsoft.com/office/drawing/2014/main" id="{DC8472F7-10E2-DEB7-8AAB-3E44B78188C9}"/>
-                  </a:ext>
-                </a:extLst>
-              </p:cNvPr>
-              <p:cNvSpPr txBox="1"/>
-              <p:nvPr/>
-            </p:nvSpPr>
-            <p:spPr>
-              <a:xfrm>
-                <a:off x="1531256" y="2309428"/>
-                <a:ext cx="805543" cy="523220"/>
-              </a:xfrm>
-              <a:prstGeom prst="rect">
-                <a:avLst/>
-              </a:prstGeom>
-              <a:solidFill>
-                <a:schemeClr val="bg1"/>
-              </a:solidFill>
-            </p:spPr>
-            <p:txBody>
-              <a:bodyPr wrap="square">
-                <a:spAutoFit/>
-              </a:bodyPr>
-              <a:lstStyle/>
-              <a:p>
-                <a:pPr/>
-                <a14:m>
-                  <m:oMathPara xmlns:m="http://schemas.openxmlformats.org/officeDocument/2006/math">
-                    <m:oMath>
-                      <m:r>
-                        <a:rPr lang="en-US" sz="2800" i="1" smtClean="0">
-                          <a:latin typeface="Cambria Math" panose="02040503050406030204" pitchFamily="18" charset="0"/>
-                        </a:rPr>
-                        <m:t>𝑆</m:t>
-                      </m:r>
-                      <m:r>
-                        <a:rPr lang="en-US" sz="2800" i="1" smtClean="0">
-                          <a:latin typeface="Cambria Math" panose="02040503050406030204" pitchFamily="18" charset="0"/>
-                        </a:rPr>
-                        <m:t>(</m:t>
-                      </m:r>
-                      <m:r>
-                        <a:rPr lang="en-US" sz="2800" i="1" smtClean="0">
-                          <a:latin typeface="Cambria Math" panose="02040503050406030204" pitchFamily="18" charset="0"/>
-                        </a:rPr>
-                        <m:t>𝐴</m:t>
-                      </m:r>
-                      <m:r>
-                        <a:rPr lang="en-US" sz="2800" i="1" smtClean="0">
-                          <a:latin typeface="Cambria Math" panose="02040503050406030204" pitchFamily="18" charset="0"/>
-                        </a:rPr>
-                        <m:t>) </m:t>
-                      </m:r>
-                    </m:oMath>
-                  </m:oMathPara>
-                </a14:m>
-                <a:endParaRPr lang="en-US" sz="2800" dirty="0"/>
-              </a:p>
-            </p:txBody>
-          </p:sp>
-        </mc:Choice>
-        <mc:Fallback xmlns="">
-          <p:sp>
-            <p:nvSpPr>
-              <p:cNvPr id="11" name="TextBox 10">
-                <a:extLst>
-                  <a:ext uri="{FF2B5EF4-FFF2-40B4-BE49-F238E27FC236}">
-                    <a16:creationId xmlns:a16="http://schemas.microsoft.com/office/drawing/2014/main" id="{DC8472F7-10E2-DEB7-8AAB-3E44B78188C9}"/>
-                  </a:ext>
-                </a:extLst>
-              </p:cNvPr>
-              <p:cNvSpPr txBox="1">
-                <a:spLocks noRot="1" noChangeAspect="1" noMove="1" noResize="1" noEditPoints="1" noAdjustHandles="1" noChangeArrowheads="1" noChangeShapeType="1" noTextEdit="1"/>
-              </p:cNvSpPr>
-              <p:nvPr/>
-            </p:nvSpPr>
-            <p:spPr>
-              <a:xfrm>
-                <a:off x="1531256" y="2309428"/>
-                <a:ext cx="805543" cy="523220"/>
-              </a:xfrm>
-              <a:prstGeom prst="rect">
-                <a:avLst/>
-              </a:prstGeom>
-              <a:blipFill>
-                <a:blip r:embed="rId5"/>
-                <a:stretch>
-                  <a:fillRect/>
-                </a:stretch>
-              </a:blipFill>
-            </p:spPr>
-            <p:txBody>
-              <a:bodyPr/>
-              <a:lstStyle/>
-              <a:p>
-                <a:r>
-                  <a:rPr lang="en-US">
-                    <a:noFill/>
-                  </a:rPr>
-                  <a:t> </a:t>
-                </a:r>
-              </a:p>
-            </p:txBody>
-          </p:sp>
-        </mc:Fallback>
-      </mc:AlternateContent>
-      <mc:AlternateContent xmlns:mc="http://schemas.openxmlformats.org/markup-compatibility/2006" xmlns:a14="http://schemas.microsoft.com/office/drawing/2010/main">
-        <mc:Choice Requires="a14">
-          <p:sp>
-            <p:nvSpPr>
-              <p:cNvPr id="12" name="TextBox 11">
-                <a:extLst>
-                  <a:ext uri="{FF2B5EF4-FFF2-40B4-BE49-F238E27FC236}">
-                    <a16:creationId xmlns:a16="http://schemas.microsoft.com/office/drawing/2014/main" id="{6C831720-D3D5-94BD-3BF6-78A0FD0F4890}"/>
-                  </a:ext>
-                </a:extLst>
-              </p:cNvPr>
-              <p:cNvSpPr txBox="1"/>
-              <p:nvPr/>
-            </p:nvSpPr>
-            <p:spPr>
-              <a:xfrm>
-                <a:off x="1465942" y="4468998"/>
-                <a:ext cx="805543" cy="523220"/>
-              </a:xfrm>
-              <a:prstGeom prst="rect">
-                <a:avLst/>
-              </a:prstGeom>
-              <a:solidFill>
-                <a:schemeClr val="bg1"/>
-              </a:solidFill>
-            </p:spPr>
-            <p:txBody>
-              <a:bodyPr wrap="square">
-                <a:spAutoFit/>
-              </a:bodyPr>
-              <a:lstStyle/>
-              <a:p>
-                <a:pPr/>
-                <a14:m>
-                  <m:oMathPara xmlns:m="http://schemas.openxmlformats.org/officeDocument/2006/math">
-                    <m:oMath>
-                      <m:r>
-                        <a:rPr lang="en-US" sz="2800" i="1" smtClean="0">
-                          <a:latin typeface="Cambria Math" panose="02040503050406030204" pitchFamily="18" charset="0"/>
-                        </a:rPr>
-                        <m:t>𝑆</m:t>
-                      </m:r>
-                      <m:r>
-                        <a:rPr lang="en-US" sz="2800" i="1" smtClean="0">
-                          <a:latin typeface="Cambria Math" panose="02040503050406030204" pitchFamily="18" charset="0"/>
-                        </a:rPr>
-                        <m:t>(</m:t>
-                      </m:r>
-                      <m:r>
-                        <a:rPr lang="en-US" sz="2800" b="0" i="1" smtClean="0">
-                          <a:latin typeface="Cambria Math" panose="02040503050406030204" pitchFamily="18" charset="0"/>
-                        </a:rPr>
-                        <m:t>𝐵</m:t>
-                      </m:r>
-                      <m:r>
-                        <a:rPr lang="en-US" sz="2800" i="1" smtClean="0">
-                          <a:latin typeface="Cambria Math" panose="02040503050406030204" pitchFamily="18" charset="0"/>
-                        </a:rPr>
-                        <m:t>) </m:t>
-                      </m:r>
-                    </m:oMath>
-                  </m:oMathPara>
-                </a14:m>
-                <a:endParaRPr lang="en-US" sz="2800" dirty="0"/>
-              </a:p>
-            </p:txBody>
-          </p:sp>
-        </mc:Choice>
-        <mc:Fallback xmlns="">
-          <p:sp>
-            <p:nvSpPr>
-              <p:cNvPr id="12" name="TextBox 11">
-                <a:extLst>
-                  <a:ext uri="{FF2B5EF4-FFF2-40B4-BE49-F238E27FC236}">
-                    <a16:creationId xmlns:a16="http://schemas.microsoft.com/office/drawing/2014/main" id="{6C831720-D3D5-94BD-3BF6-78A0FD0F4890}"/>
-                  </a:ext>
-                </a:extLst>
-              </p:cNvPr>
-              <p:cNvSpPr txBox="1">
-                <a:spLocks noRot="1" noChangeAspect="1" noMove="1" noResize="1" noEditPoints="1" noAdjustHandles="1" noChangeArrowheads="1" noChangeShapeType="1" noTextEdit="1"/>
-              </p:cNvSpPr>
-              <p:nvPr/>
-            </p:nvSpPr>
-            <p:spPr>
-              <a:xfrm>
-                <a:off x="1465942" y="4468998"/>
-                <a:ext cx="805543" cy="523220"/>
-              </a:xfrm>
-              <a:prstGeom prst="rect">
-                <a:avLst/>
-              </a:prstGeom>
-              <a:blipFill>
-                <a:blip r:embed="rId6"/>
-                <a:stretch>
-                  <a:fillRect/>
-                </a:stretch>
-              </a:blipFill>
-            </p:spPr>
-            <p:txBody>
-              <a:bodyPr/>
-              <a:lstStyle/>
-              <a:p>
-                <a:r>
-                  <a:rPr lang="en-US">
-                    <a:noFill/>
-                  </a:rPr>
-                  <a:t> </a:t>
-                </a:r>
-              </a:p>
-            </p:txBody>
-          </p:sp>
-        </mc:Fallback>
-      </mc:AlternateContent>
-      <mc:AlternateContent xmlns:mc="http://schemas.openxmlformats.org/markup-compatibility/2006" xmlns:a14="http://schemas.microsoft.com/office/drawing/2010/main">
-        <mc:Choice Requires="a14">
-          <p:sp>
-            <p:nvSpPr>
-              <p:cNvPr id="13" name="TextBox 12">
-                <a:extLst>
-                  <a:ext uri="{FF2B5EF4-FFF2-40B4-BE49-F238E27FC236}">
-                    <a16:creationId xmlns:a16="http://schemas.microsoft.com/office/drawing/2014/main" id="{7AA15ABC-03D7-7630-6A8D-D6CDE5B828B6}"/>
-                  </a:ext>
-                </a:extLst>
-              </p:cNvPr>
-              <p:cNvSpPr txBox="1"/>
-              <p:nvPr/>
-            </p:nvSpPr>
-            <p:spPr>
-              <a:xfrm>
-                <a:off x="2518228" y="2932742"/>
-                <a:ext cx="1465944" cy="992516"/>
-              </a:xfrm>
-              <a:prstGeom prst="rect">
-                <a:avLst/>
-              </a:prstGeom>
-              <a:solidFill>
-                <a:schemeClr val="bg1"/>
-              </a:solidFill>
-            </p:spPr>
-            <p:txBody>
-              <a:bodyPr wrap="square">
-                <a:spAutoFit/>
-              </a:bodyPr>
-              <a:lstStyle/>
-              <a:p>
-                <a:pPr/>
-                <a14:m>
-                  <m:oMathPara xmlns:m="http://schemas.openxmlformats.org/officeDocument/2006/math">
-                    <m:oMath>
-                      <m:r>
-                        <a:rPr lang="en-US" sz="2400" i="1" smtClean="0">
-                          <a:latin typeface="Cambria Math" panose="02040503050406030204" pitchFamily="18" charset="0"/>
-                        </a:rPr>
-                        <m:t>𝑆</m:t>
-                      </m:r>
-                      <m:r>
-                        <a:rPr lang="en-US" sz="2400" i="1" smtClean="0">
-                          <a:latin typeface="Cambria Math" panose="02040503050406030204" pitchFamily="18" charset="0"/>
-                        </a:rPr>
-                        <m:t>(</m:t>
-                      </m:r>
-                      <m:r>
-                        <a:rPr lang="en-US" sz="2400" i="1" smtClean="0">
-                          <a:latin typeface="Cambria Math" panose="02040503050406030204" pitchFamily="18" charset="0"/>
-                        </a:rPr>
-                        <m:t>𝐴</m:t>
-                      </m:r>
-                      <m:nary>
-                        <m:naryPr>
-                          <m:chr m:val="⋃"/>
-                          <m:subHide m:val="on"/>
-                          <m:supHide m:val="on"/>
-                          <m:ctrlPr>
-                            <a:rPr lang="en-US" sz="2400" i="1" smtClean="0">
-                              <a:latin typeface="Cambria Math" panose="02040503050406030204" pitchFamily="18" charset="0"/>
-                            </a:rPr>
-                          </m:ctrlPr>
-                        </m:naryPr>
-                        <m:sub/>
-                        <m:sup/>
-                        <m:e>
-                          <m:r>
-                            <a:rPr lang="en-US" sz="2400" b="0" i="1" smtClean="0">
-                              <a:latin typeface="Cambria Math" panose="02040503050406030204" pitchFamily="18" charset="0"/>
-                            </a:rPr>
-                            <m:t>𝐵</m:t>
-                          </m:r>
-                          <m:r>
-                            <a:rPr lang="en-US" sz="2400" b="0" i="1" smtClean="0">
-                              <a:latin typeface="Cambria Math" panose="02040503050406030204" pitchFamily="18" charset="0"/>
-                            </a:rPr>
-                            <m:t>)</m:t>
-                          </m:r>
-                        </m:e>
-                      </m:nary>
-                    </m:oMath>
-                  </m:oMathPara>
-                </a14:m>
-                <a:endParaRPr lang="en-US" sz="2400" dirty="0"/>
-              </a:p>
-            </p:txBody>
-          </p:sp>
-        </mc:Choice>
-        <mc:Fallback xmlns="">
-          <p:sp>
-            <p:nvSpPr>
-              <p:cNvPr id="13" name="TextBox 12">
-                <a:extLst>
-                  <a:ext uri="{FF2B5EF4-FFF2-40B4-BE49-F238E27FC236}">
-                    <a16:creationId xmlns:a16="http://schemas.microsoft.com/office/drawing/2014/main" id="{7AA15ABC-03D7-7630-6A8D-D6CDE5B828B6}"/>
-                  </a:ext>
-                </a:extLst>
-              </p:cNvPr>
-              <p:cNvSpPr txBox="1">
-                <a:spLocks noRot="1" noChangeAspect="1" noMove="1" noResize="1" noEditPoints="1" noAdjustHandles="1" noChangeArrowheads="1" noChangeShapeType="1" noTextEdit="1"/>
-              </p:cNvSpPr>
-              <p:nvPr/>
-            </p:nvSpPr>
-            <p:spPr>
-              <a:xfrm>
-                <a:off x="2518228" y="2932742"/>
-                <a:ext cx="1465944" cy="992516"/>
-              </a:xfrm>
-              <a:prstGeom prst="rect">
-                <a:avLst/>
-              </a:prstGeom>
-              <a:blipFill>
-                <a:blip r:embed="rId7"/>
-                <a:stretch>
-                  <a:fillRect/>
-                </a:stretch>
-              </a:blipFill>
-            </p:spPr>
-            <p:txBody>
-              <a:bodyPr/>
-              <a:lstStyle/>
-              <a:p>
-                <a:r>
-                  <a:rPr lang="en-US">
-                    <a:noFill/>
-                  </a:rPr>
-                  <a:t> </a:t>
-                </a:r>
-              </a:p>
-            </p:txBody>
-          </p:sp>
-        </mc:Fallback>
-      </mc:AlternateContent>
-    </p:spTree>
-    <p:extLst>
-      <p:ext uri="{BB962C8B-B14F-4D97-AF65-F5344CB8AC3E}">
-        <p14:creationId xmlns:p14="http://schemas.microsoft.com/office/powerpoint/2010/main" val="3644876859"/>
-      </p:ext>
-    </p:extLst>
-  </p:cSld>
-  <p:clrMapOvr>
-    <a:masterClrMapping/>
-  </p:clrMapOvr>
-</p:sld>
-</file>
-
-<file path=ppt/slides/slide4.xml><?xml version="1.0" encoding="utf-8"?>
-<p:sld xmlns:a="http://schemas.openxmlformats.org/drawingml/2006/main" xmlns:r="http://schemas.openxmlformats.org/officeDocument/2006/relationships" xmlns:p="http://schemas.openxmlformats.org/presentationml/2006/main">
-  <p:cSld>
-    <p:spTree>
-      <p:nvGrpSpPr>
-        <p:cNvPr id="1" name=""/>
-        <p:cNvGrpSpPr/>
-        <p:nvPr/>
-      </p:nvGrpSpPr>
-      <p:grpSpPr>
-        <a:xfrm>
-          <a:off x="0" y="0"/>
-          <a:ext cx="0" cy="0"/>
-          <a:chOff x="0" y="0"/>
-          <a:chExt cx="0" cy="0"/>
-        </a:xfrm>
-      </p:grpSpPr>
-      <p:sp>
-        <p:nvSpPr>
-          <p:cNvPr id="2" name="Title 1">
-            <a:extLst>
-              <a:ext uri="{FF2B5EF4-FFF2-40B4-BE49-F238E27FC236}">
-                <a16:creationId xmlns:a16="http://schemas.microsoft.com/office/drawing/2014/main" id="{1789BB8C-6D26-E7CE-00B3-168F05C536BC}"/>
-              </a:ext>
-            </a:extLst>
-          </p:cNvPr>
-          <p:cNvSpPr>
-            <a:spLocks noGrp="1"/>
-          </p:cNvSpPr>
-          <p:nvPr>
-            <p:ph type="title"/>
-          </p:nvPr>
-        </p:nvSpPr>
-        <p:spPr/>
-        <p:txBody>
-          <a:bodyPr>
-            <a:normAutofit fontScale="90000"/>
-          </a:bodyPr>
-          <a:lstStyle/>
-          <a:p>
-            <a:r>
-              <a:rPr lang="en-US" dirty="0"/>
-              <a:t>Evaluating transcript assembly</a:t>
-            </a:r>
-          </a:p>
-        </p:txBody>
-      </p:sp>
-      <p:sp>
-        <p:nvSpPr>
-          <p:cNvPr id="3" name="Content Placeholder 2">
-            <a:extLst>
-              <a:ext uri="{FF2B5EF4-FFF2-40B4-BE49-F238E27FC236}">
-                <a16:creationId xmlns:a16="http://schemas.microsoft.com/office/drawing/2014/main" id="{EA47D1B9-170D-520A-C276-39860A1323E0}"/>
-              </a:ext>
-            </a:extLst>
-          </p:cNvPr>
-          <p:cNvSpPr>
-            <a:spLocks noGrp="1"/>
-          </p:cNvSpPr>
-          <p:nvPr>
-            <p:ph idx="1"/>
-          </p:nvPr>
-        </p:nvSpPr>
-        <p:spPr>
-          <a:xfrm>
-            <a:off x="598620" y="1596540"/>
-            <a:ext cx="10972800" cy="4581150"/>
-          </a:xfrm>
-        </p:spPr>
-        <p:txBody>
-          <a:bodyPr>
-            <a:normAutofit lnSpcReduction="10000"/>
-          </a:bodyPr>
-          <a:lstStyle/>
-          <a:p>
-            <a:r>
-              <a:rPr lang="en-US" dirty="0">
-                <a:latin typeface="Calibri" panose="020F0502020204030204" pitchFamily="34" charset="0"/>
-                <a:cs typeface="Calibri" panose="020F0502020204030204" pitchFamily="34" charset="0"/>
-              </a:rPr>
-              <a:t>We want to compare the assembly output against a benchmark transcriptome where correct sequences of all transcripts are known.</a:t>
-            </a:r>
-          </a:p>
-          <a:p>
-            <a:pPr marL="285750" indent="-285750">
-              <a:buFontTx/>
-              <a:buChar char="-"/>
-            </a:pPr>
-            <a:endParaRPr lang="en-US" dirty="0">
-              <a:latin typeface="Calibri" panose="020F0502020204030204" pitchFamily="34" charset="0"/>
-              <a:cs typeface="Calibri" panose="020F0502020204030204" pitchFamily="34" charset="0"/>
-            </a:endParaRPr>
-          </a:p>
-          <a:p>
-            <a:r>
-              <a:rPr lang="en-US" b="1" dirty="0">
-                <a:latin typeface="Calibri" panose="020F0502020204030204" pitchFamily="34" charset="0"/>
-                <a:cs typeface="Calibri" panose="020F0502020204030204" pitchFamily="34" charset="0"/>
-              </a:rPr>
-              <a:t>Limitations of using a known reference transcriptome</a:t>
-            </a:r>
-            <a:r>
-              <a:rPr lang="en-US" dirty="0">
-                <a:latin typeface="Calibri" panose="020F0502020204030204" pitchFamily="34" charset="0"/>
-                <a:cs typeface="Calibri" panose="020F0502020204030204" pitchFamily="34" charset="0"/>
-              </a:rPr>
-              <a:t>:</a:t>
-            </a:r>
-          </a:p>
-          <a:p>
-            <a:pPr marL="285750" indent="-285750">
-              <a:buFontTx/>
-              <a:buChar char="-"/>
-            </a:pPr>
-            <a:r>
-              <a:rPr lang="en-US" dirty="0">
-                <a:latin typeface="Calibri" panose="020F0502020204030204" pitchFamily="34" charset="0"/>
-                <a:cs typeface="Calibri" panose="020F0502020204030204" pitchFamily="34" charset="0"/>
-              </a:rPr>
-              <a:t>variability in the transcriptome (e.g. among e.g. cell types) makes  it impossible to determine whether sequences from the reference that are missing from the assembled transcriptome are due to assembly errors, or whether they were not expressed in the library sequenced</a:t>
-            </a:r>
-          </a:p>
-          <a:p>
-            <a:pPr marL="285750" indent="-285750">
-              <a:buFontTx/>
-              <a:buChar char="-"/>
-            </a:pPr>
-            <a:r>
-              <a:rPr lang="en-US" dirty="0">
-                <a:latin typeface="Calibri" panose="020F0502020204030204" pitchFamily="34" charset="0"/>
-                <a:cs typeface="Calibri" panose="020F0502020204030204" pitchFamily="34" charset="0"/>
-              </a:rPr>
-              <a:t>transcriptome sequences may also vary between the individual under study and the reference</a:t>
-            </a:r>
-          </a:p>
-        </p:txBody>
-      </p:sp>
-      <p:sp>
-        <p:nvSpPr>
-          <p:cNvPr id="4" name="Slide Number Placeholder 3">
-            <a:extLst>
-              <a:ext uri="{FF2B5EF4-FFF2-40B4-BE49-F238E27FC236}">
-                <a16:creationId xmlns:a16="http://schemas.microsoft.com/office/drawing/2014/main" id="{93F364A0-E602-1C0F-ABF0-AD654D7FC850}"/>
-              </a:ext>
-            </a:extLst>
-          </p:cNvPr>
-          <p:cNvSpPr>
-            <a:spLocks noGrp="1"/>
-          </p:cNvSpPr>
-          <p:nvPr>
-            <p:ph type="sldNum" sz="quarter" idx="12"/>
-          </p:nvPr>
-        </p:nvSpPr>
-        <p:spPr/>
-        <p:txBody>
-          <a:bodyPr/>
-          <a:lstStyle/>
-          <a:p>
-            <a:fld id="{B82CCC60-E8CD-4174-8B1A-7DF615B22EEF}" type="slidenum">
-              <a:rPr lang="en-US" smtClean="0"/>
-              <a:pPr/>
-              <a:t>4</a:t>
-            </a:fld>
-            <a:endParaRPr lang="en-US"/>
-          </a:p>
-        </p:txBody>
-      </p:sp>
-    </p:spTree>
-    <p:extLst>
-      <p:ext uri="{BB962C8B-B14F-4D97-AF65-F5344CB8AC3E}">
-        <p14:creationId xmlns:p14="http://schemas.microsoft.com/office/powerpoint/2010/main" val="2290969468"/>
-      </p:ext>
-    </p:extLst>
-  </p:cSld>
-  <p:clrMapOvr>
-    <a:masterClrMapping/>
-  </p:clrMapOvr>
-</p:sld>
-</file>
-
-<file path=ppt/slides/slide5.xml><?xml version="1.0" encoding="utf-8"?>
-<p:sld xmlns:a="http://schemas.openxmlformats.org/drawingml/2006/main" xmlns:r="http://schemas.openxmlformats.org/officeDocument/2006/relationships" xmlns:p="http://schemas.openxmlformats.org/presentationml/2006/main">
-  <p:cSld>
-    <p:spTree>
-      <p:nvGrpSpPr>
-        <p:cNvPr id="1" name=""/>
-        <p:cNvGrpSpPr/>
-        <p:nvPr/>
-      </p:nvGrpSpPr>
-      <p:grpSpPr>
-        <a:xfrm>
-          <a:off x="0" y="0"/>
-          <a:ext cx="0" cy="0"/>
-          <a:chOff x="0" y="0"/>
-          <a:chExt cx="0" cy="0"/>
-        </a:xfrm>
-      </p:grpSpPr>
-      <p:sp>
-        <p:nvSpPr>
-          <p:cNvPr id="2" name="Title 1">
-            <a:extLst>
-              <a:ext uri="{FF2B5EF4-FFF2-40B4-BE49-F238E27FC236}">
                 <a16:creationId xmlns:a16="http://schemas.microsoft.com/office/drawing/2014/main" id="{83C93CC5-F089-7B6F-131C-C16F6C9FAD69}"/>
               </a:ext>
             </a:extLst>
@@ -31478,7 +29957,7 @@
             <a:fld id="{B82CCC60-E8CD-4174-8B1A-7DF615B22EEF}" type="slidenum">
               <a:rPr lang="en-US" smtClean="0"/>
               <a:pPr/>
-              <a:t>5</a:t>
+              <a:t>3</a:t>
             </a:fld>
             <a:endParaRPr lang="en-US"/>
           </a:p>
@@ -32172,7 +30651,7 @@
 </p:sld>
 </file>
 
-<file path=ppt/slides/slide6.xml><?xml version="1.0" encoding="utf-8"?>
+<file path=ppt/slides/slide4.xml><?xml version="1.0" encoding="utf-8"?>
 <p:sld xmlns:a="http://schemas.openxmlformats.org/drawingml/2006/main" xmlns:r="http://schemas.openxmlformats.org/officeDocument/2006/relationships" xmlns:p="http://schemas.openxmlformats.org/presentationml/2006/main">
   <p:cSld>
     <p:spTree>
@@ -32382,7 +30861,7 @@
             <a:fld id="{B82CCC60-E8CD-4174-8B1A-7DF615B22EEF}" type="slidenum">
               <a:rPr lang="en-US" smtClean="0"/>
               <a:pPr/>
-              <a:t>6</a:t>
+              <a:t>4</a:t>
             </a:fld>
             <a:endParaRPr lang="en-US"/>
           </a:p>
@@ -32401,7 +30880,7 @@
 </p:sld>
 </file>
 
-<file path=ppt/slides/slide7.xml><?xml version="1.0" encoding="utf-8"?>
+<file path=ppt/slides/slide5.xml><?xml version="1.0" encoding="utf-8"?>
 <p:sld xmlns:a="http://schemas.openxmlformats.org/drawingml/2006/main" xmlns:r="http://schemas.openxmlformats.org/officeDocument/2006/relationships" xmlns:p="http://schemas.openxmlformats.org/presentationml/2006/main">
   <p:cSld>
     <p:spTree>
@@ -32472,7 +30951,7 @@
         </p:spPr>
         <p:txBody>
           <a:bodyPr>
-            <a:normAutofit fontScale="85000" lnSpcReduction="20000"/>
+            <a:normAutofit fontScale="92500" lnSpcReduction="10000"/>
           </a:bodyPr>
           <a:lstStyle/>
           <a:p>
@@ -32500,16 +30979,13 @@
             </a:r>
           </a:p>
           <a:p>
-            <a:pPr marL="285750" indent="-285750">
-              <a:buFontTx/>
-              <a:buChar char="-"/>
-            </a:pPr>
+            <a:pPr lvl="1"/>
             <a:r>
               <a:rPr lang="en-US" dirty="0">
                 <a:latin typeface="Calibri" panose="020F0502020204030204" pitchFamily="34" charset="0"/>
                 <a:cs typeface="Calibri" panose="020F0502020204030204" pitchFamily="34" charset="0"/>
               </a:rPr>
-              <a:t>short Illumina reads: RSEM, </a:t>
+              <a:t>short Illumina RNA-seq reads: RSEM, </a:t>
             </a:r>
             <a:r>
               <a:rPr lang="en-US" dirty="0" err="1">
@@ -32527,16 +31003,13 @@
             </a:r>
           </a:p>
           <a:p>
-            <a:pPr marL="285750" indent="-285750">
-              <a:buFontTx/>
-              <a:buChar char="-"/>
-            </a:pPr>
+            <a:pPr lvl="1"/>
             <a:r>
               <a:rPr lang="en-US" dirty="0">
                 <a:latin typeface="Calibri" panose="020F0502020204030204" pitchFamily="34" charset="0"/>
                 <a:cs typeface="Calibri" panose="020F0502020204030204" pitchFamily="34" charset="0"/>
               </a:rPr>
-              <a:t>long third- generation sequencing reads: PBSIM, Trans-</a:t>
+              <a:t>long transcriptome sequencing reads: PBSIM, Trans-</a:t>
             </a:r>
             <a:r>
               <a:rPr lang="en-US" dirty="0" err="1">
@@ -32552,6 +31025,58 @@
               </a:rPr>
               <a:t> </a:t>
             </a:r>
+          </a:p>
+          <a:p>
+            <a:pPr marL="457200" lvl="1" indent="0">
+              <a:buNone/>
+            </a:pPr>
+            <a:endParaRPr lang="en-US" dirty="0">
+              <a:latin typeface="Calibri" panose="020F0502020204030204" pitchFamily="34" charset="0"/>
+              <a:cs typeface="Calibri" panose="020F0502020204030204" pitchFamily="34" charset="0"/>
+            </a:endParaRPr>
+          </a:p>
+          <a:p>
+            <a:r>
+              <a:rPr lang="en-US" dirty="0">
+                <a:latin typeface="Calibri" panose="020F0502020204030204" pitchFamily="34" charset="0"/>
+                <a:cs typeface="Calibri" panose="020F0502020204030204" pitchFamily="34" charset="0"/>
+              </a:rPr>
+              <a:t>Simulated data can only be used to test the validity of an algorithm – it is a </a:t>
+            </a:r>
+            <a:r>
+              <a:rPr lang="en-US" i="1" dirty="0">
+                <a:latin typeface="Calibri" panose="020F0502020204030204" pitchFamily="34" charset="0"/>
+                <a:cs typeface="Calibri" panose="020F0502020204030204" pitchFamily="34" charset="0"/>
+              </a:rPr>
+              <a:t>necessary</a:t>
+            </a:r>
+            <a:r>
+              <a:rPr lang="en-US" dirty="0">
+                <a:latin typeface="Calibri" panose="020F0502020204030204" pitchFamily="34" charset="0"/>
+                <a:cs typeface="Calibri" panose="020F0502020204030204" pitchFamily="34" charset="0"/>
+              </a:rPr>
+              <a:t>, but not </a:t>
+            </a:r>
+            <a:r>
+              <a:rPr lang="en-US" i="1" dirty="0">
+                <a:latin typeface="Calibri" panose="020F0502020204030204" pitchFamily="34" charset="0"/>
+                <a:cs typeface="Calibri" panose="020F0502020204030204" pitchFamily="34" charset="0"/>
+              </a:rPr>
+              <a:t>sufficient</a:t>
+            </a:r>
+            <a:r>
+              <a:rPr lang="en-US" dirty="0">
+                <a:latin typeface="Calibri" panose="020F0502020204030204" pitchFamily="34" charset="0"/>
+                <a:cs typeface="Calibri" panose="020F0502020204030204" pitchFamily="34" charset="0"/>
+              </a:rPr>
+              <a:t> performance criteria</a:t>
+            </a:r>
+          </a:p>
+          <a:p>
+            <a:endParaRPr lang="en-US" dirty="0">
+              <a:latin typeface="Calibri" panose="020F0502020204030204" pitchFamily="34" charset="0"/>
+              <a:cs typeface="Calibri" panose="020F0502020204030204" pitchFamily="34" charset="0"/>
+            </a:endParaRPr>
           </a:p>
           <a:p>
             <a:pPr marL="285750" indent="-285750">
@@ -32562,45 +31087,6 @@
               <a:latin typeface="Calibri" panose="020F0502020204030204" pitchFamily="34" charset="0"/>
               <a:cs typeface="Calibri" panose="020F0502020204030204" pitchFamily="34" charset="0"/>
             </a:endParaRPr>
-          </a:p>
-          <a:p>
-            <a:r>
-              <a:rPr lang="en-US" dirty="0">
-                <a:latin typeface="Calibri" panose="020F0502020204030204" pitchFamily="34" charset="0"/>
-                <a:cs typeface="Calibri" panose="020F0502020204030204" pitchFamily="34" charset="0"/>
-              </a:rPr>
-              <a:t>Using simulated RNA-seq data allows the quantification of each of the following categories: </a:t>
-            </a:r>
-          </a:p>
-          <a:p>
-            <a:pPr marL="685800" lvl="1"/>
-            <a:r>
-              <a:rPr lang="en-US" dirty="0">
-                <a:latin typeface="Calibri" panose="020F0502020204030204" pitchFamily="34" charset="0"/>
-                <a:cs typeface="Calibri" panose="020F0502020204030204" pitchFamily="34" charset="0"/>
-              </a:rPr>
-              <a:t>correctly assembled sequences (true positives or TPs) </a:t>
-            </a:r>
-          </a:p>
-          <a:p>
-            <a:pPr marL="685800" lvl="1"/>
-            <a:r>
-              <a:rPr lang="en-US" dirty="0">
-                <a:latin typeface="Calibri" panose="020F0502020204030204" pitchFamily="34" charset="0"/>
-                <a:cs typeface="Calibri" panose="020F0502020204030204" pitchFamily="34" charset="0"/>
-              </a:rPr>
-              <a:t>sequences that are assembled with errors (false positives or FPs) </a:t>
-            </a:r>
-          </a:p>
-          <a:p>
-            <a:pPr marL="685800" lvl="1"/>
-            <a:r>
-              <a:rPr lang="en-US" dirty="0">
-                <a:latin typeface="Calibri" panose="020F0502020204030204" pitchFamily="34" charset="0"/>
-                <a:cs typeface="Calibri" panose="020F0502020204030204" pitchFamily="34" charset="0"/>
-              </a:rPr>
-              <a:t>sequences in the reference that are missing from the assembly (false negatives or FNs) </a:t>
-            </a:r>
           </a:p>
           <a:p>
             <a:endParaRPr lang="en-US" dirty="0">
@@ -32641,7 +31127,7 @@
             <a:fld id="{B82CCC60-E8CD-4174-8B1A-7DF615B22EEF}" type="slidenum">
               <a:rPr lang="en-US" smtClean="0"/>
               <a:pPr/>
-              <a:t>7</a:t>
+              <a:t>5</a:t>
             </a:fld>
             <a:endParaRPr lang="en-US"/>
           </a:p>
@@ -32657,10 +31143,200 @@
   <p:clrMapOvr>
     <a:masterClrMapping/>
   </p:clrMapOvr>
+  <p:timing>
+    <p:tnLst>
+      <p:par>
+        <p:cTn id="1" dur="indefinite" restart="never" nodeType="tmRoot">
+          <p:childTnLst>
+            <p:seq concurrent="1" nextAc="seek">
+              <p:cTn id="2" dur="indefinite" nodeType="mainSeq">
+                <p:childTnLst>
+                  <p:par>
+                    <p:cTn id="3" fill="hold">
+                      <p:stCondLst>
+                        <p:cond delay="indefinite"/>
+                      </p:stCondLst>
+                      <p:childTnLst>
+                        <p:par>
+                          <p:cTn id="4" fill="hold">
+                            <p:stCondLst>
+                              <p:cond delay="0"/>
+                            </p:stCondLst>
+                            <p:childTnLst>
+                              <p:par>
+                                <p:cTn id="5" presetID="1" presetClass="entr" presetSubtype="0" fill="hold" nodeType="clickEffect">
+                                  <p:stCondLst>
+                                    <p:cond delay="0"/>
+                                  </p:stCondLst>
+                                  <p:childTnLst>
+                                    <p:set>
+                                      <p:cBhvr>
+                                        <p:cTn id="6" dur="1" fill="hold">
+                                          <p:stCondLst>
+                                            <p:cond delay="0"/>
+                                          </p:stCondLst>
+                                        </p:cTn>
+                                        <p:tgtEl>
+                                          <p:spTgt spid="3">
+                                            <p:txEl>
+                                              <p:pRg st="2" end="2"/>
+                                            </p:txEl>
+                                          </p:spTgt>
+                                        </p:tgtEl>
+                                        <p:attrNameLst>
+                                          <p:attrName>style.visibility</p:attrName>
+                                        </p:attrNameLst>
+                                      </p:cBhvr>
+                                      <p:to>
+                                        <p:strVal val="visible"/>
+                                      </p:to>
+                                    </p:set>
+                                  </p:childTnLst>
+                                </p:cTn>
+                              </p:par>
+                              <p:par>
+                                <p:cTn id="7" presetID="1" presetClass="entr" presetSubtype="0" fill="hold" nodeType="withEffect">
+                                  <p:stCondLst>
+                                    <p:cond delay="0"/>
+                                  </p:stCondLst>
+                                  <p:childTnLst>
+                                    <p:set>
+                                      <p:cBhvr>
+                                        <p:cTn id="8" dur="1" fill="hold">
+                                          <p:stCondLst>
+                                            <p:cond delay="0"/>
+                                          </p:stCondLst>
+                                        </p:cTn>
+                                        <p:tgtEl>
+                                          <p:spTgt spid="3">
+                                            <p:txEl>
+                                              <p:pRg st="3" end="3"/>
+                                            </p:txEl>
+                                          </p:spTgt>
+                                        </p:tgtEl>
+                                        <p:attrNameLst>
+                                          <p:attrName>style.visibility</p:attrName>
+                                        </p:attrNameLst>
+                                      </p:cBhvr>
+                                      <p:to>
+                                        <p:strVal val="visible"/>
+                                      </p:to>
+                                    </p:set>
+                                  </p:childTnLst>
+                                </p:cTn>
+                              </p:par>
+                              <p:par>
+                                <p:cTn id="9" presetID="1" presetClass="entr" presetSubtype="0" fill="hold" nodeType="withEffect">
+                                  <p:stCondLst>
+                                    <p:cond delay="0"/>
+                                  </p:stCondLst>
+                                  <p:childTnLst>
+                                    <p:set>
+                                      <p:cBhvr>
+                                        <p:cTn id="10" dur="1" fill="hold">
+                                          <p:stCondLst>
+                                            <p:cond delay="0"/>
+                                          </p:stCondLst>
+                                        </p:cTn>
+                                        <p:tgtEl>
+                                          <p:spTgt spid="3">
+                                            <p:txEl>
+                                              <p:pRg st="4" end="4"/>
+                                            </p:txEl>
+                                          </p:spTgt>
+                                        </p:tgtEl>
+                                        <p:attrNameLst>
+                                          <p:attrName>style.visibility</p:attrName>
+                                        </p:attrNameLst>
+                                      </p:cBhvr>
+                                      <p:to>
+                                        <p:strVal val="visible"/>
+                                      </p:to>
+                                    </p:set>
+                                  </p:childTnLst>
+                                </p:cTn>
+                              </p:par>
+                            </p:childTnLst>
+                          </p:cTn>
+                        </p:par>
+                      </p:childTnLst>
+                    </p:cTn>
+                  </p:par>
+                  <p:par>
+                    <p:cTn id="11" fill="hold">
+                      <p:stCondLst>
+                        <p:cond delay="indefinite"/>
+                      </p:stCondLst>
+                      <p:childTnLst>
+                        <p:par>
+                          <p:cTn id="12" fill="hold">
+                            <p:stCondLst>
+                              <p:cond delay="0"/>
+                            </p:stCondLst>
+                            <p:childTnLst>
+                              <p:par>
+                                <p:cTn id="13" presetID="1" presetClass="entr" presetSubtype="0" fill="hold" nodeType="clickEffect">
+                                  <p:stCondLst>
+                                    <p:cond delay="0"/>
+                                  </p:stCondLst>
+                                  <p:childTnLst>
+                                    <p:set>
+                                      <p:cBhvr>
+                                        <p:cTn id="14" dur="1" fill="hold">
+                                          <p:stCondLst>
+                                            <p:cond delay="0"/>
+                                          </p:stCondLst>
+                                        </p:cTn>
+                                        <p:tgtEl>
+                                          <p:spTgt spid="3">
+                                            <p:txEl>
+                                              <p:pRg st="6" end="6"/>
+                                            </p:txEl>
+                                          </p:spTgt>
+                                        </p:tgtEl>
+                                        <p:attrNameLst>
+                                          <p:attrName>style.visibility</p:attrName>
+                                        </p:attrNameLst>
+                                      </p:cBhvr>
+                                      <p:to>
+                                        <p:strVal val="visible"/>
+                                      </p:to>
+                                    </p:set>
+                                  </p:childTnLst>
+                                </p:cTn>
+                              </p:par>
+                            </p:childTnLst>
+                          </p:cTn>
+                        </p:par>
+                      </p:childTnLst>
+                    </p:cTn>
+                  </p:par>
+                </p:childTnLst>
+              </p:cTn>
+              <p:prevCondLst>
+                <p:cond evt="onPrev" delay="0">
+                  <p:tgtEl>
+                    <p:sldTgt/>
+                  </p:tgtEl>
+                </p:cond>
+              </p:prevCondLst>
+              <p:nextCondLst>
+                <p:cond evt="onNext" delay="0">
+                  <p:tgtEl>
+                    <p:sldTgt/>
+                  </p:tgtEl>
+                </p:cond>
+              </p:nextCondLst>
+            </p:seq>
+          </p:childTnLst>
+        </p:cTn>
+      </p:par>
+    </p:tnLst>
+  </p:timing>
 </p:sld>
 </file>
 
-<file path=ppt/slides/slide8.xml><?xml version="1.0" encoding="utf-8"?>
+<file path=ppt/slides/slide6.xml><?xml version="1.0" encoding="utf-8"?>
 <p:sld xmlns:a="http://schemas.openxmlformats.org/drawingml/2006/main" xmlns:r="http://schemas.openxmlformats.org/officeDocument/2006/relationships" xmlns:p="http://schemas.openxmlformats.org/presentationml/2006/main">
   <p:cSld>
     <p:spTree>
@@ -32741,24 +31417,16 @@
           </a:bodyPr>
           <a:lstStyle/>
           <a:p>
+            <a:pPr marL="0" indent="0">
+              <a:buNone/>
+            </a:pPr>
             <a:r>
               <a:rPr lang="en-US" dirty="0">
                 <a:latin typeface="Calibri" panose="020F0502020204030204" pitchFamily="34" charset="0"/>
                 <a:cs typeface="Calibri" panose="020F0502020204030204" pitchFamily="34" charset="0"/>
               </a:rPr>
-              <a:t>Compare to </a:t>
-            </a:r>
-            <a:r>
-              <a:rPr lang="en-US">
-                <a:latin typeface="Calibri" panose="020F0502020204030204" pitchFamily="34" charset="0"/>
-                <a:cs typeface="Calibri" panose="020F0502020204030204" pitchFamily="34" charset="0"/>
-              </a:rPr>
-              <a:t>the reference</a:t>
-            </a:r>
-            <a:endParaRPr lang="en-US" dirty="0">
-              <a:latin typeface="Calibri" panose="020F0502020204030204" pitchFamily="34" charset="0"/>
-              <a:cs typeface="Calibri" panose="020F0502020204030204" pitchFamily="34" charset="0"/>
-            </a:endParaRPr>
+              <a:t>Compare to the reference</a:t>
+            </a:r>
           </a:p>
           <a:p>
             <a:endParaRPr lang="en-US" dirty="0">
@@ -32922,7 +31590,7 @@
             <a:fld id="{B82CCC60-E8CD-4174-8B1A-7DF615B22EEF}" type="slidenum">
               <a:rPr lang="en-US" smtClean="0"/>
               <a:pPr/>
-              <a:t>8</a:t>
+              <a:t>6</a:t>
             </a:fld>
             <a:endParaRPr lang="en-US"/>
           </a:p>
@@ -32941,7 +31609,7 @@
 </p:sld>
 </file>
 
-<file path=ppt/slides/slide9.xml><?xml version="1.0" encoding="utf-8"?>
+<file path=ppt/slides/slide7.xml><?xml version="1.0" encoding="utf-8"?>
 <p:sld xmlns:a="http://schemas.openxmlformats.org/drawingml/2006/main" xmlns:r="http://schemas.openxmlformats.org/officeDocument/2006/relationships" xmlns:p="http://schemas.openxmlformats.org/presentationml/2006/main">
   <p:cSld>
     <p:spTree>
@@ -33012,7 +31680,7 @@
             <a:fld id="{B82CCC60-E8CD-4174-8B1A-7DF615B22EEF}" type="slidenum">
               <a:rPr lang="en-US" smtClean="0"/>
               <a:pPr/>
-              <a:t>9</a:t>
+              <a:t>7</a:t>
             </a:fld>
             <a:endParaRPr lang="en-US"/>
           </a:p>
@@ -33110,6 +31778,324 @@
     <p:extLst>
       <p:ext uri="{BB962C8B-B14F-4D97-AF65-F5344CB8AC3E}">
         <p14:creationId xmlns:p14="http://schemas.microsoft.com/office/powerpoint/2010/main" val="2230780895"/>
+      </p:ext>
+    </p:extLst>
+  </p:cSld>
+  <p:clrMapOvr>
+    <a:masterClrMapping/>
+  </p:clrMapOvr>
+</p:sld>
+</file>
+
+<file path=ppt/slides/slide8.xml><?xml version="1.0" encoding="utf-8"?>
+<p:sld xmlns:a="http://schemas.openxmlformats.org/drawingml/2006/main" xmlns:r="http://schemas.openxmlformats.org/officeDocument/2006/relationships" xmlns:p="http://schemas.openxmlformats.org/presentationml/2006/main">
+  <p:cSld>
+    <p:spTree>
+      <p:nvGrpSpPr>
+        <p:cNvPr id="1" name=""/>
+        <p:cNvGrpSpPr/>
+        <p:nvPr/>
+      </p:nvGrpSpPr>
+      <p:grpSpPr>
+        <a:xfrm>
+          <a:off x="0" y="0"/>
+          <a:ext cx="0" cy="0"/>
+          <a:chOff x="0" y="0"/>
+          <a:chExt cx="0" cy="0"/>
+        </a:xfrm>
+      </p:grpSpPr>
+      <p:sp>
+        <p:nvSpPr>
+          <p:cNvPr id="2" name="Title 1">
+            <a:extLst>
+              <a:ext uri="{FF2B5EF4-FFF2-40B4-BE49-F238E27FC236}">
+                <a16:creationId xmlns:a16="http://schemas.microsoft.com/office/drawing/2014/main" id="{81654682-97AD-1D8D-F2D1-E5F28017AE25}"/>
+              </a:ext>
+            </a:extLst>
+          </p:cNvPr>
+          <p:cNvSpPr>
+            <a:spLocks noGrp="1"/>
+          </p:cNvSpPr>
+          <p:nvPr>
+            <p:ph type="title"/>
+          </p:nvPr>
+        </p:nvSpPr>
+        <p:spPr/>
+        <p:txBody>
+          <a:bodyPr>
+            <a:normAutofit fontScale="90000"/>
+          </a:bodyPr>
+          <a:lstStyle/>
+          <a:p>
+            <a:r>
+              <a:rPr lang="en-US" dirty="0"/>
+              <a:t>Measures of correctness</a:t>
+            </a:r>
+          </a:p>
+        </p:txBody>
+      </p:sp>
+      <p:sp>
+        <p:nvSpPr>
+          <p:cNvPr id="3" name="Content Placeholder 2">
+            <a:extLst>
+              <a:ext uri="{FF2B5EF4-FFF2-40B4-BE49-F238E27FC236}">
+                <a16:creationId xmlns:a16="http://schemas.microsoft.com/office/drawing/2014/main" id="{FF3B533E-098A-AB07-5BD0-A182675FCD3A}"/>
+              </a:ext>
+            </a:extLst>
+          </p:cNvPr>
+          <p:cNvSpPr>
+            <a:spLocks noGrp="1"/>
+          </p:cNvSpPr>
+          <p:nvPr>
+            <p:ph idx="1"/>
+          </p:nvPr>
+        </p:nvSpPr>
+        <p:spPr>
+          <a:xfrm>
+            <a:off x="194359" y="1615790"/>
+            <a:ext cx="10972800" cy="3918803"/>
+          </a:xfrm>
+        </p:spPr>
+        <p:txBody>
+          <a:bodyPr/>
+          <a:lstStyle/>
+          <a:p>
+            <a:r>
+              <a:rPr lang="en-US" dirty="0"/>
+              <a:t>Sensitivity (Recall), Specificity </a:t>
+            </a:r>
+            <a:br>
+              <a:rPr lang="en-US" dirty="0"/>
+            </a:br>
+            <a:r>
+              <a:rPr lang="en-US" dirty="0"/>
+              <a:t>and Precision</a:t>
+            </a:r>
+          </a:p>
+          <a:p>
+            <a:r>
+              <a:rPr lang="en-US" dirty="0"/>
+              <a:t>Image credit: Wikipedia</a:t>
+            </a:r>
+          </a:p>
+        </p:txBody>
+      </p:sp>
+      <p:sp>
+        <p:nvSpPr>
+          <p:cNvPr id="4" name="Slide Number Placeholder 3">
+            <a:extLst>
+              <a:ext uri="{FF2B5EF4-FFF2-40B4-BE49-F238E27FC236}">
+                <a16:creationId xmlns:a16="http://schemas.microsoft.com/office/drawing/2014/main" id="{DA292D60-DA5E-14F9-0F07-0CB969D6706D}"/>
+              </a:ext>
+            </a:extLst>
+          </p:cNvPr>
+          <p:cNvSpPr>
+            <a:spLocks noGrp="1"/>
+          </p:cNvSpPr>
+          <p:nvPr>
+            <p:ph type="sldNum" sz="quarter" idx="12"/>
+          </p:nvPr>
+        </p:nvSpPr>
+        <p:spPr/>
+        <p:txBody>
+          <a:bodyPr/>
+          <a:lstStyle/>
+          <a:p>
+            <a:fld id="{B82CCC60-E8CD-4174-8B1A-7DF615B22EEF}" type="slidenum">
+              <a:rPr lang="en-US" smtClean="0"/>
+              <a:pPr/>
+              <a:t>8</a:t>
+            </a:fld>
+            <a:endParaRPr lang="en-US"/>
+          </a:p>
+        </p:txBody>
+      </p:sp>
+      <p:pic>
+        <p:nvPicPr>
+          <p:cNvPr id="5" name="Picture 4">
+            <a:extLst>
+              <a:ext uri="{FF2B5EF4-FFF2-40B4-BE49-F238E27FC236}">
+                <a16:creationId xmlns:a16="http://schemas.microsoft.com/office/drawing/2014/main" id="{F3340996-5475-CEF7-03C4-9CB816CECE89}"/>
+              </a:ext>
+            </a:extLst>
+          </p:cNvPr>
+          <p:cNvPicPr>
+            <a:picLocks noChangeAspect="1"/>
+          </p:cNvPicPr>
+          <p:nvPr/>
+        </p:nvPicPr>
+        <p:blipFill>
+          <a:blip r:embed="rId2"/>
+          <a:stretch>
+            <a:fillRect/>
+          </a:stretch>
+        </p:blipFill>
+        <p:spPr>
+          <a:xfrm>
+            <a:off x="8653094" y="-13861"/>
+            <a:ext cx="3538906" cy="6735337"/>
+          </a:xfrm>
+          <a:prstGeom prst="rect">
+            <a:avLst/>
+          </a:prstGeom>
+        </p:spPr>
+      </p:pic>
+      <p:pic>
+        <p:nvPicPr>
+          <p:cNvPr id="6" name="Picture 5">
+            <a:extLst>
+              <a:ext uri="{FF2B5EF4-FFF2-40B4-BE49-F238E27FC236}">
+                <a16:creationId xmlns:a16="http://schemas.microsoft.com/office/drawing/2014/main" id="{DEA48554-3C2E-C870-63A6-4244E37829CF}"/>
+              </a:ext>
+            </a:extLst>
+          </p:cNvPr>
+          <p:cNvPicPr>
+            <a:picLocks noChangeAspect="1"/>
+          </p:cNvPicPr>
+          <p:nvPr/>
+        </p:nvPicPr>
+        <p:blipFill>
+          <a:blip r:embed="rId3"/>
+          <a:stretch>
+            <a:fillRect/>
+          </a:stretch>
+        </p:blipFill>
+        <p:spPr>
+          <a:xfrm>
+            <a:off x="5216423" y="-13861"/>
+            <a:ext cx="3436671" cy="6858000"/>
+          </a:xfrm>
+          <a:prstGeom prst="rect">
+            <a:avLst/>
+          </a:prstGeom>
+        </p:spPr>
+      </p:pic>
+    </p:spTree>
+    <p:extLst>
+      <p:ext uri="{BB962C8B-B14F-4D97-AF65-F5344CB8AC3E}">
+        <p14:creationId xmlns:p14="http://schemas.microsoft.com/office/powerpoint/2010/main" val="664404228"/>
+      </p:ext>
+    </p:extLst>
+  </p:cSld>
+  <p:clrMapOvr>
+    <a:masterClrMapping/>
+  </p:clrMapOvr>
+</p:sld>
+</file>
+
+<file path=ppt/slides/slide9.xml><?xml version="1.0" encoding="utf-8"?>
+<p:sld xmlns:a="http://schemas.openxmlformats.org/drawingml/2006/main" xmlns:r="http://schemas.openxmlformats.org/officeDocument/2006/relationships" xmlns:p="http://schemas.openxmlformats.org/presentationml/2006/main">
+  <p:cSld>
+    <p:spTree>
+      <p:nvGrpSpPr>
+        <p:cNvPr id="1" name=""/>
+        <p:cNvGrpSpPr/>
+        <p:nvPr/>
+      </p:nvGrpSpPr>
+      <p:grpSpPr>
+        <a:xfrm>
+          <a:off x="0" y="0"/>
+          <a:ext cx="0" cy="0"/>
+          <a:chOff x="0" y="0"/>
+          <a:chExt cx="0" cy="0"/>
+        </a:xfrm>
+      </p:grpSpPr>
+      <p:sp>
+        <p:nvSpPr>
+          <p:cNvPr id="2" name="Title 1">
+            <a:extLst>
+              <a:ext uri="{FF2B5EF4-FFF2-40B4-BE49-F238E27FC236}">
+                <a16:creationId xmlns:a16="http://schemas.microsoft.com/office/drawing/2014/main" id="{C72832CB-7DC8-E108-E32D-654A3AC76EE4}"/>
+              </a:ext>
+            </a:extLst>
+          </p:cNvPr>
+          <p:cNvSpPr>
+            <a:spLocks noGrp="1"/>
+          </p:cNvSpPr>
+          <p:nvPr>
+            <p:ph type="title"/>
+          </p:nvPr>
+        </p:nvSpPr>
+        <p:spPr/>
+        <p:txBody>
+          <a:bodyPr>
+            <a:normAutofit fontScale="90000"/>
+          </a:bodyPr>
+          <a:lstStyle/>
+          <a:p>
+            <a:r>
+              <a:rPr lang="en-US" dirty="0"/>
+              <a:t>Sensitivity and Specificity</a:t>
+            </a:r>
+          </a:p>
+        </p:txBody>
+      </p:sp>
+      <p:sp>
+        <p:nvSpPr>
+          <p:cNvPr id="4" name="Slide Number Placeholder 3">
+            <a:extLst>
+              <a:ext uri="{FF2B5EF4-FFF2-40B4-BE49-F238E27FC236}">
+                <a16:creationId xmlns:a16="http://schemas.microsoft.com/office/drawing/2014/main" id="{2F6C5A7E-4A1D-EB66-7BAD-92F3F8D03BA0}"/>
+              </a:ext>
+            </a:extLst>
+          </p:cNvPr>
+          <p:cNvSpPr>
+            <a:spLocks noGrp="1"/>
+          </p:cNvSpPr>
+          <p:nvPr>
+            <p:ph type="sldNum" sz="quarter" idx="12"/>
+          </p:nvPr>
+        </p:nvSpPr>
+        <p:spPr/>
+        <p:txBody>
+          <a:bodyPr/>
+          <a:lstStyle/>
+          <a:p>
+            <a:fld id="{B82CCC60-E8CD-4174-8B1A-7DF615B22EEF}" type="slidenum">
+              <a:rPr lang="en-US" smtClean="0"/>
+              <a:pPr/>
+              <a:t>9</a:t>
+            </a:fld>
+            <a:endParaRPr lang="en-US"/>
+          </a:p>
+        </p:txBody>
+      </p:sp>
+      <p:pic>
+        <p:nvPicPr>
+          <p:cNvPr id="5" name="Content Placeholder 4">
+            <a:extLst>
+              <a:ext uri="{FF2B5EF4-FFF2-40B4-BE49-F238E27FC236}">
+                <a16:creationId xmlns:a16="http://schemas.microsoft.com/office/drawing/2014/main" id="{0955CE53-1B01-98F3-BE32-FB789CB90F63}"/>
+              </a:ext>
+            </a:extLst>
+          </p:cNvPr>
+          <p:cNvPicPr>
+            <a:picLocks noGrp="1" noChangeAspect="1"/>
+          </p:cNvPicPr>
+          <p:nvPr>
+            <p:ph idx="1"/>
+          </p:nvPr>
+        </p:nvPicPr>
+        <p:blipFill>
+          <a:blip r:embed="rId2"/>
+          <a:stretch>
+            <a:fillRect/>
+          </a:stretch>
+        </p:blipFill>
+        <p:spPr>
+          <a:xfrm>
+            <a:off x="992422" y="2019417"/>
+            <a:ext cx="9010650" cy="3400425"/>
+          </a:xfrm>
+          <a:prstGeom prst="rect">
+            <a:avLst/>
+          </a:prstGeom>
+        </p:spPr>
+      </p:pic>
+    </p:spTree>
+    <p:extLst>
+      <p:ext uri="{BB962C8B-B14F-4D97-AF65-F5344CB8AC3E}">
+        <p14:creationId xmlns:p14="http://schemas.microsoft.com/office/powerpoint/2010/main" val="3256696827"/>
       </p:ext>
     </p:extLst>
   </p:cSld>
